--- a/practice/day3_slides/day3_practice_slides.pptx
+++ b/practice/day3_slides/day3_practice_slides.pptx
@@ -3749,7 +3749,8 @@
           <a:p>
             <a:r>
               <a:rPr lang="en-US" dirty="0"/>
-              <a:t>- 원 논문은 64×64 RGB, WGAN-GP critic, GPU 학습 조건. 실습 결과와 같은 선상에서 비교하지 않음.
+              <a:t>- 세 데이터셋 모두 클래스별 FID가 최고 또는 차상위(논문 Table 2). ODIR-5k 행만 FID가 아니라 증강 후 분류 성능(Table 1)임.
+- 원 논문은 64×64 RGB, WGAN-GP critic, GPU 학습 조건. 실습 결과와 같은 선상에서 비교하지 않음.
 - 비교 대상에 diffusion 모델(DiT)까지 포함되어 있다는 점, IBM 실기기(ibm_marrakesh)에서 추론을 검증했다는 점을 짚음.
 - 시사점: '생성자 전체를 양자로'보다 '전역 구조는 고전, 세부는 양자'인 layer-level hybrid가 더 높은 해상도로 확장되고 있음.</a:t>
             </a:r>
@@ -4202,7 +4203,7 @@
               <a:t>- checkpoint는 가중치(state_dict)만 저장하므로, 불러오기 전에 같은 모양의 모델을 먼저 만들어야 함. 모양이 다르면 load_state_dict가 오류를 냄.
 - 그래서 학습 스크립트가 config(sub-generator 수, 큐빗 수, depth 등)를 함께 저장함. 클래스의 인자 기본값은 쓰이지 않음.
 - map_location='cpu': GPU에서 저장한 파일도 CPU에서 열 수 있게 함.
-- MediQ-GAN checkpoint에는 판별자 가중치도 들어 있음 - 미세조정할 때 판별자도 같은 시점 상태로 불러와야 균형이 유지됨.</a:t>
+- 강사 checkpoint(QGAN·MediQ-GAN)에는 판별자 가중치도 들어 있음. 2일차 §7에서 각자 저장한 파일에는 없음. MediQ-GAN을 미세조정할 때 판별자도 같은 시점 상태로 불러와야 균형이 유지됨.</a:t>
             </a:r>
             <a:endParaRPr lang="en-US" dirty="0"/>
           </a:p>
@@ -8263,6 +8264,10 @@
             <a:prstDash val="solid"/>
           </a:ln>
         </p:spPr>
+        <p:txBody>
+          <a:bodyPr/>
+          <a:p/>
+        </p:txBody>
       </p:sp>
       <p:sp>
         <p:nvSpPr>
@@ -8338,6 +8343,10 @@
             <a:prstDash val="solid"/>
           </a:ln>
         </p:spPr>
+        <p:txBody>
+          <a:bodyPr/>
+          <a:p/>
+        </p:txBody>
       </p:sp>
       <p:sp>
         <p:nvSpPr>
@@ -8413,6 +8422,10 @@
             <a:prstDash val="solid"/>
           </a:ln>
         </p:spPr>
+        <p:txBody>
+          <a:bodyPr/>
+          <a:p/>
+        </p:txBody>
       </p:sp>
       <p:sp>
         <p:nvSpPr>
@@ -8488,6 +8501,10 @@
             <a:prstDash val="solid"/>
           </a:ln>
         </p:spPr>
+        <p:txBody>
+          <a:bodyPr/>
+          <a:p/>
+        </p:txBody>
       </p:sp>
       <p:sp>
         <p:nvSpPr>
@@ -8563,6 +8580,10 @@
             <a:prstDash val="solid"/>
           </a:ln>
         </p:spPr>
+        <p:txBody>
+          <a:bodyPr/>
+          <a:p/>
+        </p:txBody>
       </p:sp>
       <p:sp>
         <p:nvSpPr>
@@ -8638,6 +8659,10 @@
             <a:prstDash val="solid"/>
           </a:ln>
         </p:spPr>
+        <p:txBody>
+          <a:bodyPr/>
+          <a:p/>
+        </p:txBody>
       </p:sp>
       <p:sp>
         <p:nvSpPr>
@@ -8713,6 +8738,10 @@
             <a:prstDash val="solid"/>
           </a:ln>
         </p:spPr>
+        <p:txBody>
+          <a:bodyPr/>
+          <a:p/>
+        </p:txBody>
       </p:sp>
       <p:sp>
         <p:nvSpPr>
@@ -8788,6 +8817,10 @@
             <a:prstDash val="solid"/>
           </a:ln>
         </p:spPr>
+        <p:txBody>
+          <a:bodyPr/>
+          <a:p/>
+        </p:txBody>
       </p:sp>
       <p:sp>
         <p:nvSpPr>
@@ -8863,6 +8896,10 @@
             <a:prstDash val="solid"/>
           </a:ln>
         </p:spPr>
+        <p:txBody>
+          <a:bodyPr/>
+          <a:p/>
+        </p:txBody>
       </p:sp>
       <p:sp>
         <p:nvSpPr>
@@ -8938,6 +8975,10 @@
             <a:prstDash val="solid"/>
           </a:ln>
         </p:spPr>
+        <p:txBody>
+          <a:bodyPr/>
+          <a:p/>
+        </p:txBody>
       </p:sp>
       <p:sp>
         <p:nvSpPr>
@@ -9013,6 +9054,10 @@
             <a:prstDash val="solid"/>
           </a:ln>
         </p:spPr>
+        <p:txBody>
+          <a:bodyPr/>
+          <a:p/>
+        </p:txBody>
       </p:sp>
       <p:sp>
         <p:nvSpPr>
@@ -9088,6 +9133,10 @@
             <a:prstDash val="solid"/>
           </a:ln>
         </p:spPr>
+        <p:txBody>
+          <a:bodyPr/>
+          <a:p/>
+        </p:txBody>
       </p:sp>
       <p:sp>
         <p:nvSpPr>
@@ -9163,6 +9212,10 @@
             <a:prstDash val="solid"/>
           </a:ln>
         </p:spPr>
+        <p:txBody>
+          <a:bodyPr/>
+          <a:p/>
+        </p:txBody>
       </p:sp>
       <p:sp>
         <p:nvSpPr>
@@ -9238,6 +9291,10 @@
             <a:prstDash val="solid"/>
           </a:ln>
         </p:spPr>
+        <p:txBody>
+          <a:bodyPr/>
+          <a:p/>
+        </p:txBody>
       </p:sp>
       <p:sp>
         <p:nvSpPr>
@@ -9313,6 +9370,10 @@
             <a:prstDash val="solid"/>
           </a:ln>
         </p:spPr>
+        <p:txBody>
+          <a:bodyPr/>
+          <a:p/>
+        </p:txBody>
       </p:sp>
       <p:sp>
         <p:nvSpPr>
@@ -9388,6 +9449,10 @@
             <a:prstDash val="solid"/>
           </a:ln>
         </p:spPr>
+        <p:txBody>
+          <a:bodyPr/>
+          <a:p/>
+        </p:txBody>
       </p:sp>
       <p:sp>
         <p:nvSpPr>
@@ -9496,6 +9561,10 @@
           </a:solidFill>
           <a:ln/>
         </p:spPr>
+        <p:txBody>
+          <a:bodyPr/>
+          <a:p/>
+        </p:txBody>
       </p:sp>
       <p:sp>
         <p:nvSpPr>
@@ -9613,7 +9682,7 @@
                 <a:ea typeface="Courier New" pitchFamily="34" charset="-122"/>
                 <a:cs typeface="Courier New" pitchFamily="34" charset="-120"/>
               </a:rPr>
-              <a:t>    outs = [self.q_circuit(tokens[b, si],</a:t>
+              <a:t>    outs = torch.stack([torch.stack(self.q_circuit(</a:t>
             </a:r>
             <a:endParaRPr lang="en-US" sz="1150" dirty="0"/>
           </a:p>
@@ -9633,7 +9702,7 @@
                 <a:ea typeface="Courier New" pitchFamily="34" charset="-122"/>
                 <a:cs typeface="Courier New" pitchFamily="34" charset="-120"/>
               </a:rPr>
-              <a:t>                           self.q_weights[g])</a:t>
+              <a:t>                tokens[b, si], self.q_weights[g]))</a:t>
             </a:r>
             <a:endParaRPr lang="en-US" sz="1150" dirty="0"/>
           </a:p>
@@ -9653,7 +9722,7 @@
                 <a:ea typeface="Courier New" pitchFamily="34" charset="-122"/>
                 <a:cs typeface="Courier New" pitchFamily="34" charset="-120"/>
               </a:rPr>
-              <a:t>            for b in range(B)]          # B x 16 expvals</a:t>
+              <a:t>        for b in range(B)])           # (B, 16) expvals</a:t>
             </a:r>
             <a:endParaRPr lang="en-US" sz="1150" dirty="0"/>
           </a:p>
@@ -9740,6 +9809,10 @@
           </a:solidFill>
           <a:ln/>
         </p:spPr>
+        <p:txBody>
+          <a:bodyPr/>
+          <a:p/>
+        </p:txBody>
       </p:sp>
       <p:sp>
         <p:nvSpPr>
@@ -21518,7 +21591,7 @@
                             <a:schemeClr val="tx1"/>
                           </a:solidFill>
                         </a:rPr>
-                        <a:t>소수클래스(df, vasc, scc)에서 모든 고전 baseline 대비 최고 또는 차상위 FID</a:t>
+                        <a:t>소수클래스(df, vasc, scc)에서 모든 고전 baseline보다 낮은 FID</a:t>
                       </a:r>
                       <a:endParaRPr lang="en-US" sz="1300" dirty="0"/>
                     </a:p>
@@ -21703,7 +21776,7 @@
                             <a:schemeClr val="tx1"/>
                           </a:solidFill>
                         </a:rPr>
-                        <a:t>두 backbone 모두에서 최고 성능</a:t>
+                        <a:t>증강 후 분류: 두 backbone(EfficientNet-B0, ViT-small) 모두 최고 성능</a:t>
                       </a:r>
                       <a:endParaRPr lang="en-US" sz="1300" dirty="0"/>
                     </a:p>
@@ -21961,6 +22034,10 @@
           </a:solidFill>
           <a:ln/>
         </p:spPr>
+        <p:txBody>
+          <a:bodyPr/>
+          <a:p/>
+        </p:txBody>
       </p:sp>
       <p:sp>
         <p:nvSpPr>
@@ -22028,7 +22105,7 @@
                   <a:schemeClr val="tx1"/>
                 </a:solidFill>
               </a:rPr>
-              <a:t>DCGAN, WGAN-GP, StyleGAN2-ADA, FastGAN, diffusion(DiT), 이전 세대 hybrid 모델 MosaiQ</a:t>
+              <a:t>DCGAN, WGAN-GP, Structure-Preserving GAN, StyleGAN2-ADA, FastGAN, DiT · Stable Diffusion 3(LoRA 미세조정), 이전 세대 hybrid 모델 MosaiQ</a:t>
             </a:r>
             <a:endParaRPr lang="en-US" sz="1300" dirty="0"/>
           </a:p>
@@ -22055,6 +22132,10 @@
           </a:solidFill>
           <a:ln/>
         </p:spPr>
+        <p:txBody>
+          <a:bodyPr/>
+          <a:p/>
+        </p:txBody>
       </p:sp>
       <p:sp>
         <p:nvSpPr>
@@ -25842,7 +25923,7 @@
                             <a:schemeClr val="tx1"/>
                           </a:solidFill>
                         </a:rPr>
-                        <a:t>판별자 가중치 (MediQ-GAN만)</a:t>
+                        <a:t>판별자 가중치</a:t>
                       </a:r>
                       <a:endParaRPr lang="en-US" sz="1200" dirty="0"/>
                     </a:p>

--- a/practice/day3_slides/day3_practice_slides.pptx
+++ b/practice/day3_slides/day3_practice_slides.pptx
@@ -28,10 +28,9 @@
     <p:sldId id="276" r:id="rId22"/>
     <p:sldId id="277" r:id="rId23"/>
     <p:sldId id="278" r:id="rId24"/>
-    <p:sldId id="279" r:id="rId25"/>
   </p:sldIdLst>
   <p:notesMasterIdLst>
-    <p:notesMasterId r:id="rId26"/>
+    <p:notesMasterId r:id="rId25"/>
   </p:notesMasterIdLst>
   <p:sldSz cx="12192000" cy="6858000"/>
   <p:notesSz cx="6858000" cy="12192000"/>
@@ -130,17 +129,17 @@
   <p:extLst>
     <p:ext uri="{521415D9-36F7-43E2-AB2F-B90AF26B5E84}">
       <p14:sectionLst xmlns:p14="http://schemas.microsoft.com/office/powerpoint/2010/main">
-        <p14:section name="표지" id="{274a826f-72e5-5ec5-7d47-bba55b0aed5a}">
+        <p14:section name="표지" id="{cf765830-3f67-9aa5-c89c-64f5499b8c8f}">
           <p14:sldIdLst>
             <p14:sldId id="256"/>
           </p14:sldIdLst>
         </p14:section>
-        <p14:section name="진행" id="{bd9b810c-83fa-2a83-9bee-47964d040066}">
+        <p14:section name="진행" id="{c53d02ac-6adb-fe1c-9b0f-315038554bfb}">
           <p14:sldIdLst>
             <p14:sldId id="257"/>
           </p14:sldIdLst>
         </p14:section>
-        <p14:section name="PART 0 · 2일차 복습과 기준선" id="{df986223-1454-146e-97bd-8f248a831dfc}">
+        <p14:section name="PART 0 · 2일차 복습과 기준선" id="{03e647f3-226d-0b7b-be03-f5698d3cd653}">
           <p14:sldIdLst>
             <p14:sldId id="258"/>
             <p14:sldId id="259"/>
@@ -148,7 +147,7 @@
             <p14:sldId id="261"/>
           </p14:sldIdLst>
         </p14:section>
-        <p14:section name="PART 1 · MediQ-GAN 구조" id="{13de22b9-1821-d1f0-4b43-fd6a9bddd4a4}">
+        <p14:section name="PART 1 · MediQ-GAN 구조" id="{27ba2fb5-d7cc-0f08-c9c5-003473fba549}">
           <p14:sldIdLst>
             <p14:sldId id="262"/>
             <p14:sldId id="263"/>
@@ -159,7 +158,7 @@
             <p14:sldId id="268"/>
           </p14:sldIdLst>
         </p14:section>
-        <p14:section name="PART 2 · 라이브 미세조정" id="{f05366de-42dc-dffa-4233-7db2cd628ce3}">
+        <p14:section name="PART 2 · 라이브 미세조정" id="{27de60df-3339-a282-71d4-ef857adba588}">
           <p14:sldIdLst>
             <p14:sldId id="269"/>
             <p14:sldId id="270"/>
@@ -167,23 +166,22 @@
             <p14:sldId id="272"/>
           </p14:sldIdLst>
         </p14:section>
-        <p14:section name="PART 3 · 비교" id="{41c9edee-3f65-3137-27c6-87f5589d7c39}">
+        <p14:section name="PART 3 · 비교" id="{5e18da71-6dab-d824-cd3b-9e3356a0941d}">
           <p14:sldIdLst>
             <p14:sldId id="273"/>
             <p14:sldId id="274"/>
             <p14:sldId id="275"/>
           </p14:sldIdLst>
         </p14:section>
-        <p14:section name="PART 4 · 토론" id="{d0bd8d36-7a7b-a4db-e3d6-e7751133b9a1}">
+        <p14:section name="PART 4 · 토론" id="{61401e36-5940-f061-f41b-16132c3a1cac}">
           <p14:sldIdLst>
             <p14:sldId id="276"/>
             <p14:sldId id="277"/>
-            <p14:sldId id="278"/>
           </p14:sldIdLst>
         </p14:section>
-        <p14:section name="정리" id="{4641745c-a218-d1b1-2014-7ebad7ae472b}">
+        <p14:section name="정리" id="{71244233-029a-80d8-813e-4b6042f9fa46}">
           <p14:sldIdLst>
-            <p14:sldId id="279"/>
+            <p14:sldId id="278"/>
           </p14:sldIdLst>
         </p14:section>
       </p14:sectionLst>
@@ -2155,9 +2153,8 @@
           <a:p>
             <a:r>
               <a:rPr lang="en-US" dirty="0"/>
-              <a:t>3일차 노트북(practice/day3_practice.ipynb)을 진행하면서 실습 블록 사이에 띄우는 설명 자료.
-- 2일차 자료와 같은 구성: 코드 중심, 각 파트 첫 장에 노트북 섹션 표시.
-- 3일차는 일정이 짧으므로 PART 1(구조)과 PART 3(비교)을 우선하고, PART 4는 시간에 맞춰 조절함.</a:t>
+              <a:t>3일차 노트북(practice/day3_practice.ipynb)의 내용을 설명하는 자료.
+- 2일차 자료와 같은 구성: 코드 중심, 각 PART 첫 장에 해당 노트북 섹션을 표시함.</a:t>
             </a:r>
             <a:endParaRPr lang="en-US" dirty="0"/>
           </a:p>
@@ -2609,7 +2606,7 @@
           <a:p>
             <a:r>
               <a:rPr lang="en-US" dirty="0"/>
-              <a:t>§4 미세조정 셀을 실행한 직후 시작함. 1 step 약 20초라 20 step이면 로컬 기준 약 7분.</a:t>
+              <a:t>1 step 약 20초라 20 step이면 로컬 기준 약 7분.</a:t>
             </a:r>
             <a:endParaRPr lang="en-US" dirty="0"/>
           </a:p>
@@ -2970,7 +2967,7 @@
           <a:p>
             <a:r>
               <a:rPr lang="en-US" dirty="0"/>
-              <a:t>§5 비교 셀을 실행하기 전에 진행함.</a:t>
+              <a:t/>
             </a:r>
             <a:endParaRPr lang="en-US" dirty="0"/>
           </a:p>
@@ -3152,7 +3149,7 @@
               <a:rPr lang="en-US" dirty="0"/>
               <a:t>- 3일차는 학습 없이 checkpoint를 불러오는 셀이 대부분이라 수 초 안에 끝남.
 - 시간이 걸리는 셀: §3 구조 확인(16큐빗 회로 5개 forward, 십여 초), §4 미세조정 20 step(로컬 실측 약 7분, Colab은 더 걸림).
-- §4 셀을 먼저 실행해 두고 PART 2를 설명하면 대기 시간을 설명 시간으로 씀. 진행 로그의 '남은 예상' 시간을 보고 step 수를 줄여도 됨.</a:t>
+- 진행 로그의 '남은 예상' 시간을 보고 step 수를 줄여도 됨.</a:t>
             </a:r>
             <a:endParaRPr lang="en-US" dirty="0"/>
           </a:p>
@@ -3515,12 +3512,7 @@
           <a:p>
             <a:r>
               <a:rPr lang="en-US" dirty="0"/>
-              <a:t>답
-1. QGAN은 생성자 전체가 양자회로(model-level), MediQ-GAN은 생성자 안의 양자 stream 한 갈래만 양자회로(layer-level). 파라미터 비율로 QGAN 100%, MediQ-GAN 약 2%.
-2. load_state_dict는 같은 모양의 모델에만 가중치를 넣을 수 있으므로, 저장 당시 구조(sub-generator 수, 큐빗 수, depth)를 알아야 같은 모델을 먼저 만들 수 있음.
-3. 출력이 확률이 아니라 PauliX 기댓값(큐빗당 1개)이라 합이 1로 묶이는 정규화 제약이 없음. 최종 이미지는 고전 decoder가 만듦.
-4. 클래스 평균 상관은 평균 형태만 보므로, 같은 평균 이미지를 반복해도 높게 나옴. 다양성(0.30)이 실제의 1/8이라 mode collapse 경향.
-5. 판별자가 너무 빨리 이겨 생성자가 학습 신호를 잃음(loss_d → 0). WGAN-GP critic은 gradient penalty로 판별자를 제약함.</a:t>
+              <a:t>오늘 다룬 내용을 PART 순서대로 정리함.</a:t>
             </a:r>
             <a:endParaRPr lang="en-US" dirty="0"/>
           </a:p>
@@ -3544,95 +3536,6 @@
             <a:fld id="{F7021451-1387-4CA6-816F-3879F97B5CBC}" type="slidenum">
               <a:rPr lang="en-US"/>
               <a:t>23</a:t>
-            </a:fld>
-            <a:endParaRPr lang="en-US"/>
-          </a:p>
-        </p:txBody>
-      </p:sp>
-    </p:spTree>
-    <p:extLst>
-      <p:ext uri="{BB962C8B-B14F-4D97-AF65-F5344CB8AC3E}">
-        <p14:creationId xmlns:p14="http://schemas.microsoft.com/office/powerpoint/2010/main" val="1024086991"/>
-      </p:ext>
-    </p:extLst>
-  </p:cSld>
-  <p:clrMapOvr>
-    <a:masterClrMapping/>
-  </p:clrMapOvr>
-</p:notes>
-</file>
-
-<file path=ppt/notesSlides/notesSlide24.xml><?xml version="1.0" encoding="utf-8"?>
-<p:notes xmlns:a="http://schemas.openxmlformats.org/drawingml/2006/main" xmlns:r="http://schemas.openxmlformats.org/officeDocument/2006/relationships" xmlns:p="http://schemas.openxmlformats.org/presentationml/2006/main">
-  <p:cSld>
-    <p:spTree>
-      <p:nvGrpSpPr>
-        <p:cNvPr id="1" name=""/>
-        <p:cNvGrpSpPr/>
-        <p:nvPr/>
-      </p:nvGrpSpPr>
-      <p:grpSpPr>
-        <a:xfrm>
-          <a:off x="0" y="0"/>
-          <a:ext cx="0" cy="0"/>
-          <a:chOff x="0" y="0"/>
-          <a:chExt cx="0" cy="0"/>
-        </a:xfrm>
-      </p:grpSpPr>
-      <p:sp>
-        <p:nvSpPr>
-          <p:cNvPr id="2" name="Slide Image Placeholder 1"/>
-          <p:cNvSpPr>
-            <a:spLocks noGrp="1" noRot="1" noChangeAspect="1"/>
-          </p:cNvSpPr>
-          <p:nvPr>
-            <p:ph type="sldImg"/>
-          </p:nvPr>
-        </p:nvSpPr>
-        <p:spPr/>
-      </p:sp>
-      <p:sp>
-        <p:nvSpPr>
-          <p:cNvPr id="3" name="Notes Placeholder 2"/>
-          <p:cNvSpPr>
-            <a:spLocks noGrp="1"/>
-          </p:cNvSpPr>
-          <p:nvPr>
-            <p:ph type="body" idx="1"/>
-          </p:nvPr>
-        </p:nvSpPr>
-        <p:spPr/>
-        <p:txBody>
-          <a:bodyPr/>
-          <a:lstStyle/>
-          <a:p>
-            <a:r>
-              <a:rPr lang="en-US" dirty="0"/>
-              <a:t>- 1일차 이론, 2일차 QGAN 구현·학습, 3일차 MediQ-GAN 미세조정·비교의 흐름을 정리함.
-- 결론은 '어느 모델이 이겼다'가 아니라, 지표를 함께 봐야 하고 양자 부분의 비용과 고전 쪽 안정화가 결과를 좌우한다는 것.</a:t>
-            </a:r>
-            <a:endParaRPr lang="en-US" dirty="0"/>
-          </a:p>
-        </p:txBody>
-      </p:sp>
-      <p:sp>
-        <p:nvSpPr>
-          <p:cNvPr id="4" name="Slide Number Placeholder 3"/>
-          <p:cNvSpPr>
-            <a:spLocks noGrp="1"/>
-          </p:cNvSpPr>
-          <p:nvPr>
-            <p:ph type="sldNum" sz="quarter" idx="10"/>
-          </p:nvPr>
-        </p:nvSpPr>
-        <p:spPr/>
-        <p:txBody>
-          <a:bodyPr/>
-          <a:lstStyle/>
-          <a:p>
-            <a:fld id="{F7021451-1387-4CA6-816F-3879F97B5CBC}" type="slidenum">
-              <a:rPr lang="en-US"/>
-              <a:t>24</a:t>
             </a:fld>
             <a:endParaRPr lang="en-US"/>
           </a:p>
@@ -3697,7 +3600,7 @@
           <a:p>
             <a:r>
               <a:rPr lang="en-US" dirty="0"/>
-              <a:t>§1 셀(설치·clone)을 실행하는 동안 진행함.</a:t>
+              <a:t/>
             </a:r>
             <a:endParaRPr lang="en-US" dirty="0"/>
           </a:p>
@@ -4056,7 +3959,7 @@
           <a:p>
             <a:r>
               <a:rPr lang="en-US" dirty="0"/>
-              <a:t>§3 셀(ToyDualStreamGenerator 정의 + forward 1회)을 실행하기 전에 진행함.</a:t>
+              <a:t/>
             </a:r>
             <a:endParaRPr lang="en-US" dirty="0"/>
           </a:p>
@@ -4316,7 +4219,7 @@
     <p:bg>
       <p:bgPr>
         <a:solidFill>
-          <a:schemeClr val="tx2"/>
+          <a:srgbClr val="1E3932"/>
         </a:solidFill>
       </p:bgPr>
     </p:bg>
@@ -4360,7 +4263,7 @@
               <a:buNone/>
               <a:defRPr lang="en-US" sz="1300" b="1" spc="100" kern="0" dirty="0">
                 <a:solidFill>
-                  <a:schemeClr val="bg1"/>
+                  <a:srgbClr val="FFFFFF"/>
                 </a:solidFill>
               </a:defRPr>
             </a:lvl1pPr>
@@ -4399,7 +4302,7 @@
               <a:buNone/>
               <a:defRPr lang="en-US" sz="4000" b="1" dirty="0">
                 <a:solidFill>
-                  <a:schemeClr val="bg1"/>
+                  <a:srgbClr val="FFFFFF"/>
                 </a:solidFill>
               </a:defRPr>
             </a:lvl1pPr>
@@ -4438,7 +4341,7 @@
               <a:buNone/>
               <a:defRPr lang="en-US" sz="2800" b="1" dirty="0">
                 <a:solidFill>
-                  <a:schemeClr val="accent3"/>
+                  <a:srgbClr val="DFC49D"/>
                 </a:solidFill>
               </a:defRPr>
             </a:lvl1pPr>
@@ -4481,7 +4384,7 @@
             <a:lvl1pPr>
               <a:defRPr sz="1000">
                 <a:solidFill>
-                  <a:schemeClr val="accent6"/>
+                  <a:srgbClr val="6B6B6B"/>
                 </a:solidFill>
               </a:defRPr>
             </a:lvl1pPr>
@@ -4510,7 +4413,7 @@
     <p:bg>
       <p:bgPr>
         <a:solidFill>
-          <a:schemeClr val="tx2"/>
+          <a:srgbClr val="1E3932"/>
         </a:solidFill>
       </p:bgPr>
     </p:bg>
@@ -4554,7 +4457,7 @@
               <a:buNone/>
               <a:defRPr lang="en-US" sz="1200" b="1" spc="100" kern="0" dirty="0">
                 <a:solidFill>
-                  <a:schemeClr val="accent3"/>
+                  <a:srgbClr val="DFC49D"/>
                 </a:solidFill>
               </a:defRPr>
             </a:lvl1pPr>
@@ -4593,7 +4496,7 @@
               <a:buNone/>
               <a:defRPr lang="en-US" sz="3600" b="1" dirty="0">
                 <a:solidFill>
-                  <a:schemeClr val="bg1"/>
+                  <a:srgbClr val="FFFFFF"/>
                 </a:solidFill>
               </a:defRPr>
             </a:lvl1pPr>
@@ -4632,7 +4535,7 @@
               <a:buNone/>
               <a:defRPr lang="en-US" sz="1500" dirty="0">
                 <a:solidFill>
-                  <a:schemeClr val="bg2"/>
+                  <a:srgbClr val="F2F0EB"/>
                 </a:solidFill>
               </a:defRPr>
             </a:lvl1pPr>
@@ -4675,7 +4578,7 @@
             <a:lvl1pPr>
               <a:defRPr sz="1000">
                 <a:solidFill>
-                  <a:schemeClr val="accent6"/>
+                  <a:srgbClr val="6B6B6B"/>
                 </a:solidFill>
               </a:defRPr>
             </a:lvl1pPr>
@@ -4704,7 +4607,7 @@
     <p:bg>
       <p:bgPr>
         <a:solidFill>
-          <a:schemeClr val="bg1"/>
+          <a:srgbClr val="FFFFFF"/>
         </a:solidFill>
       </p:bgPr>
     </p:bg>
@@ -4748,7 +4651,7 @@
               <a:buNone/>
               <a:defRPr lang="en-US" sz="1200" b="1" spc="100" kern="0" dirty="0">
                 <a:solidFill>
-                  <a:schemeClr val="accent1"/>
+                  <a:srgbClr val="00754A"/>
                 </a:solidFill>
               </a:defRPr>
             </a:lvl1pPr>
@@ -4787,7 +4690,7 @@
               <a:buNone/>
               <a:defRPr lang="en-US" sz="3000" b="1" dirty="0">
                 <a:solidFill>
-                  <a:schemeClr val="tx1"/>
+                  <a:srgbClr val="212121"/>
                 </a:solidFill>
               </a:defRPr>
             </a:lvl1pPr>
@@ -4826,7 +4729,7 @@
               <a:buNone/>
               <a:defRPr lang="en-US" sz="1400" dirty="0">
                 <a:solidFill>
-                  <a:schemeClr val="accent6"/>
+                  <a:srgbClr val="6B6B6B"/>
                 </a:solidFill>
               </a:defRPr>
             </a:lvl1pPr>
@@ -4869,7 +4772,7 @@
             <a:lvl1pPr>
               <a:defRPr sz="1000">
                 <a:solidFill>
-                  <a:schemeClr val="accent6"/>
+                  <a:srgbClr val="6B6B6B"/>
                 </a:solidFill>
               </a:defRPr>
             </a:lvl1pPr>
@@ -4939,7 +4842,7 @@
             <a:lvl1pPr>
               <a:defRPr sz="1000">
                 <a:solidFill>
-                  <a:schemeClr val="accent6"/>
+                  <a:srgbClr val="6B6B6B"/>
                 </a:solidFill>
               </a:defRPr>
             </a:lvl1pPr>
@@ -5263,7 +5166,7 @@
             <a:r>
               <a:rPr lang="en-US" sz="1300" b="1" spc="100" kern="0" dirty="0">
                 <a:solidFill>
-                  <a:schemeClr val="bg1"/>
+                  <a:srgbClr val="FFFFFF"/>
                 </a:solidFill>
               </a:rPr>
               <a:t>QML Lecture · 3일차</a:t>
@@ -5301,7 +5204,7 @@
             <a:r>
               <a:rPr lang="en-US" sz="4000" b="1" dirty="0">
                 <a:solidFill>
-                  <a:schemeClr val="bg1"/>
+                  <a:srgbClr val="FFFFFF"/>
                 </a:solidFill>
               </a:rPr>
               <a:t>실습 설명 자료</a:t>
@@ -5339,7 +5242,7 @@
             <a:r>
               <a:rPr lang="en-US" sz="2800" b="1" dirty="0">
                 <a:solidFill>
-                  <a:schemeClr val="accent3"/>
+                  <a:srgbClr val="DFC49D"/>
                 </a:solidFill>
               </a:rPr>
               <a:t>MediQ-GAN 미세조정 → QGAN과 같은 지표로 비교</a:t>
@@ -5363,11 +5266,11 @@
             <a:avLst/>
           </a:prstGeom>
           <a:solidFill>
-            <a:schemeClr val="tx2"/>
+            <a:srgbClr val="1E3932"/>
           </a:solidFill>
           <a:ln w="15875">
             <a:solidFill>
-              <a:schemeClr val="accent1"/>
+              <a:srgbClr val="00754A"/>
             </a:solidFill>
             <a:prstDash val="solid"/>
           </a:ln>
@@ -5388,7 +5291,7 @@
             <a:avLst/>
           </a:prstGeom>
           <a:solidFill>
-            <a:schemeClr val="accent1"/>
+            <a:srgbClr val="00754A"/>
           </a:solidFill>
           <a:ln/>
         </p:spPr>
@@ -5423,7 +5326,7 @@
             <a:lvl1pPr>
               <a:defRPr sz="1000">
                 <a:solidFill>
-                  <a:schemeClr val="accent6"/>
+                  <a:srgbClr val="6B6B6B"/>
                 </a:solidFill>
               </a:defRPr>
             </a:lvl1pPr>
@@ -5492,7 +5395,7 @@
             <a:r>
               <a:rPr lang="en-US" sz="1200" b="1" spc="100" kern="0" dirty="0">
                 <a:solidFill>
-                  <a:schemeClr val="accent1"/>
+                  <a:srgbClr val="00754A"/>
                 </a:solidFill>
               </a:rPr>
               <a:t>PART 1 · 노트북 §3 코드</a:t>
@@ -5530,7 +5433,7 @@
             <a:r>
               <a:rPr lang="en-US" sz="3000" b="1" dirty="0">
                 <a:solidFill>
-                  <a:schemeClr val="tx1"/>
+                  <a:srgbClr val="212121"/>
                 </a:solidFill>
               </a:rPr>
               <a:t>양자 회로 : 16큐빗, depth 8</a:t>
@@ -5568,7 +5471,7 @@
             <a:r>
               <a:rPr lang="en-US" sz="1400" dirty="0">
                 <a:solidFill>
-                  <a:schemeClr val="accent6"/>
+                  <a:srgbClr val="6B6B6B"/>
                 </a:solidFill>
               </a:rPr>
               <a:t>같은 값으로 RY → RX encoding, [학습 RY + 인접 CZ] × 8, 큐빗별 PauliX 기댓값</a:t>
@@ -5594,7 +5497,7 @@
             </a:avLst>
           </a:prstGeom>
           <a:solidFill>
-            <a:schemeClr val="tx2"/>
+            <a:srgbClr val="1E3932"/>
           </a:solidFill>
           <a:ln/>
         </p:spPr>
@@ -5629,7 +5532,7 @@
             <a:r>
               <a:rPr lang="en-US" sz="1200" dirty="0">
                 <a:solidFill>
-                  <a:schemeClr val="bg2"/>
+                  <a:srgbClr val="F2F0EB"/>
                 </a:solidFill>
                 <a:latin typeface="Courier New" pitchFamily="34" charset="0"/>
                 <a:ea typeface="Courier New" pitchFamily="34" charset="-122"/>
@@ -5649,7 +5552,7 @@
             <a:r>
               <a:rPr lang="en-US" sz="1200" dirty="0">
                 <a:solidFill>
-                  <a:schemeClr val="bg2"/>
+                  <a:srgbClr val="F2F0EB"/>
                 </a:solidFill>
                 <a:latin typeface="Courier New" pitchFamily="34" charset="0"/>
                 <a:ea typeface="Courier New" pitchFamily="34" charset="-122"/>
@@ -5669,7 +5572,7 @@
             <a:r>
               <a:rPr lang="en-US" sz="1200" b="1" dirty="0">
                 <a:solidFill>
-                  <a:schemeClr val="accent3"/>
+                  <a:srgbClr val="DFC49D"/>
                 </a:solidFill>
                 <a:latin typeface="Courier New" pitchFamily="34" charset="0"/>
                 <a:ea typeface="Courier New" pitchFamily="34" charset="-122"/>
@@ -5689,7 +5592,7 @@
             <a:r>
               <a:rPr lang="en-US" sz="1200" dirty="0">
                 <a:solidFill>
-                  <a:schemeClr val="bg2"/>
+                  <a:srgbClr val="F2F0EB"/>
                 </a:solidFill>
                 <a:latin typeface="Courier New" pitchFamily="34" charset="0"/>
                 <a:ea typeface="Courier New" pitchFamily="34" charset="-122"/>
@@ -5709,7 +5612,7 @@
             <a:r>
               <a:rPr lang="en-US" sz="1200" dirty="0">
                 <a:solidFill>
-                  <a:schemeClr val="bg2"/>
+                  <a:srgbClr val="F2F0EB"/>
                 </a:solidFill>
                 <a:latin typeface="Courier New" pitchFamily="34" charset="0"/>
                 <a:ea typeface="Courier New" pitchFamily="34" charset="-122"/>
@@ -5729,7 +5632,7 @@
             <a:r>
               <a:rPr lang="en-US" sz="1200" b="1" dirty="0">
                 <a:solidFill>
-                  <a:schemeClr val="accent3"/>
+                  <a:srgbClr val="DFC49D"/>
                 </a:solidFill>
                 <a:latin typeface="Courier New" pitchFamily="34" charset="0"/>
                 <a:ea typeface="Courier New" pitchFamily="34" charset="-122"/>
@@ -5749,7 +5652,7 @@
             <a:r>
               <a:rPr lang="en-US" sz="1200" dirty="0">
                 <a:solidFill>
-                  <a:schemeClr val="bg2"/>
+                  <a:srgbClr val="F2F0EB"/>
                 </a:solidFill>
                 <a:latin typeface="Courier New" pitchFamily="34" charset="0"/>
                 <a:ea typeface="Courier New" pitchFamily="34" charset="-122"/>
@@ -5769,7 +5672,7 @@
             <a:r>
               <a:rPr lang="en-US" sz="1200" dirty="0">
                 <a:solidFill>
-                  <a:schemeClr val="bg2"/>
+                  <a:srgbClr val="F2F0EB"/>
                 </a:solidFill>
                 <a:latin typeface="Courier New" pitchFamily="34" charset="0"/>
                 <a:ea typeface="Courier New" pitchFamily="34" charset="-122"/>
@@ -5789,7 +5692,7 @@
             <a:r>
               <a:rPr lang="en-US" sz="1200" dirty="0">
                 <a:solidFill>
-                  <a:schemeClr val="bg2"/>
+                  <a:srgbClr val="F2F0EB"/>
                 </a:solidFill>
                 <a:latin typeface="Courier New" pitchFamily="34" charset="0"/>
                 <a:ea typeface="Courier New" pitchFamily="34" charset="-122"/>
@@ -5809,7 +5712,7 @@
             <a:r>
               <a:rPr lang="en-US" sz="1200" dirty="0">
                 <a:solidFill>
-                  <a:schemeClr val="bg2"/>
+                  <a:srgbClr val="F2F0EB"/>
                 </a:solidFill>
                 <a:latin typeface="Courier New" pitchFamily="34" charset="0"/>
                 <a:ea typeface="Courier New" pitchFamily="34" charset="-122"/>
@@ -5829,7 +5732,7 @@
             <a:r>
               <a:rPr lang="en-US" sz="1200" b="1" dirty="0">
                 <a:solidFill>
-                  <a:schemeClr val="accent3"/>
+                  <a:srgbClr val="DFC49D"/>
                 </a:solidFill>
                 <a:latin typeface="Courier New" pitchFamily="34" charset="0"/>
                 <a:ea typeface="Courier New" pitchFamily="34" charset="-122"/>
@@ -5849,7 +5752,7 @@
             <a:r>
               <a:rPr lang="en-US" sz="1200" b="1" dirty="0">
                 <a:solidFill>
-                  <a:schemeClr val="accent3"/>
+                  <a:srgbClr val="DFC49D"/>
                 </a:solidFill>
                 <a:latin typeface="Courier New" pitchFamily="34" charset="0"/>
                 <a:ea typeface="Courier New" pitchFamily="34" charset="-122"/>
@@ -5910,7 +5813,7 @@
             <a:r>
               <a:rPr lang="en-US" sz="1100" b="1" dirty="0">
                 <a:solidFill>
-                  <a:schemeClr val="tx1"/>
+                  <a:srgbClr val="212121"/>
                 </a:solidFill>
               </a:rPr>
               <a:t>q0</a:t>
@@ -5936,7 +5839,7 @@
           <a:noFill/>
           <a:ln w="9525">
             <a:solidFill>
-              <a:schemeClr val="accent6"/>
+              <a:srgbClr val="6B6B6B"/>
             </a:solidFill>
             <a:prstDash val="solid"/>
           </a:ln>
@@ -5959,7 +5862,7 @@
             </a:avLst>
           </a:prstGeom>
           <a:solidFill>
-            <a:schemeClr val="accent2"/>
+            <a:srgbClr val="5B3E8C"/>
           </a:solidFill>
           <a:ln/>
         </p:spPr>
@@ -5991,7 +5894,7 @@
             <a:r>
               <a:rPr lang="en-US" sz="900" b="1" dirty="0">
                 <a:solidFill>
-                  <a:schemeClr val="bg1"/>
+                  <a:srgbClr val="FFFFFF"/>
                 </a:solidFill>
               </a:rPr>
               <a:t>RY(x)</a:t>
@@ -6017,7 +5920,7 @@
             </a:avLst>
           </a:prstGeom>
           <a:solidFill>
-            <a:schemeClr val="accent2"/>
+            <a:srgbClr val="5B3E8C"/>
           </a:solidFill>
           <a:ln/>
         </p:spPr>
@@ -6049,7 +5952,7 @@
             <a:r>
               <a:rPr lang="en-US" sz="900" b="1" dirty="0">
                 <a:solidFill>
-                  <a:schemeClr val="bg1"/>
+                  <a:srgbClr val="FFFFFF"/>
                 </a:solidFill>
               </a:rPr>
               <a:t>RX(x)</a:t>
@@ -6075,7 +5978,7 @@
             </a:avLst>
           </a:prstGeom>
           <a:solidFill>
-            <a:schemeClr val="accent1"/>
+            <a:srgbClr val="00754A"/>
           </a:solidFill>
           <a:ln/>
         </p:spPr>
@@ -6107,7 +6010,7 @@
             <a:r>
               <a:rPr lang="en-US" sz="900" b="1" dirty="0">
                 <a:solidFill>
-                  <a:schemeClr val="bg1"/>
+                  <a:srgbClr val="FFFFFF"/>
                 </a:solidFill>
               </a:rPr>
               <a:t>RY(θ)</a:t>
@@ -6133,7 +6036,7 @@
             </a:avLst>
           </a:prstGeom>
           <a:solidFill>
-            <a:schemeClr val="accent4"/>
+            <a:srgbClr val="9C5000"/>
           </a:solidFill>
           <a:ln/>
         </p:spPr>
@@ -6165,7 +6068,7 @@
             <a:r>
               <a:rPr lang="en-US" sz="1000" b="1" dirty="0">
                 <a:solidFill>
-                  <a:schemeClr val="bg1"/>
+                  <a:srgbClr val="FFFFFF"/>
                 </a:solidFill>
               </a:rPr>
               <a:t>⟨X⟩</a:t>
@@ -6201,7 +6104,7 @@
             <a:r>
               <a:rPr lang="en-US" sz="1100" b="1" dirty="0">
                 <a:solidFill>
-                  <a:schemeClr val="tx1"/>
+                  <a:srgbClr val="212121"/>
                 </a:solidFill>
               </a:rPr>
               <a:t>q1</a:t>
@@ -6227,7 +6130,7 @@
           <a:noFill/>
           <a:ln w="9525">
             <a:solidFill>
-              <a:schemeClr val="accent6"/>
+              <a:srgbClr val="6B6B6B"/>
             </a:solidFill>
             <a:prstDash val="solid"/>
           </a:ln>
@@ -6250,7 +6153,7 @@
             </a:avLst>
           </a:prstGeom>
           <a:solidFill>
-            <a:schemeClr val="accent2"/>
+            <a:srgbClr val="5B3E8C"/>
           </a:solidFill>
           <a:ln/>
         </p:spPr>
@@ -6282,7 +6185,7 @@
             <a:r>
               <a:rPr lang="en-US" sz="900" b="1" dirty="0">
                 <a:solidFill>
-                  <a:schemeClr val="bg1"/>
+                  <a:srgbClr val="FFFFFF"/>
                 </a:solidFill>
               </a:rPr>
               <a:t>RY(x)</a:t>
@@ -6308,7 +6211,7 @@
             </a:avLst>
           </a:prstGeom>
           <a:solidFill>
-            <a:schemeClr val="accent2"/>
+            <a:srgbClr val="5B3E8C"/>
           </a:solidFill>
           <a:ln/>
         </p:spPr>
@@ -6340,7 +6243,7 @@
             <a:r>
               <a:rPr lang="en-US" sz="900" b="1" dirty="0">
                 <a:solidFill>
-                  <a:schemeClr val="bg1"/>
+                  <a:srgbClr val="FFFFFF"/>
                 </a:solidFill>
               </a:rPr>
               <a:t>RX(x)</a:t>
@@ -6366,7 +6269,7 @@
             </a:avLst>
           </a:prstGeom>
           <a:solidFill>
-            <a:schemeClr val="accent1"/>
+            <a:srgbClr val="00754A"/>
           </a:solidFill>
           <a:ln/>
         </p:spPr>
@@ -6398,7 +6301,7 @@
             <a:r>
               <a:rPr lang="en-US" sz="900" b="1" dirty="0">
                 <a:solidFill>
-                  <a:schemeClr val="bg1"/>
+                  <a:srgbClr val="FFFFFF"/>
                 </a:solidFill>
               </a:rPr>
               <a:t>RY(θ)</a:t>
@@ -6424,7 +6327,7 @@
             </a:avLst>
           </a:prstGeom>
           <a:solidFill>
-            <a:schemeClr val="accent4"/>
+            <a:srgbClr val="9C5000"/>
           </a:solidFill>
           <a:ln/>
         </p:spPr>
@@ -6456,7 +6359,7 @@
             <a:r>
               <a:rPr lang="en-US" sz="1000" b="1" dirty="0">
                 <a:solidFill>
-                  <a:schemeClr val="bg1"/>
+                  <a:srgbClr val="FFFFFF"/>
                 </a:solidFill>
               </a:rPr>
               <a:t>⟨X⟩</a:t>
@@ -6492,7 +6395,7 @@
             <a:r>
               <a:rPr lang="en-US" sz="1100" b="1" dirty="0">
                 <a:solidFill>
-                  <a:schemeClr val="tx1"/>
+                  <a:srgbClr val="212121"/>
                 </a:solidFill>
               </a:rPr>
               <a:t>q2</a:t>
@@ -6518,7 +6421,7 @@
           <a:noFill/>
           <a:ln w="9525">
             <a:solidFill>
-              <a:schemeClr val="accent6"/>
+              <a:srgbClr val="6B6B6B"/>
             </a:solidFill>
             <a:prstDash val="solid"/>
           </a:ln>
@@ -6541,7 +6444,7 @@
             </a:avLst>
           </a:prstGeom>
           <a:solidFill>
-            <a:schemeClr val="accent2"/>
+            <a:srgbClr val="5B3E8C"/>
           </a:solidFill>
           <a:ln/>
         </p:spPr>
@@ -6573,7 +6476,7 @@
             <a:r>
               <a:rPr lang="en-US" sz="900" b="1" dirty="0">
                 <a:solidFill>
-                  <a:schemeClr val="bg1"/>
+                  <a:srgbClr val="FFFFFF"/>
                 </a:solidFill>
               </a:rPr>
               <a:t>RY(x)</a:t>
@@ -6599,7 +6502,7 @@
             </a:avLst>
           </a:prstGeom>
           <a:solidFill>
-            <a:schemeClr val="accent2"/>
+            <a:srgbClr val="5B3E8C"/>
           </a:solidFill>
           <a:ln/>
         </p:spPr>
@@ -6631,7 +6534,7 @@
             <a:r>
               <a:rPr lang="en-US" sz="900" b="1" dirty="0">
                 <a:solidFill>
-                  <a:schemeClr val="bg1"/>
+                  <a:srgbClr val="FFFFFF"/>
                 </a:solidFill>
               </a:rPr>
               <a:t>RX(x)</a:t>
@@ -6657,7 +6560,7 @@
             </a:avLst>
           </a:prstGeom>
           <a:solidFill>
-            <a:schemeClr val="accent1"/>
+            <a:srgbClr val="00754A"/>
           </a:solidFill>
           <a:ln/>
         </p:spPr>
@@ -6689,7 +6592,7 @@
             <a:r>
               <a:rPr lang="en-US" sz="900" b="1" dirty="0">
                 <a:solidFill>
-                  <a:schemeClr val="bg1"/>
+                  <a:srgbClr val="FFFFFF"/>
                 </a:solidFill>
               </a:rPr>
               <a:t>RY(θ)</a:t>
@@ -6715,7 +6618,7 @@
             </a:avLst>
           </a:prstGeom>
           <a:solidFill>
-            <a:schemeClr val="accent4"/>
+            <a:srgbClr val="9C5000"/>
           </a:solidFill>
           <a:ln/>
         </p:spPr>
@@ -6747,7 +6650,7 @@
             <a:r>
               <a:rPr lang="en-US" sz="1000" b="1" dirty="0">
                 <a:solidFill>
-                  <a:schemeClr val="bg1"/>
+                  <a:srgbClr val="FFFFFF"/>
                 </a:solidFill>
               </a:rPr>
               <a:t>⟨X⟩</a:t>
@@ -6783,7 +6686,7 @@
             <a:r>
               <a:rPr lang="en-US" sz="1100" b="1" dirty="0">
                 <a:solidFill>
-                  <a:schemeClr val="tx1"/>
+                  <a:srgbClr val="212121"/>
                 </a:solidFill>
               </a:rPr>
               <a:t>⋮</a:t>
@@ -6819,7 +6722,7 @@
             <a:r>
               <a:rPr lang="en-US" sz="1100" b="1" dirty="0">
                 <a:solidFill>
-                  <a:schemeClr val="tx1"/>
+                  <a:srgbClr val="212121"/>
                 </a:solidFill>
               </a:rPr>
               <a:t>q14</a:t>
@@ -6845,7 +6748,7 @@
           <a:noFill/>
           <a:ln w="9525">
             <a:solidFill>
-              <a:schemeClr val="accent6"/>
+              <a:srgbClr val="6B6B6B"/>
             </a:solidFill>
             <a:prstDash val="solid"/>
           </a:ln>
@@ -6868,7 +6771,7 @@
             </a:avLst>
           </a:prstGeom>
           <a:solidFill>
-            <a:schemeClr val="accent2"/>
+            <a:srgbClr val="5B3E8C"/>
           </a:solidFill>
           <a:ln/>
         </p:spPr>
@@ -6900,7 +6803,7 @@
             <a:r>
               <a:rPr lang="en-US" sz="900" b="1" dirty="0">
                 <a:solidFill>
-                  <a:schemeClr val="bg1"/>
+                  <a:srgbClr val="FFFFFF"/>
                 </a:solidFill>
               </a:rPr>
               <a:t>RY(x)</a:t>
@@ -6926,7 +6829,7 @@
             </a:avLst>
           </a:prstGeom>
           <a:solidFill>
-            <a:schemeClr val="accent2"/>
+            <a:srgbClr val="5B3E8C"/>
           </a:solidFill>
           <a:ln/>
         </p:spPr>
@@ -6958,7 +6861,7 @@
             <a:r>
               <a:rPr lang="en-US" sz="900" b="1" dirty="0">
                 <a:solidFill>
-                  <a:schemeClr val="bg1"/>
+                  <a:srgbClr val="FFFFFF"/>
                 </a:solidFill>
               </a:rPr>
               <a:t>RX(x)</a:t>
@@ -6984,7 +6887,7 @@
             </a:avLst>
           </a:prstGeom>
           <a:solidFill>
-            <a:schemeClr val="accent1"/>
+            <a:srgbClr val="00754A"/>
           </a:solidFill>
           <a:ln/>
         </p:spPr>
@@ -7016,7 +6919,7 @@
             <a:r>
               <a:rPr lang="en-US" sz="900" b="1" dirty="0">
                 <a:solidFill>
-                  <a:schemeClr val="bg1"/>
+                  <a:srgbClr val="FFFFFF"/>
                 </a:solidFill>
               </a:rPr>
               <a:t>RY(θ)</a:t>
@@ -7042,7 +6945,7 @@
             </a:avLst>
           </a:prstGeom>
           <a:solidFill>
-            <a:schemeClr val="accent4"/>
+            <a:srgbClr val="9C5000"/>
           </a:solidFill>
           <a:ln/>
         </p:spPr>
@@ -7074,7 +6977,7 @@
             <a:r>
               <a:rPr lang="en-US" sz="1000" b="1" dirty="0">
                 <a:solidFill>
-                  <a:schemeClr val="bg1"/>
+                  <a:srgbClr val="FFFFFF"/>
                 </a:solidFill>
               </a:rPr>
               <a:t>⟨X⟩</a:t>
@@ -7110,7 +7013,7 @@
             <a:r>
               <a:rPr lang="en-US" sz="1100" b="1" dirty="0">
                 <a:solidFill>
-                  <a:schemeClr val="tx1"/>
+                  <a:srgbClr val="212121"/>
                 </a:solidFill>
               </a:rPr>
               <a:t>q15</a:t>
@@ -7136,7 +7039,7 @@
           <a:noFill/>
           <a:ln w="9525">
             <a:solidFill>
-              <a:schemeClr val="accent6"/>
+              <a:srgbClr val="6B6B6B"/>
             </a:solidFill>
             <a:prstDash val="solid"/>
           </a:ln>
@@ -7159,7 +7062,7 @@
             </a:avLst>
           </a:prstGeom>
           <a:solidFill>
-            <a:schemeClr val="accent2"/>
+            <a:srgbClr val="5B3E8C"/>
           </a:solidFill>
           <a:ln/>
         </p:spPr>
@@ -7191,7 +7094,7 @@
             <a:r>
               <a:rPr lang="en-US" sz="900" b="1" dirty="0">
                 <a:solidFill>
-                  <a:schemeClr val="bg1"/>
+                  <a:srgbClr val="FFFFFF"/>
                 </a:solidFill>
               </a:rPr>
               <a:t>RY(x)</a:t>
@@ -7217,7 +7120,7 @@
             </a:avLst>
           </a:prstGeom>
           <a:solidFill>
-            <a:schemeClr val="accent2"/>
+            <a:srgbClr val="5B3E8C"/>
           </a:solidFill>
           <a:ln/>
         </p:spPr>
@@ -7249,7 +7152,7 @@
             <a:r>
               <a:rPr lang="en-US" sz="900" b="1" dirty="0">
                 <a:solidFill>
-                  <a:schemeClr val="bg1"/>
+                  <a:srgbClr val="FFFFFF"/>
                 </a:solidFill>
               </a:rPr>
               <a:t>RX(x)</a:t>
@@ -7275,7 +7178,7 @@
             </a:avLst>
           </a:prstGeom>
           <a:solidFill>
-            <a:schemeClr val="accent1"/>
+            <a:srgbClr val="00754A"/>
           </a:solidFill>
           <a:ln/>
         </p:spPr>
@@ -7307,7 +7210,7 @@
             <a:r>
               <a:rPr lang="en-US" sz="900" b="1" dirty="0">
                 <a:solidFill>
-                  <a:schemeClr val="bg1"/>
+                  <a:srgbClr val="FFFFFF"/>
                 </a:solidFill>
               </a:rPr>
               <a:t>RY(θ)</a:t>
@@ -7333,7 +7236,7 @@
             </a:avLst>
           </a:prstGeom>
           <a:solidFill>
-            <a:schemeClr val="accent4"/>
+            <a:srgbClr val="9C5000"/>
           </a:solidFill>
           <a:ln/>
         </p:spPr>
@@ -7365,7 +7268,7 @@
             <a:r>
               <a:rPr lang="en-US" sz="1000" b="1" dirty="0">
                 <a:solidFill>
-                  <a:schemeClr val="bg1"/>
+                  <a:srgbClr val="FFFFFF"/>
                 </a:solidFill>
               </a:rPr>
               <a:t>⟨X⟩</a:t>
@@ -7389,7 +7292,7 @@
             <a:avLst/>
           </a:prstGeom>
           <a:solidFill>
-            <a:schemeClr val="tx1"/>
+            <a:srgbClr val="212121"/>
           </a:solidFill>
           <a:ln/>
         </p:spPr>
@@ -7409,7 +7312,7 @@
             <a:avLst/>
           </a:prstGeom>
           <a:solidFill>
-            <a:schemeClr val="tx1"/>
+            <a:srgbClr val="212121"/>
           </a:solidFill>
           <a:ln/>
         </p:spPr>
@@ -7431,7 +7334,7 @@
           <a:noFill/>
           <a:ln w="15875">
             <a:solidFill>
-              <a:schemeClr val="tx1"/>
+              <a:srgbClr val="212121"/>
             </a:solidFill>
             <a:prstDash val="solid"/>
           </a:ln>
@@ -7452,7 +7355,7 @@
             <a:avLst/>
           </a:prstGeom>
           <a:solidFill>
-            <a:schemeClr val="tx1"/>
+            <a:srgbClr val="212121"/>
           </a:solidFill>
           <a:ln/>
         </p:spPr>
@@ -7472,7 +7375,7 @@
             <a:avLst/>
           </a:prstGeom>
           <a:solidFill>
-            <a:schemeClr val="tx1"/>
+            <a:srgbClr val="212121"/>
           </a:solidFill>
           <a:ln/>
         </p:spPr>
@@ -7494,7 +7397,7 @@
           <a:noFill/>
           <a:ln w="15875">
             <a:solidFill>
-              <a:schemeClr val="tx1"/>
+              <a:srgbClr val="212121"/>
             </a:solidFill>
             <a:prstDash val="solid"/>
           </a:ln>
@@ -7515,7 +7418,7 @@
             <a:avLst/>
           </a:prstGeom>
           <a:solidFill>
-            <a:schemeClr val="tx1"/>
+            <a:srgbClr val="212121"/>
           </a:solidFill>
           <a:ln/>
         </p:spPr>
@@ -7535,7 +7438,7 @@
             <a:avLst/>
           </a:prstGeom>
           <a:solidFill>
-            <a:schemeClr val="tx1"/>
+            <a:srgbClr val="212121"/>
           </a:solidFill>
           <a:ln/>
         </p:spPr>
@@ -7557,7 +7460,7 @@
           <a:noFill/>
           <a:ln w="15875">
             <a:solidFill>
-              <a:schemeClr val="tx1"/>
+              <a:srgbClr val="212121"/>
             </a:solidFill>
             <a:prstDash val="solid"/>
           </a:ln>
@@ -7581,7 +7484,7 @@
           </a:prstGeom>
           <a:ln w="15875">
             <a:solidFill>
-              <a:schemeClr val="accent1"/>
+              <a:srgbClr val="00754A"/>
             </a:solidFill>
             <a:prstDash val="dash"/>
           </a:ln>
@@ -7614,7 +7517,7 @@
             <a:r>
               <a:rPr lang="en-US" sz="1100" b="1" dirty="0">
                 <a:solidFill>
-                  <a:schemeClr val="accent2"/>
+                  <a:srgbClr val="5B3E8C"/>
                 </a:solidFill>
               </a:rPr>
               <a:t>① encoding</a:t>
@@ -7650,7 +7553,7 @@
             <a:r>
               <a:rPr lang="en-US" sz="1100" b="1" dirty="0">
                 <a:solidFill>
-                  <a:schemeClr val="accent1"/>
+                  <a:srgbClr val="00754A"/>
                 </a:solidFill>
               </a:rPr>
               <a:t>② × 8 (RY + CZ 사슬)</a:t>
@@ -7686,7 +7589,7 @@
             <a:r>
               <a:rPr lang="en-US" sz="1100" b="1" dirty="0">
                 <a:solidFill>
-                  <a:schemeClr val="accent4"/>
+                  <a:srgbClr val="9C5000"/>
                 </a:solidFill>
               </a:rPr>
               <a:t>③ 측정</a:t>
@@ -7722,7 +7625,7 @@
             <a:r>
               <a:rPr lang="en-US" sz="1200" dirty="0">
                 <a:solidFill>
-                  <a:schemeClr val="tx1"/>
+                  <a:srgbClr val="212121"/>
                 </a:solidFill>
               </a:rPr>
               <a:t>출력: 큐빗 16개의 기댓값 → 평균 → site당 스칼라 1개</a:t>
@@ -7761,7 +7664,7 @@
             <a:lvl1pPr>
               <a:defRPr sz="1000">
                 <a:solidFill>
-                  <a:schemeClr val="accent6"/>
+                  <a:srgbClr val="6B6B6B"/>
                 </a:solidFill>
               </a:defRPr>
             </a:lvl1pPr>
@@ -7830,7 +7733,7 @@
             <a:r>
               <a:rPr lang="en-US" sz="1200" b="1" spc="100" kern="0" dirty="0">
                 <a:solidFill>
-                  <a:schemeClr val="accent1"/>
+                  <a:srgbClr val="00754A"/>
                 </a:solidFill>
               </a:rPr>
               <a:t>PART 1 · 노트북 §3 코드</a:t>
@@ -7868,7 +7771,7 @@
             <a:r>
               <a:rPr lang="en-US" sz="3000" b="1" dirty="0">
                 <a:solidFill>
-                  <a:schemeClr val="tx1"/>
+                  <a:srgbClr val="212121"/>
                 </a:solidFill>
               </a:rPr>
               <a:t>양자 stream : 16 site 중 5개만 회로로 처리</a:t>
@@ -7906,7 +7809,7 @@
             <a:r>
               <a:rPr lang="en-US" sz="1400" dirty="0">
                 <a:solidFill>
-                  <a:schemeClr val="accent6"/>
+                  <a:srgbClr val="6B6B6B"/>
                 </a:solidFill>
               </a:rPr>
               <a:t>양자 쪽 입력을 4×4 = 16 site로 보고, 고른 5개 site만 sub-generator 회로가 처리함</a:t>
@@ -7967,7 +7870,7 @@
             <a:r>
               <a:rPr lang="en-US" sz="1000" b="1" dirty="0">
                 <a:solidFill>
-                  <a:schemeClr val="bg1"/>
+                  <a:srgbClr val="FFFFFF"/>
                 </a:solidFill>
               </a:rPr>
               <a:t>site 0</a:t>
@@ -7981,7 +7884,7 @@
             <a:r>
               <a:rPr lang="en-US" sz="1000" b="1" dirty="0">
                 <a:solidFill>
-                  <a:schemeClr val="bg1"/>
+                  <a:srgbClr val="FFFFFF"/>
                 </a:solidFill>
               </a:rPr>
               <a:t>gen 1</a:t>
@@ -8042,7 +7945,7 @@
             <a:r>
               <a:rPr lang="en-US" sz="1000" dirty="0">
                 <a:solidFill>
-                  <a:schemeClr val="accent6"/>
+                  <a:srgbClr val="6B6B6B"/>
                 </a:solidFill>
               </a:rPr>
               <a:t>site 1</a:t>
@@ -8056,7 +7959,7 @@
             <a:r>
               <a:rPr lang="en-US" sz="1000" dirty="0">
                 <a:solidFill>
-                  <a:schemeClr val="accent6"/>
+                  <a:srgbClr val="6B6B6B"/>
                 </a:solidFill>
               </a:rPr>
               <a:t>0</a:t>
@@ -8117,7 +8020,7 @@
             <a:r>
               <a:rPr lang="en-US" sz="1000" dirty="0">
                 <a:solidFill>
-                  <a:schemeClr val="accent6"/>
+                  <a:srgbClr val="6B6B6B"/>
                 </a:solidFill>
               </a:rPr>
               <a:t>site 2</a:t>
@@ -8131,7 +8034,7 @@
             <a:r>
               <a:rPr lang="en-US" sz="1000" dirty="0">
                 <a:solidFill>
-                  <a:schemeClr val="accent6"/>
+                  <a:srgbClr val="6B6B6B"/>
                 </a:solidFill>
               </a:rPr>
               <a:t>0</a:t>
@@ -8192,7 +8095,7 @@
             <a:r>
               <a:rPr lang="en-US" sz="1000" dirty="0">
                 <a:solidFill>
-                  <a:schemeClr val="accent6"/>
+                  <a:srgbClr val="6B6B6B"/>
                 </a:solidFill>
               </a:rPr>
               <a:t>site 3</a:t>
@@ -8206,7 +8109,7 @@
             <a:r>
               <a:rPr lang="en-US" sz="1000" dirty="0">
                 <a:solidFill>
-                  <a:schemeClr val="accent6"/>
+                  <a:srgbClr val="6B6B6B"/>
                 </a:solidFill>
               </a:rPr>
               <a:t>0</a:t>
@@ -8267,7 +8170,7 @@
             <a:r>
               <a:rPr lang="en-US" sz="1000" b="1" dirty="0">
                 <a:solidFill>
-                  <a:schemeClr val="bg1"/>
+                  <a:srgbClr val="FFFFFF"/>
                 </a:solidFill>
               </a:rPr>
               <a:t>site 4</a:t>
@@ -8281,7 +8184,7 @@
             <a:r>
               <a:rPr lang="en-US" sz="1000" b="1" dirty="0">
                 <a:solidFill>
-                  <a:schemeClr val="bg1"/>
+                  <a:srgbClr val="FFFFFF"/>
                 </a:solidFill>
               </a:rPr>
               <a:t>gen 2</a:t>
@@ -8342,7 +8245,7 @@
             <a:r>
               <a:rPr lang="en-US" sz="1000" dirty="0">
                 <a:solidFill>
-                  <a:schemeClr val="accent6"/>
+                  <a:srgbClr val="6B6B6B"/>
                 </a:solidFill>
               </a:rPr>
               <a:t>site 5</a:t>
@@ -8356,7 +8259,7 @@
             <a:r>
               <a:rPr lang="en-US" sz="1000" dirty="0">
                 <a:solidFill>
-                  <a:schemeClr val="accent6"/>
+                  <a:srgbClr val="6B6B6B"/>
                 </a:solidFill>
               </a:rPr>
               <a:t>0</a:t>
@@ -8417,7 +8320,7 @@
             <a:r>
               <a:rPr lang="en-US" sz="1000" dirty="0">
                 <a:solidFill>
-                  <a:schemeClr val="accent6"/>
+                  <a:srgbClr val="6B6B6B"/>
                 </a:solidFill>
               </a:rPr>
               <a:t>site 6</a:t>
@@ -8431,7 +8334,7 @@
             <a:r>
               <a:rPr lang="en-US" sz="1000" dirty="0">
                 <a:solidFill>
-                  <a:schemeClr val="accent6"/>
+                  <a:srgbClr val="6B6B6B"/>
                 </a:solidFill>
               </a:rPr>
               <a:t>0</a:t>
@@ -8492,7 +8395,7 @@
             <a:r>
               <a:rPr lang="en-US" sz="1000" dirty="0">
                 <a:solidFill>
-                  <a:schemeClr val="accent6"/>
+                  <a:srgbClr val="6B6B6B"/>
                 </a:solidFill>
               </a:rPr>
               <a:t>site 7</a:t>
@@ -8506,7 +8409,7 @@
             <a:r>
               <a:rPr lang="en-US" sz="1000" dirty="0">
                 <a:solidFill>
-                  <a:schemeClr val="accent6"/>
+                  <a:srgbClr val="6B6B6B"/>
                 </a:solidFill>
               </a:rPr>
               <a:t>0</a:t>
@@ -8567,7 +8470,7 @@
             <a:r>
               <a:rPr lang="en-US" sz="1000" b="1" dirty="0">
                 <a:solidFill>
-                  <a:schemeClr val="bg1"/>
+                  <a:srgbClr val="FFFFFF"/>
                 </a:solidFill>
               </a:rPr>
               <a:t>site 8</a:t>
@@ -8581,7 +8484,7 @@
             <a:r>
               <a:rPr lang="en-US" sz="1000" b="1" dirty="0">
                 <a:solidFill>
-                  <a:schemeClr val="bg1"/>
+                  <a:srgbClr val="FFFFFF"/>
                 </a:solidFill>
               </a:rPr>
               <a:t>gen 3</a:t>
@@ -8642,7 +8545,7 @@
             <a:r>
               <a:rPr lang="en-US" sz="1000" dirty="0">
                 <a:solidFill>
-                  <a:schemeClr val="accent6"/>
+                  <a:srgbClr val="6B6B6B"/>
                 </a:solidFill>
               </a:rPr>
               <a:t>site 9</a:t>
@@ -8656,7 +8559,7 @@
             <a:r>
               <a:rPr lang="en-US" sz="1000" dirty="0">
                 <a:solidFill>
-                  <a:schemeClr val="accent6"/>
+                  <a:srgbClr val="6B6B6B"/>
                 </a:solidFill>
               </a:rPr>
               <a:t>0</a:t>
@@ -8717,7 +8620,7 @@
             <a:r>
               <a:rPr lang="en-US" sz="1000" dirty="0">
                 <a:solidFill>
-                  <a:schemeClr val="accent6"/>
+                  <a:srgbClr val="6B6B6B"/>
                 </a:solidFill>
               </a:rPr>
               <a:t>site 10</a:t>
@@ -8731,7 +8634,7 @@
             <a:r>
               <a:rPr lang="en-US" sz="1000" dirty="0">
                 <a:solidFill>
-                  <a:schemeClr val="accent6"/>
+                  <a:srgbClr val="6B6B6B"/>
                 </a:solidFill>
               </a:rPr>
               <a:t>0</a:t>
@@ -8792,7 +8695,7 @@
             <a:r>
               <a:rPr lang="en-US" sz="1000" b="1" dirty="0">
                 <a:solidFill>
-                  <a:schemeClr val="bg1"/>
+                  <a:srgbClr val="FFFFFF"/>
                 </a:solidFill>
               </a:rPr>
               <a:t>site 11</a:t>
@@ -8806,7 +8709,7 @@
             <a:r>
               <a:rPr lang="en-US" sz="1000" b="1" dirty="0">
                 <a:solidFill>
-                  <a:schemeClr val="bg1"/>
+                  <a:srgbClr val="FFFFFF"/>
                 </a:solidFill>
               </a:rPr>
               <a:t>gen 4</a:t>
@@ -8867,7 +8770,7 @@
             <a:r>
               <a:rPr lang="en-US" sz="1000" dirty="0">
                 <a:solidFill>
-                  <a:schemeClr val="accent6"/>
+                  <a:srgbClr val="6B6B6B"/>
                 </a:solidFill>
               </a:rPr>
               <a:t>site 12</a:t>
@@ -8881,7 +8784,7 @@
             <a:r>
               <a:rPr lang="en-US" sz="1000" dirty="0">
                 <a:solidFill>
-                  <a:schemeClr val="accent6"/>
+                  <a:srgbClr val="6B6B6B"/>
                 </a:solidFill>
               </a:rPr>
               <a:t>0</a:t>
@@ -8942,7 +8845,7 @@
             <a:r>
               <a:rPr lang="en-US" sz="1000" dirty="0">
                 <a:solidFill>
-                  <a:schemeClr val="accent6"/>
+                  <a:srgbClr val="6B6B6B"/>
                 </a:solidFill>
               </a:rPr>
               <a:t>site 13</a:t>
@@ -8956,7 +8859,7 @@
             <a:r>
               <a:rPr lang="en-US" sz="1000" dirty="0">
                 <a:solidFill>
-                  <a:schemeClr val="accent6"/>
+                  <a:srgbClr val="6B6B6B"/>
                 </a:solidFill>
               </a:rPr>
               <a:t>0</a:t>
@@ -9017,7 +8920,7 @@
             <a:r>
               <a:rPr lang="en-US" sz="1000" dirty="0">
                 <a:solidFill>
-                  <a:schemeClr val="accent6"/>
+                  <a:srgbClr val="6B6B6B"/>
                 </a:solidFill>
               </a:rPr>
               <a:t>site 14</a:t>
@@ -9031,7 +8934,7 @@
             <a:r>
               <a:rPr lang="en-US" sz="1000" dirty="0">
                 <a:solidFill>
-                  <a:schemeClr val="accent6"/>
+                  <a:srgbClr val="6B6B6B"/>
                 </a:solidFill>
               </a:rPr>
               <a:t>0</a:t>
@@ -9092,7 +8995,7 @@
             <a:r>
               <a:rPr lang="en-US" sz="1000" b="1" dirty="0">
                 <a:solidFill>
-                  <a:schemeClr val="bg1"/>
+                  <a:srgbClr val="FFFFFF"/>
                 </a:solidFill>
               </a:rPr>
               <a:t>site 15</a:t>
@@ -9106,7 +9009,7 @@
             <a:r>
               <a:rPr lang="en-US" sz="1000" b="1" dirty="0">
                 <a:solidFill>
-                  <a:schemeClr val="bg1"/>
+                  <a:srgbClr val="FFFFFF"/>
                 </a:solidFill>
               </a:rPr>
               <a:t>gen 5</a:t>
@@ -9142,7 +9045,7 @@
             <a:r>
               <a:rPr lang="en-US" sz="1200" dirty="0">
                 <a:solidFill>
-                  <a:schemeClr val="accent6"/>
+                  <a:srgbClr val="6B6B6B"/>
                 </a:solidFill>
               </a:rPr>
               <a:t>4×4 site 맵 - 보라색 5칸만 회로 출력, 나머지는 0</a:t>
@@ -9168,7 +9071,7 @@
             </a:avLst>
           </a:prstGeom>
           <a:solidFill>
-            <a:schemeClr val="tx2"/>
+            <a:srgbClr val="1E3932"/>
           </a:solidFill>
           <a:ln/>
         </p:spPr>
@@ -9203,7 +9106,7 @@
             <a:r>
               <a:rPr lang="en-US" sz="1150" dirty="0">
                 <a:solidFill>
-                  <a:schemeClr val="bg2"/>
+                  <a:srgbClr val="F2F0EB"/>
                 </a:solidFill>
                 <a:latin typeface="Courier New" pitchFamily="34" charset="0"/>
                 <a:ea typeface="Courier New" pitchFamily="34" charset="-122"/>
@@ -9223,7 +9126,7 @@
             <a:r>
               <a:rPr lang="en-US" sz="1150" b="1" dirty="0">
                 <a:solidFill>
-                  <a:schemeClr val="accent3"/>
+                  <a:srgbClr val="DFC49D"/>
                 </a:solidFill>
                 <a:latin typeface="Courier New" pitchFamily="34" charset="0"/>
                 <a:ea typeface="Courier New" pitchFamily="34" charset="-122"/>
@@ -9243,7 +9146,7 @@
             <a:r>
               <a:rPr lang="en-US" sz="1150" dirty="0">
                 <a:solidFill>
-                  <a:schemeClr val="bg2"/>
+                  <a:srgbClr val="F2F0EB"/>
                 </a:solidFill>
                 <a:latin typeface="Courier New" pitchFamily="34" charset="0"/>
                 <a:ea typeface="Courier New" pitchFamily="34" charset="-122"/>
@@ -9263,7 +9166,7 @@
             <a:r>
               <a:rPr lang="en-US" sz="1150" dirty="0">
                 <a:solidFill>
-                  <a:schemeClr val="bg2"/>
+                  <a:srgbClr val="F2F0EB"/>
                 </a:solidFill>
                 <a:latin typeface="Courier New" pitchFamily="34" charset="0"/>
                 <a:ea typeface="Courier New" pitchFamily="34" charset="-122"/>
@@ -9283,7 +9186,7 @@
             <a:r>
               <a:rPr lang="en-US" sz="1150" b="1" dirty="0">
                 <a:solidFill>
-                  <a:schemeClr val="accent3"/>
+                  <a:srgbClr val="DFC49D"/>
                 </a:solidFill>
                 <a:latin typeface="Courier New" pitchFamily="34" charset="0"/>
                 <a:ea typeface="Courier New" pitchFamily="34" charset="-122"/>
@@ -9303,7 +9206,7 @@
             <a:r>
               <a:rPr lang="en-US" sz="1150" b="1" dirty="0">
                 <a:solidFill>
-                  <a:schemeClr val="accent3"/>
+                  <a:srgbClr val="DFC49D"/>
                 </a:solidFill>
                 <a:latin typeface="Courier New" pitchFamily="34" charset="0"/>
                 <a:ea typeface="Courier New" pitchFamily="34" charset="-122"/>
@@ -9323,7 +9226,7 @@
             <a:r>
               <a:rPr lang="en-US" sz="1150" dirty="0">
                 <a:solidFill>
-                  <a:schemeClr val="bg2"/>
+                  <a:srgbClr val="F2F0EB"/>
                 </a:solidFill>
                 <a:latin typeface="Courier New" pitchFamily="34" charset="0"/>
                 <a:ea typeface="Courier New" pitchFamily="34" charset="-122"/>
@@ -9343,7 +9246,7 @@
             <a:r>
               <a:rPr lang="en-US" sz="1150" dirty="0">
                 <a:solidFill>
-                  <a:schemeClr val="bg2"/>
+                  <a:srgbClr val="F2F0EB"/>
                 </a:solidFill>
                 <a:latin typeface="Courier New" pitchFamily="34" charset="0"/>
                 <a:ea typeface="Courier New" pitchFamily="34" charset="-122"/>
@@ -9363,7 +9266,7 @@
             <a:r>
               <a:rPr lang="en-US" sz="1150" b="1" dirty="0">
                 <a:solidFill>
-                  <a:schemeClr val="accent3"/>
+                  <a:srgbClr val="DFC49D"/>
                 </a:solidFill>
                 <a:latin typeface="Courier New" pitchFamily="34" charset="0"/>
                 <a:ea typeface="Courier New" pitchFamily="34" charset="-122"/>
@@ -9383,7 +9286,7 @@
             <a:r>
               <a:rPr lang="en-US" sz="1150" dirty="0">
                 <a:solidFill>
-                  <a:schemeClr val="bg2"/>
+                  <a:srgbClr val="F2F0EB"/>
                 </a:solidFill>
                 <a:latin typeface="Courier New" pitchFamily="34" charset="0"/>
                 <a:ea typeface="Courier New" pitchFamily="34" charset="-122"/>
@@ -9422,7 +9325,7 @@
             <a:r>
               <a:rPr lang="en-US" sz="1250" dirty="0">
                 <a:solidFill>
-                  <a:schemeClr val="accent6"/>
+                  <a:srgbClr val="6B6B6B"/>
                 </a:solidFill>
               </a:rPr>
               <a:t>forward 1회의 회로 실행 수 = 5 × batch. 회로 하나의 상태벡터는 2¹⁶ = 65,536차원.</a:t>
@@ -9461,7 +9364,7 @@
             <a:lvl1pPr>
               <a:defRPr sz="1000">
                 <a:solidFill>
-                  <a:schemeClr val="accent6"/>
+                  <a:srgbClr val="6B6B6B"/>
                 </a:solidFill>
               </a:defRPr>
             </a:lvl1pPr>
@@ -9530,7 +9433,7 @@
             <a:r>
               <a:rPr lang="en-US" sz="1200" b="1" spc="100" kern="0" dirty="0">
                 <a:solidFill>
-                  <a:schemeClr val="accent1"/>
+                  <a:srgbClr val="00754A"/>
                 </a:solidFill>
               </a:rPr>
               <a:t>PART 1 · 파라미터 분포</a:t>
@@ -9568,7 +9471,7 @@
             <a:r>
               <a:rPr lang="en-US" sz="3000" b="1" dirty="0">
                 <a:solidFill>
-                  <a:schemeClr val="tx1"/>
+                  <a:srgbClr val="212121"/>
                 </a:solidFill>
               </a:rPr>
               <a:t>생성자 파라미터 구성</a:t>
@@ -9606,7 +9509,7 @@
             <a:r>
               <a:rPr lang="en-US" sz="1400" dirty="0">
                 <a:solidFill>
-                  <a:schemeClr val="accent6"/>
+                  <a:srgbClr val="6B6B6B"/>
                 </a:solidFill>
               </a:rPr>
               <a:t>30,000개 중 양자 회전각은 640개(2.1%). 2일차 QGAN 생성자는 280개 전부가 양자 회전각임</a:t>
@@ -9655,7 +9558,7 @@
                       <a:r>
                         <a:rPr lang="en-US" sz="1300" b="1" dirty="0">
                           <a:solidFill>
-                            <a:schemeClr val="bg1"/>
+                            <a:srgbClr val="FFFFFF"/>
                           </a:solidFill>
                         </a:rPr>
                         <a:t>모듈</a:t>
@@ -9701,7 +9604,7 @@
                       <a:tailEnd type="none" w="med" len="med"/>
                     </a:lnB>
                     <a:solidFill>
-                      <a:schemeClr val="tx2"/>
+                      <a:srgbClr val="1E3932"/>
                     </a:solidFill>
                   </a:tcPr>
                 </a:tc>
@@ -9716,7 +9619,7 @@
                       <a:r>
                         <a:rPr lang="en-US" sz="1300" b="1" dirty="0">
                           <a:solidFill>
-                            <a:schemeClr val="bg1"/>
+                            <a:srgbClr val="FFFFFF"/>
                           </a:solidFill>
                         </a:rPr>
                         <a:t>구성</a:t>
@@ -9762,7 +9665,7 @@
                       <a:tailEnd type="none" w="med" len="med"/>
                     </a:lnB>
                     <a:solidFill>
-                      <a:schemeClr val="tx2"/>
+                      <a:srgbClr val="1E3932"/>
                     </a:solidFill>
                   </a:tcPr>
                 </a:tc>
@@ -9777,7 +9680,7 @@
                       <a:r>
                         <a:rPr lang="en-US" sz="1300" b="1" dirty="0">
                           <a:solidFill>
-                            <a:schemeClr val="bg1"/>
+                            <a:srgbClr val="FFFFFF"/>
                           </a:solidFill>
                         </a:rPr>
                         <a:t>파라미터</a:t>
@@ -9823,7 +9726,7 @@
                       <a:tailEnd type="none" w="med" len="med"/>
                     </a:lnB>
                     <a:solidFill>
-                      <a:schemeClr val="tx2"/>
+                      <a:srgbClr val="1E3932"/>
                     </a:solidFill>
                   </a:tcPr>
                 </a:tc>
@@ -9838,7 +9741,7 @@
                       <a:r>
                         <a:rPr lang="en-US" sz="1300" b="1" dirty="0">
                           <a:solidFill>
-                            <a:schemeClr val="bg1"/>
+                            <a:srgbClr val="FFFFFF"/>
                           </a:solidFill>
                         </a:rPr>
                         <a:t>비율</a:t>
@@ -9884,7 +9787,7 @@
                       <a:tailEnd type="none" w="med" len="med"/>
                     </a:lnB>
                     <a:solidFill>
-                      <a:schemeClr val="tx2"/>
+                      <a:srgbClr val="1E3932"/>
                     </a:solidFill>
                   </a:tcPr>
                 </a:tc>
@@ -9901,7 +9804,7 @@
                       <a:r>
                         <a:rPr lang="en-US" sz="1300" dirty="0">
                           <a:solidFill>
-                            <a:schemeClr val="tx1"/>
+                            <a:srgbClr val="212121"/>
                           </a:solidFill>
                         </a:rPr>
                         <a:t>decoder</a:t>
@@ -9947,7 +9850,7 @@
                       <a:tailEnd type="none" w="med" len="med"/>
                     </a:lnB>
                     <a:solidFill>
-                      <a:schemeClr val="bg1"/>
+                      <a:srgbClr val="FFFFFF"/>
                     </a:solidFill>
                   </a:tcPr>
                 </a:tc>
@@ -9962,7 +9865,7 @@
                       <a:r>
                         <a:rPr lang="en-US" sz="1300" dirty="0">
                           <a:solidFill>
-                            <a:schemeClr val="tx1"/>
+                            <a:srgbClr val="212121"/>
                           </a:solidFill>
                         </a:rPr>
                         <a:t>Linear 384 → 32 → 256 + Tanh</a:t>
@@ -10008,7 +9911,7 @@
                       <a:tailEnd type="none" w="med" len="med"/>
                     </a:lnB>
                     <a:solidFill>
-                      <a:schemeClr val="bg1"/>
+                      <a:srgbClr val="FFFFFF"/>
                     </a:solidFill>
                   </a:tcPr>
                 </a:tc>
@@ -10023,7 +9926,7 @@
                       <a:r>
                         <a:rPr lang="en-US" sz="1300" dirty="0">
                           <a:solidFill>
-                            <a:schemeClr val="tx1"/>
+                            <a:srgbClr val="212121"/>
                           </a:solidFill>
                         </a:rPr>
                         <a:t>20,768</a:t>
@@ -10069,7 +9972,7 @@
                       <a:tailEnd type="none" w="med" len="med"/>
                     </a:lnB>
                     <a:solidFill>
-                      <a:schemeClr val="bg1"/>
+                      <a:srgbClr val="FFFFFF"/>
                     </a:solidFill>
                   </a:tcPr>
                 </a:tc>
@@ -10084,7 +9987,7 @@
                       <a:r>
                         <a:rPr lang="en-US" sz="1300" dirty="0">
                           <a:solidFill>
-                            <a:schemeClr val="tx1"/>
+                            <a:srgbClr val="212121"/>
                           </a:solidFill>
                         </a:rPr>
                         <a:t>69.2%</a:t>
@@ -10130,7 +10033,7 @@
                       <a:tailEnd type="none" w="med" len="med"/>
                     </a:lnB>
                     <a:solidFill>
-                      <a:schemeClr val="bg1"/>
+                      <a:srgbClr val="FFFFFF"/>
                     </a:solidFill>
                   </a:tcPr>
                 </a:tc>
@@ -10147,7 +10050,7 @@
                       <a:r>
                         <a:rPr lang="en-US" sz="1300" dirty="0">
                           <a:solidFill>
-                            <a:schemeClr val="tx1"/>
+                            <a:srgbClr val="212121"/>
                           </a:solidFill>
                         </a:rPr>
                         <a:t>고전 stream</a:t>
@@ -10193,7 +10096,7 @@
                       <a:tailEnd type="none" w="med" len="med"/>
                     </a:lnB>
                     <a:solidFill>
-                      <a:schemeClr val="bg2"/>
+                      <a:srgbClr val="F2F0EB"/>
                     </a:solidFill>
                   </a:tcPr>
                 </a:tc>
@@ -10208,7 +10111,7 @@
                       <a:r>
                         <a:rPr lang="en-US" sz="1300" dirty="0">
                           <a:solidFill>
-                            <a:schemeClr val="tx1"/>
+                            <a:srgbClr val="212121"/>
                           </a:solidFill>
                         </a:rPr>
                         <a:t>Linear 128 → 32 → 128</a:t>
@@ -10254,7 +10157,7 @@
                       <a:tailEnd type="none" w="med" len="med"/>
                     </a:lnB>
                     <a:solidFill>
-                      <a:schemeClr val="bg2"/>
+                      <a:srgbClr val="F2F0EB"/>
                     </a:solidFill>
                   </a:tcPr>
                 </a:tc>
@@ -10269,7 +10172,7 @@
                       <a:r>
                         <a:rPr lang="en-US" sz="1300" dirty="0">
                           <a:solidFill>
-                            <a:schemeClr val="tx1"/>
+                            <a:srgbClr val="212121"/>
                           </a:solidFill>
                         </a:rPr>
                         <a:t>8,352</a:t>
@@ -10315,7 +10218,7 @@
                       <a:tailEnd type="none" w="med" len="med"/>
                     </a:lnB>
                     <a:solidFill>
-                      <a:schemeClr val="bg2"/>
+                      <a:srgbClr val="F2F0EB"/>
                     </a:solidFill>
                   </a:tcPr>
                 </a:tc>
@@ -10330,7 +10233,7 @@
                       <a:r>
                         <a:rPr lang="en-US" sz="1300" dirty="0">
                           <a:solidFill>
-                            <a:schemeClr val="tx1"/>
+                            <a:srgbClr val="212121"/>
                           </a:solidFill>
                         </a:rPr>
                         <a:t>27.8%</a:t>
@@ -10376,7 +10279,7 @@
                       <a:tailEnd type="none" w="med" len="med"/>
                     </a:lnB>
                     <a:solidFill>
-                      <a:schemeClr val="bg2"/>
+                      <a:srgbClr val="F2F0EB"/>
                     </a:solidFill>
                   </a:tcPr>
                 </a:tc>
@@ -10393,7 +10296,7 @@
                       <a:r>
                         <a:rPr lang="en-US" sz="1300" b="1" dirty="0">
                           <a:solidFill>
-                            <a:schemeClr val="accent2"/>
+                            <a:srgbClr val="5B3E8C"/>
                           </a:solidFill>
                         </a:rPr>
                         <a:t>양자 회전각</a:t>
@@ -10439,7 +10342,7 @@
                       <a:tailEnd type="none" w="med" len="med"/>
                     </a:lnB>
                     <a:solidFill>
-                      <a:schemeClr val="bg1"/>
+                      <a:srgbClr val="FFFFFF"/>
                     </a:solidFill>
                   </a:tcPr>
                 </a:tc>
@@ -10454,7 +10357,7 @@
                       <a:r>
                         <a:rPr lang="en-US" sz="1300" b="1" dirty="0">
                           <a:solidFill>
-                            <a:schemeClr val="accent2"/>
+                            <a:srgbClr val="5B3E8C"/>
                           </a:solidFill>
                         </a:rPr>
                         <a:t>sub-generator 5 × 8층 × 16큐빗</a:t>
@@ -10500,7 +10403,7 @@
                       <a:tailEnd type="none" w="med" len="med"/>
                     </a:lnB>
                     <a:solidFill>
-                      <a:schemeClr val="bg1"/>
+                      <a:srgbClr val="FFFFFF"/>
                     </a:solidFill>
                   </a:tcPr>
                 </a:tc>
@@ -10515,7 +10418,7 @@
                       <a:r>
                         <a:rPr lang="en-US" sz="1300" b="1" dirty="0">
                           <a:solidFill>
-                            <a:schemeClr val="accent2"/>
+                            <a:srgbClr val="5B3E8C"/>
                           </a:solidFill>
                         </a:rPr>
                         <a:t>640</a:t>
@@ -10561,7 +10464,7 @@
                       <a:tailEnd type="none" w="med" len="med"/>
                     </a:lnB>
                     <a:solidFill>
-                      <a:schemeClr val="bg1"/>
+                      <a:srgbClr val="FFFFFF"/>
                     </a:solidFill>
                   </a:tcPr>
                 </a:tc>
@@ -10576,7 +10479,7 @@
                       <a:r>
                         <a:rPr lang="en-US" sz="1300" b="1" dirty="0">
                           <a:solidFill>
-                            <a:schemeClr val="accent2"/>
+                            <a:srgbClr val="5B3E8C"/>
                           </a:solidFill>
                         </a:rPr>
                         <a:t>2.1%</a:t>
@@ -10622,7 +10525,7 @@
                       <a:tailEnd type="none" w="med" len="med"/>
                     </a:lnB>
                     <a:solidFill>
-                      <a:schemeClr val="bg1"/>
+                      <a:srgbClr val="FFFFFF"/>
                     </a:solidFill>
                   </a:tcPr>
                 </a:tc>
@@ -10639,7 +10542,7 @@
                       <a:r>
                         <a:rPr lang="en-US" sz="1300" dirty="0">
                           <a:solidFill>
-                            <a:schemeClr val="tx1"/>
+                            <a:srgbClr val="212121"/>
                           </a:solidFill>
                         </a:rPr>
                         <a:t>q_align</a:t>
@@ -10685,7 +10588,7 @@
                       <a:tailEnd type="none" w="med" len="med"/>
                     </a:lnB>
                     <a:solidFill>
-                      <a:schemeClr val="bg2"/>
+                      <a:srgbClr val="F2F0EB"/>
                     </a:solidFill>
                   </a:tcPr>
                 </a:tc>
@@ -10700,7 +10603,7 @@
                       <a:r>
                         <a:rPr lang="en-US" sz="1300" dirty="0">
                           <a:solidFill>
-                            <a:schemeClr val="tx1"/>
+                            <a:srgbClr val="212121"/>
                           </a:solidFill>
                         </a:rPr>
                         <a:t>Linear 8 → 16 (site 벡터를 큐빗 수에 맞춤)</a:t>
@@ -10746,7 +10649,7 @@
                       <a:tailEnd type="none" w="med" len="med"/>
                     </a:lnB>
                     <a:solidFill>
-                      <a:schemeClr val="bg2"/>
+                      <a:srgbClr val="F2F0EB"/>
                     </a:solidFill>
                   </a:tcPr>
                 </a:tc>
@@ -10761,7 +10664,7 @@
                       <a:r>
                         <a:rPr lang="en-US" sz="1300" dirty="0">
                           <a:solidFill>
-                            <a:schemeClr val="tx1"/>
+                            <a:srgbClr val="212121"/>
                           </a:solidFill>
                         </a:rPr>
                         <a:t>144</a:t>
@@ -10807,7 +10710,7 @@
                       <a:tailEnd type="none" w="med" len="med"/>
                     </a:lnB>
                     <a:solidFill>
-                      <a:schemeClr val="bg2"/>
+                      <a:srgbClr val="F2F0EB"/>
                     </a:solidFill>
                   </a:tcPr>
                 </a:tc>
@@ -10822,7 +10725,7 @@
                       <a:r>
                         <a:rPr lang="en-US" sz="1300" dirty="0">
                           <a:solidFill>
-                            <a:schemeClr val="tx1"/>
+                            <a:srgbClr val="212121"/>
                           </a:solidFill>
                         </a:rPr>
                         <a:t>0.5%</a:t>
@@ -10868,7 +10771,7 @@
                       <a:tailEnd type="none" w="med" len="med"/>
                     </a:lnB>
                     <a:solidFill>
-                      <a:schemeClr val="bg2"/>
+                      <a:srgbClr val="F2F0EB"/>
                     </a:solidFill>
                   </a:tcPr>
                 </a:tc>
@@ -10885,7 +10788,7 @@
                       <a:r>
                         <a:rPr lang="en-US" sz="1300" dirty="0">
                           <a:solidFill>
-                            <a:schemeClr val="tx1"/>
+                            <a:srgbClr val="212121"/>
                           </a:solidFill>
                         </a:rPr>
                         <a:t>proj_qexp</a:t>
@@ -10931,7 +10834,7 @@
                       <a:tailEnd type="none" w="med" len="med"/>
                     </a:lnB>
                     <a:solidFill>
-                      <a:schemeClr val="bg1"/>
+                      <a:srgbClr val="FFFFFF"/>
                     </a:solidFill>
                   </a:tcPr>
                 </a:tc>
@@ -10946,7 +10849,7 @@
                       <a:r>
                         <a:rPr lang="en-US" sz="1300" dirty="0">
                           <a:solidFill>
-                            <a:schemeClr val="tx1"/>
+                            <a:srgbClr val="212121"/>
                           </a:solidFill>
                         </a:rPr>
                         <a:t>1×1 conv, 5 → 16채널</a:t>
@@ -10992,7 +10895,7 @@
                       <a:tailEnd type="none" w="med" len="med"/>
                     </a:lnB>
                     <a:solidFill>
-                      <a:schemeClr val="bg1"/>
+                      <a:srgbClr val="FFFFFF"/>
                     </a:solidFill>
                   </a:tcPr>
                 </a:tc>
@@ -11007,7 +10910,7 @@
                       <a:r>
                         <a:rPr lang="en-US" sz="1300" dirty="0">
                           <a:solidFill>
-                            <a:schemeClr val="tx1"/>
+                            <a:srgbClr val="212121"/>
                           </a:solidFill>
                         </a:rPr>
                         <a:t>96</a:t>
@@ -11053,7 +10956,7 @@
                       <a:tailEnd type="none" w="med" len="med"/>
                     </a:lnB>
                     <a:solidFill>
-                      <a:schemeClr val="bg1"/>
+                      <a:srgbClr val="FFFFFF"/>
                     </a:solidFill>
                   </a:tcPr>
                 </a:tc>
@@ -11068,7 +10971,7 @@
                       <a:r>
                         <a:rPr lang="en-US" sz="1300" dirty="0">
                           <a:solidFill>
-                            <a:schemeClr val="tx1"/>
+                            <a:srgbClr val="212121"/>
                           </a:solidFill>
                         </a:rPr>
                         <a:t>0.3%</a:t>
@@ -11114,7 +11017,7 @@
                       <a:tailEnd type="none" w="med" len="med"/>
                     </a:lnB>
                     <a:solidFill>
-                      <a:schemeClr val="bg1"/>
+                      <a:srgbClr val="FFFFFF"/>
                     </a:solidFill>
                   </a:tcPr>
                 </a:tc>
@@ -11131,7 +11034,7 @@
                       <a:r>
                         <a:rPr lang="en-US" sz="1300" b="1" dirty="0">
                           <a:solidFill>
-                            <a:schemeClr val="tx1"/>
+                            <a:srgbClr val="212121"/>
                           </a:solidFill>
                         </a:rPr>
                         <a:t>합계</a:t>
@@ -11177,7 +11080,7 @@
                       <a:tailEnd type="none" w="med" len="med"/>
                     </a:lnB>
                     <a:solidFill>
-                      <a:schemeClr val="bg2"/>
+                      <a:srgbClr val="F2F0EB"/>
                     </a:solidFill>
                   </a:tcPr>
                 </a:tc>
@@ -11230,7 +11133,7 @@
                       <a:tailEnd type="none" w="med" len="med"/>
                     </a:lnB>
                     <a:solidFill>
-                      <a:schemeClr val="bg2"/>
+                      <a:srgbClr val="F2F0EB"/>
                     </a:solidFill>
                   </a:tcPr>
                 </a:tc>
@@ -11245,7 +11148,7 @@
                       <a:r>
                         <a:rPr lang="en-US" sz="1300" b="1" dirty="0">
                           <a:solidFill>
-                            <a:schemeClr val="tx1"/>
+                            <a:srgbClr val="212121"/>
                           </a:solidFill>
                         </a:rPr>
                         <a:t>30,000</a:t>
@@ -11291,7 +11194,7 @@
                       <a:tailEnd type="none" w="med" len="med"/>
                     </a:lnB>
                     <a:solidFill>
-                      <a:schemeClr val="bg2"/>
+                      <a:srgbClr val="F2F0EB"/>
                     </a:solidFill>
                   </a:tcPr>
                 </a:tc>
@@ -11306,7 +11209,7 @@
                       <a:r>
                         <a:rPr lang="en-US" sz="1300" dirty="0">
                           <a:solidFill>
-                            <a:schemeClr val="tx1"/>
+                            <a:srgbClr val="212121"/>
                           </a:solidFill>
                         </a:rPr>
                         <a:t>100%</a:t>
@@ -11352,7 +11255,7 @@
                       <a:tailEnd type="none" w="med" len="med"/>
                     </a:lnB>
                     <a:solidFill>
-                      <a:schemeClr val="bg2"/>
+                      <a:srgbClr val="F2F0EB"/>
                     </a:solidFill>
                   </a:tcPr>
                 </a:tc>
@@ -11388,7 +11291,7 @@
             <a:r>
               <a:rPr lang="en-US" sz="1300" dirty="0">
                 <a:solidFill>
-                  <a:schemeClr val="accent6"/>
+                  <a:srgbClr val="6B6B6B"/>
                 </a:solidFill>
               </a:rPr>
               <a:t>파라미터 수로는 2%지만, 학습 시간의 대부분은 이 640개가 들어 있는 16큐빗 회로의 시뮬레이션에서 나옴.</a:t>
@@ -11424,7 +11327,7 @@
             <a:r>
               <a:rPr lang="en-US" sz="900" dirty="0">
                 <a:solidFill>
-                  <a:schemeClr val="accent6"/>
+                  <a:srgbClr val="6B6B6B"/>
                 </a:solidFill>
               </a:rPr>
               <a:t>노트북 ToyDualStreamGenerator(in_dim 256)에서 직접 센 값</a:t>
@@ -11463,7 +11366,7 @@
             <a:lvl1pPr>
               <a:defRPr sz="1000">
                 <a:solidFill>
-                  <a:schemeClr val="accent6"/>
+                  <a:srgbClr val="6B6B6B"/>
                 </a:solidFill>
               </a:defRPr>
             </a:lvl1pPr>
@@ -11532,7 +11435,7 @@
             <a:r>
               <a:rPr lang="en-US" sz="1200" b="1" spc="100" kern="0" dirty="0">
                 <a:solidFill>
-                  <a:schemeClr val="accent1"/>
+                  <a:srgbClr val="00754A"/>
                 </a:solidFill>
               </a:rPr>
               <a:t>PART 1 · 한계</a:t>
@@ -11570,7 +11473,7 @@
             <a:r>
               <a:rPr lang="en-US" sz="3000" b="1" dirty="0">
                 <a:solidFill>
-                  <a:schemeClr val="tx1"/>
+                  <a:srgbClr val="212121"/>
                 </a:solidFill>
               </a:rPr>
               <a:t>원 논문과 실습의 차이</a:t>
@@ -11608,7 +11511,7 @@
             <a:r>
               <a:rPr lang="en-US" sz="1400" dirty="0">
                 <a:solidFill>
-                  <a:schemeClr val="accent6"/>
+                  <a:srgbClr val="6B6B6B"/>
                 </a:solidFill>
               </a:rPr>
               <a:t>양자 stream은 원 논문 스펙 그대로, 고전 부분과 판별자·평가를 단순화함</a:t>
@@ -11657,7 +11560,7 @@
                       <a:r>
                         <a:rPr lang="en-US" sz="1300" b="1" dirty="0">
                           <a:solidFill>
-                            <a:schemeClr val="bg1"/>
+                            <a:srgbClr val="FFFFFF"/>
                           </a:solidFill>
                         </a:rPr>
                         <a:t>항목</a:t>
@@ -11703,7 +11606,7 @@
                       <a:tailEnd type="none" w="med" len="med"/>
                     </a:lnB>
                     <a:solidFill>
-                      <a:schemeClr val="tx2"/>
+                      <a:srgbClr val="1E3932"/>
                     </a:solidFill>
                   </a:tcPr>
                 </a:tc>
@@ -11718,7 +11621,7 @@
                       <a:r>
                         <a:rPr lang="en-US" sz="1300" b="1" dirty="0">
                           <a:solidFill>
-                            <a:schemeClr val="bg1"/>
+                            <a:srgbClr val="FFFFFF"/>
                           </a:solidFill>
                         </a:rPr>
                         <a:t>원 논문 (Jiao et al.)</a:t>
@@ -11764,7 +11667,7 @@
                       <a:tailEnd type="none" w="med" len="med"/>
                     </a:lnB>
                     <a:solidFill>
-                      <a:schemeClr val="tx2"/>
+                      <a:srgbClr val="1E3932"/>
                     </a:solidFill>
                   </a:tcPr>
                 </a:tc>
@@ -11779,7 +11682,7 @@
                       <a:r>
                         <a:rPr lang="en-US" sz="1300" b="1" dirty="0">
                           <a:solidFill>
-                            <a:schemeClr val="bg1"/>
+                            <a:srgbClr val="FFFFFF"/>
                           </a:solidFill>
                         </a:rPr>
                         <a:t>3일차 실습</a:t>
@@ -11825,7 +11728,7 @@
                       <a:tailEnd type="none" w="med" len="med"/>
                     </a:lnB>
                     <a:solidFill>
-                      <a:schemeClr val="tx2"/>
+                      <a:srgbClr val="1E3932"/>
                     </a:solidFill>
                   </a:tcPr>
                 </a:tc>
@@ -11840,7 +11743,7 @@
                       <a:r>
                         <a:rPr lang="en-US" sz="1300" b="1" dirty="0">
                           <a:solidFill>
-                            <a:schemeClr val="bg1"/>
+                            <a:srgbClr val="FFFFFF"/>
                           </a:solidFill>
                         </a:rPr>
                         <a:t>비고</a:t>
@@ -11886,7 +11789,7 @@
                       <a:tailEnd type="none" w="med" len="med"/>
                     </a:lnB>
                     <a:solidFill>
-                      <a:schemeClr val="tx2"/>
+                      <a:srgbClr val="1E3932"/>
                     </a:solidFill>
                   </a:tcPr>
                 </a:tc>
@@ -11903,7 +11806,7 @@
                       <a:r>
                         <a:rPr lang="en-US" sz="1300" dirty="0">
                           <a:solidFill>
-                            <a:schemeClr val="tx1"/>
+                            <a:srgbClr val="212121"/>
                           </a:solidFill>
                         </a:rPr>
                         <a:t>양자 stream</a:t>
@@ -11949,7 +11852,7 @@
                       <a:tailEnd type="none" w="med" len="med"/>
                     </a:lnB>
                     <a:solidFill>
-                      <a:schemeClr val="bg1"/>
+                      <a:srgbClr val="FFFFFF"/>
                     </a:solidFill>
                   </a:tcPr>
                 </a:tc>
@@ -11964,7 +11867,7 @@
                       <a:r>
                         <a:rPr lang="en-US" sz="1300" dirty="0">
                           <a:solidFill>
-                            <a:schemeClr val="tx1"/>
+                            <a:srgbClr val="212121"/>
                           </a:solidFill>
                         </a:rPr>
                         <a:t>16큐빗 × 5, depth 8</a:t>
@@ -12010,7 +11913,7 @@
                       <a:tailEnd type="none" w="med" len="med"/>
                     </a:lnB>
                     <a:solidFill>
-                      <a:schemeClr val="bg1"/>
+                      <a:srgbClr val="FFFFFF"/>
                     </a:solidFill>
                   </a:tcPr>
                 </a:tc>
@@ -12025,7 +11928,7 @@
                       <a:r>
                         <a:rPr lang="en-US" sz="1300" b="1" dirty="0">
                           <a:solidFill>
-                            <a:schemeClr val="accent1"/>
+                            <a:srgbClr val="00754A"/>
                           </a:solidFill>
                         </a:rPr>
                         <a:t>동일</a:t>
@@ -12071,7 +11974,7 @@
                       <a:tailEnd type="none" w="med" len="med"/>
                     </a:lnB>
                     <a:solidFill>
-                      <a:schemeClr val="bg1"/>
+                      <a:srgbClr val="FFFFFF"/>
                     </a:solidFill>
                   </a:tcPr>
                 </a:tc>
@@ -12086,7 +11989,7 @@
                       <a:r>
                         <a:rPr lang="en-US" sz="1300" dirty="0">
                           <a:solidFill>
-                            <a:schemeClr val="tx1"/>
+                            <a:srgbClr val="212121"/>
                           </a:solidFill>
                         </a:rPr>
                         <a:t>공식 레포와 같은 회로</a:t>
@@ -12132,7 +12035,7 @@
                       <a:tailEnd type="none" w="med" len="med"/>
                     </a:lnB>
                     <a:solidFill>
-                      <a:schemeClr val="bg1"/>
+                      <a:srgbClr val="FFFFFF"/>
                     </a:solidFill>
                   </a:tcPr>
                 </a:tc>
@@ -12149,7 +12052,7 @@
                       <a:r>
                         <a:rPr lang="en-US" sz="1300" dirty="0">
                           <a:solidFill>
-                            <a:schemeClr val="tx1"/>
+                            <a:srgbClr val="212121"/>
                           </a:solidFill>
                         </a:rPr>
                         <a:t>고전 encoder / decoder</a:t>
@@ -12195,7 +12098,7 @@
                       <a:tailEnd type="none" w="med" len="med"/>
                     </a:lnB>
                     <a:solidFill>
-                      <a:schemeClr val="bg2"/>
+                      <a:srgbClr val="F2F0EB"/>
                     </a:solidFill>
                   </a:tcPr>
                 </a:tc>
@@ -12210,7 +12113,7 @@
                       <a:r>
                         <a:rPr lang="en-US" sz="1300" dirty="0">
                           <a:solidFill>
-                            <a:schemeClr val="tx1"/>
+                            <a:srgbClr val="212121"/>
                           </a:solidFill>
                         </a:rPr>
                         <a:t>conv</a:t>
@@ -12256,7 +12159,7 @@
                       <a:tailEnd type="none" w="med" len="med"/>
                     </a:lnB>
                     <a:solidFill>
-                      <a:schemeClr val="bg2"/>
+                      <a:srgbClr val="F2F0EB"/>
                     </a:solidFill>
                   </a:tcPr>
                 </a:tc>
@@ -12271,7 +12174,7 @@
                       <a:r>
                         <a:rPr lang="en-US" sz="1300" dirty="0">
                           <a:solidFill>
-                            <a:schemeClr val="tx1"/>
+                            <a:srgbClr val="212121"/>
                           </a:solidFill>
                         </a:rPr>
                         <a:t>MLP</a:t>
@@ -12317,7 +12220,7 @@
                       <a:tailEnd type="none" w="med" len="med"/>
                     </a:lnB>
                     <a:solidFill>
-                      <a:schemeClr val="bg2"/>
+                      <a:srgbClr val="F2F0EB"/>
                     </a:solidFill>
                   </a:tcPr>
                 </a:tc>
@@ -12332,7 +12235,7 @@
                       <a:r>
                         <a:rPr lang="en-US" sz="1300" dirty="0">
                           <a:solidFill>
-                            <a:schemeClr val="tx1"/>
+                            <a:srgbClr val="212121"/>
                           </a:solidFill>
                         </a:rPr>
                         <a:t>16×16 저해상도라 단순화</a:t>
@@ -12378,7 +12281,7 @@
                       <a:tailEnd type="none" w="med" len="med"/>
                     </a:lnB>
                     <a:solidFill>
-                      <a:schemeClr val="bg2"/>
+                      <a:srgbClr val="F2F0EB"/>
                     </a:solidFill>
                   </a:tcPr>
                 </a:tc>
@@ -12395,7 +12298,7 @@
                       <a:r>
                         <a:rPr lang="en-US" sz="1300" dirty="0">
                           <a:solidFill>
-                            <a:schemeClr val="tx1"/>
+                            <a:srgbClr val="212121"/>
                           </a:solidFill>
                         </a:rPr>
                         <a:t>입력 · 출력</a:t>
@@ -12441,7 +12344,7 @@
                       <a:tailEnd type="none" w="med" len="med"/>
                     </a:lnB>
                     <a:solidFill>
-                      <a:schemeClr val="bg1"/>
+                      <a:srgbClr val="FFFFFF"/>
                     </a:solidFill>
                   </a:tcPr>
                 </a:tc>
@@ -12456,7 +12359,7 @@
                       <a:r>
                         <a:rPr lang="en-US" sz="1300" dirty="0">
                           <a:solidFill>
-                            <a:schemeClr val="tx1"/>
+                            <a:srgbClr val="212121"/>
                           </a:solidFill>
                         </a:rPr>
                         <a:t>64×64 RGB</a:t>
@@ -12502,7 +12405,7 @@
                       <a:tailEnd type="none" w="med" len="med"/>
                     </a:lnB>
                     <a:solidFill>
-                      <a:schemeClr val="bg1"/>
+                      <a:srgbClr val="FFFFFF"/>
                     </a:solidFill>
                   </a:tcPr>
                 </a:tc>
@@ -12517,7 +12420,7 @@
                       <a:r>
                         <a:rPr lang="en-US" sz="1300" dirty="0">
                           <a:solidFill>
-                            <a:schemeClr val="tx1"/>
+                            <a:srgbClr val="212121"/>
                           </a:solidFill>
                         </a:rPr>
                         <a:t>16×16 그레이스케일</a:t>
@@ -12563,7 +12466,7 @@
                       <a:tailEnd type="none" w="med" len="med"/>
                     </a:lnB>
                     <a:solidFill>
-                      <a:schemeClr val="bg1"/>
+                      <a:srgbClr val="FFFFFF"/>
                     </a:solidFill>
                   </a:tcPr>
                 </a:tc>
@@ -12578,7 +12481,7 @@
                       <a:r>
                         <a:rPr lang="en-US" sz="1300" dirty="0">
                           <a:solidFill>
-                            <a:schemeClr val="tx1"/>
+                            <a:srgbClr val="212121"/>
                           </a:solidFill>
                         </a:rPr>
                         <a:t>2일차 전처리 자산 사용</a:t>
@@ -12624,7 +12527,7 @@
                       <a:tailEnd type="none" w="med" len="med"/>
                     </a:lnB>
                     <a:solidFill>
-                      <a:schemeClr val="bg1"/>
+                      <a:srgbClr val="FFFFFF"/>
                     </a:solidFill>
                   </a:tcPr>
                 </a:tc>
@@ -12641,7 +12544,7 @@
                       <a:r>
                         <a:rPr lang="en-US" sz="1300" dirty="0">
                           <a:solidFill>
-                            <a:schemeClr val="tx1"/>
+                            <a:srgbClr val="212121"/>
                           </a:solidFill>
                         </a:rPr>
                         <a:t>판별자</a:t>
@@ -12687,7 +12590,7 @@
                       <a:tailEnd type="none" w="med" len="med"/>
                     </a:lnB>
                     <a:solidFill>
-                      <a:schemeClr val="bg2"/>
+                      <a:srgbClr val="F2F0EB"/>
                     </a:solidFill>
                   </a:tcPr>
                 </a:tc>
@@ -12702,7 +12605,7 @@
                       <a:r>
                         <a:rPr lang="en-US" sz="1300" dirty="0">
                           <a:solidFill>
-                            <a:schemeClr val="tx1"/>
+                            <a:srgbClr val="212121"/>
                           </a:solidFill>
                         </a:rPr>
                         <a:t>WGAN-GP critic</a:t>
@@ -12748,7 +12651,7 @@
                       <a:tailEnd type="none" w="med" len="med"/>
                     </a:lnB>
                     <a:solidFill>
-                      <a:schemeClr val="bg2"/>
+                      <a:srgbClr val="F2F0EB"/>
                     </a:solidFill>
                   </a:tcPr>
                 </a:tc>
@@ -12763,7 +12666,7 @@
                       <a:r>
                         <a:rPr lang="en-US" sz="1300" dirty="0">
                           <a:solidFill>
-                            <a:schemeClr val="tx1"/>
+                            <a:srgbClr val="212121"/>
                           </a:solidFill>
                         </a:rPr>
                         <a:t>표준 BCE 판별자 (Table 4)</a:t>
@@ -12809,7 +12712,7 @@
                       <a:tailEnd type="none" w="med" len="med"/>
                     </a:lnB>
                     <a:solidFill>
-                      <a:schemeClr val="bg2"/>
+                      <a:srgbClr val="F2F0EB"/>
                     </a:solidFill>
                   </a:tcPr>
                 </a:tc>
@@ -12824,7 +12727,7 @@
                       <a:r>
                         <a:rPr lang="en-US" sz="1300" dirty="0">
                           <a:solidFill>
-                            <a:schemeClr val="tx1"/>
+                            <a:srgbClr val="212121"/>
                           </a:solidFill>
                         </a:rPr>
                         <a:t>QGAN과 같은 판별자</a:t>
@@ -12870,7 +12773,7 @@
                       <a:tailEnd type="none" w="med" len="med"/>
                     </a:lnB>
                     <a:solidFill>
-                      <a:schemeClr val="bg2"/>
+                      <a:srgbClr val="F2F0EB"/>
                     </a:solidFill>
                   </a:tcPr>
                 </a:tc>
@@ -12887,7 +12790,7 @@
                       <a:r>
                         <a:rPr lang="en-US" sz="1300" dirty="0">
                           <a:solidFill>
-                            <a:schemeClr val="tx1"/>
+                            <a:srgbClr val="212121"/>
                           </a:solidFill>
                         </a:rPr>
                         <a:t>학습</a:t>
@@ -12933,7 +12836,7 @@
                       <a:tailEnd type="none" w="med" len="med"/>
                     </a:lnB>
                     <a:solidFill>
-                      <a:schemeClr val="bg1"/>
+                      <a:srgbClr val="FFFFFF"/>
                     </a:solidFill>
                   </a:tcPr>
                 </a:tc>
@@ -12948,7 +12851,7 @@
                       <a:r>
                         <a:rPr lang="en-US" sz="1300" dirty="0">
                           <a:solidFill>
-                            <a:schemeClr val="tx1"/>
+                            <a:srgbClr val="212121"/>
                           </a:solidFill>
                         </a:rPr>
                         <a:t>GPU, 전체 학습</a:t>
@@ -12994,7 +12897,7 @@
                       <a:tailEnd type="none" w="med" len="med"/>
                     </a:lnB>
                     <a:solidFill>
-                      <a:schemeClr val="bg1"/>
+                      <a:srgbClr val="FFFFFF"/>
                     </a:solidFill>
                   </a:tcPr>
                 </a:tc>
@@ -13009,7 +12912,7 @@
                       <a:r>
                         <a:rPr lang="en-US" sz="1300" dirty="0">
                           <a:solidFill>
-                            <a:schemeClr val="tx1"/>
+                            <a:srgbClr val="212121"/>
                           </a:solidFill>
                         </a:rPr>
                         <a:t>25 epoch 사전학습 + 수업 중 미세조정</a:t>
@@ -13055,7 +12958,7 @@
                       <a:tailEnd type="none" w="med" len="med"/>
                     </a:lnB>
                     <a:solidFill>
-                      <a:schemeClr val="bg1"/>
+                      <a:srgbClr val="FFFFFF"/>
                     </a:solidFill>
                   </a:tcPr>
                 </a:tc>
@@ -13070,7 +12973,7 @@
                       <a:r>
                         <a:rPr lang="en-US" sz="1300" dirty="0">
                           <a:solidFill>
-                            <a:schemeClr val="tx1"/>
+                            <a:srgbClr val="212121"/>
                           </a:solidFill>
                         </a:rPr>
                         <a:t>16큐빗 시뮬레이션 비용</a:t>
@@ -13116,7 +13019,7 @@
                       <a:tailEnd type="none" w="med" len="med"/>
                     </a:lnB>
                     <a:solidFill>
-                      <a:schemeClr val="bg1"/>
+                      <a:srgbClr val="FFFFFF"/>
                     </a:solidFill>
                   </a:tcPr>
                 </a:tc>
@@ -13133,7 +13036,7 @@
                       <a:r>
                         <a:rPr lang="en-US" sz="1300" dirty="0">
                           <a:solidFill>
-                            <a:schemeClr val="tx1"/>
+                            <a:srgbClr val="212121"/>
                           </a:solidFill>
                         </a:rPr>
                         <a:t>평가</a:t>
@@ -13179,7 +13082,7 @@
                       <a:tailEnd type="none" w="med" len="med"/>
                     </a:lnB>
                     <a:solidFill>
-                      <a:schemeClr val="bg2"/>
+                      <a:srgbClr val="F2F0EB"/>
                     </a:solidFill>
                   </a:tcPr>
                 </a:tc>
@@ -13194,7 +13097,7 @@
                       <a:r>
                         <a:rPr lang="en-US" sz="1300" dirty="0">
                           <a:solidFill>
-                            <a:schemeClr val="tx1"/>
+                            <a:srgbClr val="212121"/>
                           </a:solidFill>
                         </a:rPr>
                         <a:t>FID, 분류 성능</a:t>
@@ -13240,7 +13143,7 @@
                       <a:tailEnd type="none" w="med" len="med"/>
                     </a:lnB>
                     <a:solidFill>
-                      <a:schemeClr val="bg2"/>
+                      <a:srgbClr val="F2F0EB"/>
                     </a:solidFill>
                   </a:tcPr>
                 </a:tc>
@@ -13255,7 +13158,7 @@
                       <a:r>
                         <a:rPr lang="en-US" sz="1300" dirty="0">
                           <a:solidFill>
-                            <a:schemeClr val="tx1"/>
+                            <a:srgbClr val="212121"/>
                           </a:solidFill>
                         </a:rPr>
                         <a:t>지표 4종</a:t>
@@ -13301,7 +13204,7 @@
                       <a:tailEnd type="none" w="med" len="med"/>
                     </a:lnB>
                     <a:solidFill>
-                      <a:schemeClr val="bg2"/>
+                      <a:srgbClr val="F2F0EB"/>
                     </a:solidFill>
                   </a:tcPr>
                 </a:tc>
@@ -13316,7 +13219,7 @@
                       <a:r>
                         <a:rPr lang="en-US" sz="1300" dirty="0">
                           <a:solidFill>
-                            <a:schemeClr val="tx1"/>
+                            <a:srgbClr val="212121"/>
                           </a:solidFill>
                         </a:rPr>
                         <a:t>FID는 16×16에서 의미 없음</a:t>
@@ -13362,7 +13265,7 @@
                       <a:tailEnd type="none" w="med" len="med"/>
                     </a:lnB>
                     <a:solidFill>
-                      <a:schemeClr val="bg2"/>
+                      <a:srgbClr val="F2F0EB"/>
                     </a:solidFill>
                   </a:tcPr>
                 </a:tc>
@@ -13401,7 +13304,7 @@
             <a:lvl1pPr>
               <a:defRPr sz="1000">
                 <a:solidFill>
-                  <a:schemeClr val="accent6"/>
+                  <a:srgbClr val="6B6B6B"/>
                 </a:solidFill>
               </a:defRPr>
             </a:lvl1pPr>
@@ -13470,10 +13373,10 @@
             <a:r>
               <a:rPr lang="en-US" sz="1200" b="1" spc="100" kern="0" dirty="0">
                 <a:solidFill>
-                  <a:schemeClr val="accent3"/>
+                  <a:srgbClr val="DFC49D"/>
                 </a:solidFill>
               </a:rPr>
-              <a:t>PART 2 · 노트북 §4 셀 실행 후</a:t>
+              <a:t>PART 2 · 노트북 §4</a:t>
             </a:r>
             <a:endParaRPr lang="en-US" sz="1200" dirty="0"/>
           </a:p>
@@ -13508,7 +13411,7 @@
             <a:r>
               <a:rPr lang="en-US" sz="3600" b="1" dirty="0">
                 <a:solidFill>
-                  <a:schemeClr val="bg1"/>
+                  <a:srgbClr val="FFFFFF"/>
                 </a:solidFill>
               </a:rPr>
               <a:t>라이브 미세조정</a:t>
@@ -13546,7 +13449,7 @@
             <a:r>
               <a:rPr lang="en-US" sz="1500" dirty="0">
                 <a:solidFill>
-                  <a:schemeClr val="bg2"/>
+                  <a:srgbClr val="F2F0EB"/>
                 </a:solidFill>
               </a:rPr>
               <a:t>덜 학습된 10 epoch checkpoint에서 출발해 20 step을 더 학습함</a:t>
@@ -13582,7 +13485,7 @@
             <a:r>
               <a:rPr lang="en-US" sz="1400" b="1" dirty="0">
                 <a:solidFill>
-                  <a:schemeClr val="accent3"/>
+                  <a:srgbClr val="DFC49D"/>
                 </a:solidFill>
               </a:rPr>
               <a:t>노트북 범위</a:t>
@@ -13618,7 +13521,7 @@
             <a:r>
               <a:rPr lang="en-US" sz="1500" dirty="0">
                 <a:solidFill>
-                  <a:schemeClr val="bg1"/>
+                  <a:srgbClr val="FFFFFF"/>
                 </a:solidFill>
               </a:rPr>
               <a:t>§4 미세조정과 전후 비교</a:t>
@@ -13654,7 +13557,7 @@
             <a:r>
               <a:rPr lang="en-US" sz="1400" b="1" dirty="0">
                 <a:solidFill>
-                  <a:schemeClr val="accent3"/>
+                  <a:srgbClr val="DFC49D"/>
                 </a:solidFill>
               </a:rPr>
               <a:t>다루는 코드</a:t>
@@ -13690,7 +13593,7 @@
             <a:r>
               <a:rPr lang="en-US" sz="1500" dirty="0">
                 <a:solidFill>
-                  <a:schemeClr val="bg1"/>
+                  <a:srgbClr val="FFFFFF"/>
                 </a:solidFill>
               </a:rPr>
               <a:t>mediqgan_e010.pt · sample_z · real_tanh · Adam(betas=(0.5, 0.999))</a:t>
@@ -13726,7 +13629,7 @@
             <a:r>
               <a:rPr lang="en-US" sz="1400" b="1" dirty="0">
                 <a:solidFill>
-                  <a:schemeClr val="accent3"/>
+                  <a:srgbClr val="DFC49D"/>
                 </a:solidFill>
               </a:rPr>
               <a:t>소요 시간</a:t>
@@ -13762,7 +13665,7 @@
             <a:r>
               <a:rPr lang="en-US" sz="1500" dirty="0">
                 <a:solidFill>
-                  <a:schemeClr val="bg1"/>
+                  <a:srgbClr val="FFFFFF"/>
                 </a:solidFill>
               </a:rPr>
               <a:t>20 step 약 7분 (로컬 CPU), Colab은 더 걸림</a:t>
@@ -13801,7 +13704,7 @@
             <a:lvl1pPr>
               <a:defRPr sz="1000">
                 <a:solidFill>
-                  <a:schemeClr val="accent6"/>
+                  <a:srgbClr val="6B6B6B"/>
                 </a:solidFill>
               </a:defRPr>
             </a:lvl1pPr>
@@ -13870,7 +13773,7 @@
             <a:r>
               <a:rPr lang="en-US" sz="1200" b="1" spc="100" kern="0" dirty="0">
                 <a:solidFill>
-                  <a:schemeClr val="accent1"/>
+                  <a:srgbClr val="00754A"/>
                 </a:solidFill>
               </a:rPr>
               <a:t>PART 2 · 노트북 §4 코드</a:t>
@@ -13908,7 +13811,7 @@
             <a:r>
               <a:rPr lang="en-US" sz="3000" b="1" dirty="0">
                 <a:solidFill>
-                  <a:schemeClr val="tx1"/>
+                  <a:srgbClr val="212121"/>
                 </a:solidFill>
               </a:rPr>
               <a:t>미세조정 코드와 2일차 설정 비교</a:t>
@@ -13946,7 +13849,7 @@
             <a:r>
               <a:rPr lang="en-US" sz="1400" dirty="0">
                 <a:solidFill>
-                  <a:schemeClr val="accent6"/>
+                  <a:srgbClr val="6B6B6B"/>
                 </a:solidFill>
               </a:rPr>
               <a:t>루프 구조는 2일차와 같고, 출력 척도·잠재벡터·optimizer 설정이 다름</a:t>
@@ -13972,7 +13875,7 @@
             </a:avLst>
           </a:prstGeom>
           <a:solidFill>
-            <a:schemeClr val="tx2"/>
+            <a:srgbClr val="1E3932"/>
           </a:solidFill>
           <a:ln/>
         </p:spPr>
@@ -14007,7 +13910,7 @@
             <a:r>
               <a:rPr lang="en-US" sz="1150" dirty="0">
                 <a:solidFill>
-                  <a:schemeClr val="bg2"/>
+                  <a:srgbClr val="F2F0EB"/>
                 </a:solidFill>
                 <a:latin typeface="Courier New" pitchFamily="34" charset="0"/>
                 <a:ea typeface="Courier New" pitchFamily="34" charset="-122"/>
@@ -14027,7 +13930,7 @@
             <a:r>
               <a:rPr lang="en-US" sz="1150" b="1" dirty="0">
                 <a:solidFill>
-                  <a:schemeClr val="accent3"/>
+                  <a:srgbClr val="DFC49D"/>
                 </a:solidFill>
                 <a:latin typeface="Courier New" pitchFamily="34" charset="0"/>
                 <a:ea typeface="Courier New" pitchFamily="34" charset="-122"/>
@@ -14047,7 +13950,7 @@
             <a:r>
               <a:rPr lang="en-US" sz="1150" dirty="0">
                 <a:solidFill>
-                  <a:schemeClr val="bg2"/>
+                  <a:srgbClr val="F2F0EB"/>
                 </a:solidFill>
                 <a:latin typeface="Courier New" pitchFamily="34" charset="0"/>
                 <a:ea typeface="Courier New" pitchFamily="34" charset="-122"/>
@@ -14067,7 +13970,7 @@
             <a:r>
               <a:rPr lang="en-US" sz="1150" b="1" dirty="0">
                 <a:solidFill>
-                  <a:schemeClr val="accent3"/>
+                  <a:srgbClr val="DFC49D"/>
                 </a:solidFill>
                 <a:latin typeface="Courier New" pitchFamily="34" charset="0"/>
                 <a:ea typeface="Courier New" pitchFamily="34" charset="-122"/>
@@ -14087,7 +13990,7 @@
             <a:r>
               <a:rPr lang="en-US" sz="1150" dirty="0">
                 <a:solidFill>
-                  <a:schemeClr val="bg2"/>
+                  <a:srgbClr val="F2F0EB"/>
                 </a:solidFill>
                 <a:latin typeface="Courier New" pitchFamily="34" charset="0"/>
                 <a:ea typeface="Courier New" pitchFamily="34" charset="-122"/>
@@ -14107,7 +14010,7 @@
             <a:r>
               <a:rPr lang="en-US" sz="1150" dirty="0">
                 <a:solidFill>
-                  <a:schemeClr val="bg2"/>
+                  <a:srgbClr val="F2F0EB"/>
                 </a:solidFill>
                 <a:latin typeface="Courier New" pitchFamily="34" charset="0"/>
                 <a:ea typeface="Courier New" pitchFamily="34" charset="-122"/>
@@ -14127,7 +14030,7 @@
             <a:r>
               <a:rPr lang="en-US" sz="1150" b="1" dirty="0">
                 <a:solidFill>
-                  <a:schemeClr val="accent3"/>
+                  <a:srgbClr val="DFC49D"/>
                 </a:solidFill>
                 <a:latin typeface="Courier New" pitchFamily="34" charset="0"/>
                 <a:ea typeface="Courier New" pitchFamily="34" charset="-122"/>
@@ -14147,7 +14050,7 @@
             <a:r>
               <a:rPr lang="en-US" sz="1150" dirty="0">
                 <a:solidFill>
-                  <a:schemeClr val="bg2"/>
+                  <a:srgbClr val="F2F0EB"/>
                 </a:solidFill>
                 <a:latin typeface="Courier New" pitchFamily="34" charset="0"/>
                 <a:ea typeface="Courier New" pitchFamily="34" charset="-122"/>
@@ -14167,7 +14070,7 @@
             <a:r>
               <a:rPr lang="en-US" sz="1150" dirty="0">
                 <a:solidFill>
-                  <a:schemeClr val="bg2"/>
+                  <a:srgbClr val="F2F0EB"/>
                 </a:solidFill>
                 <a:latin typeface="Courier New" pitchFamily="34" charset="0"/>
                 <a:ea typeface="Courier New" pitchFamily="34" charset="-122"/>
@@ -14187,7 +14090,7 @@
             <a:r>
               <a:rPr lang="en-US" sz="1150" dirty="0">
                 <a:solidFill>
-                  <a:schemeClr val="bg2"/>
+                  <a:srgbClr val="F2F0EB"/>
                 </a:solidFill>
                 <a:latin typeface="Courier New" pitchFamily="34" charset="0"/>
                 <a:ea typeface="Courier New" pitchFamily="34" charset="-122"/>
@@ -14207,7 +14110,7 @@
             <a:r>
               <a:rPr lang="en-US" sz="1150" dirty="0">
                 <a:solidFill>
-                  <a:schemeClr val="bg2"/>
+                  <a:srgbClr val="F2F0EB"/>
                 </a:solidFill>
                 <a:latin typeface="Courier New" pitchFamily="34" charset="0"/>
                 <a:ea typeface="Courier New" pitchFamily="34" charset="-122"/>
@@ -14258,7 +14161,7 @@
                       <a:r>
                         <a:rPr lang="en-US" sz="1150" b="1" dirty="0">
                           <a:solidFill>
-                            <a:schemeClr val="bg1"/>
+                            <a:srgbClr val="FFFFFF"/>
                           </a:solidFill>
                         </a:rPr>
                         <a:t>설정</a:t>
@@ -14304,7 +14207,7 @@
                       <a:tailEnd type="none" w="med" len="med"/>
                     </a:lnB>
                     <a:solidFill>
-                      <a:schemeClr val="tx2"/>
+                      <a:srgbClr val="1E3932"/>
                     </a:solidFill>
                   </a:tcPr>
                 </a:tc>
@@ -14319,7 +14222,7 @@
                       <a:r>
                         <a:rPr lang="en-US" sz="1150" b="1" dirty="0">
                           <a:solidFill>
-                            <a:schemeClr val="bg1"/>
+                            <a:srgbClr val="FFFFFF"/>
                           </a:solidFill>
                         </a:rPr>
                         <a:t>2일차 QGAN</a:t>
@@ -14365,7 +14268,7 @@
                       <a:tailEnd type="none" w="med" len="med"/>
                     </a:lnB>
                     <a:solidFill>
-                      <a:schemeClr val="tx2"/>
+                      <a:srgbClr val="1E3932"/>
                     </a:solidFill>
                   </a:tcPr>
                 </a:tc>
@@ -14380,7 +14283,7 @@
                       <a:r>
                         <a:rPr lang="en-US" sz="1150" b="1" dirty="0">
                           <a:solidFill>
-                            <a:schemeClr val="bg1"/>
+                            <a:srgbClr val="FFFFFF"/>
                           </a:solidFill>
                         </a:rPr>
                         <a:t>3일차 MediQ</a:t>
@@ -14426,7 +14329,7 @@
                       <a:tailEnd type="none" w="med" len="med"/>
                     </a:lnB>
                     <a:solidFill>
-                      <a:schemeClr val="tx2"/>
+                      <a:srgbClr val="1E3932"/>
                     </a:solidFill>
                   </a:tcPr>
                 </a:tc>
@@ -14443,7 +14346,7 @@
                       <a:r>
                         <a:rPr lang="en-US" sz="1150" dirty="0">
                           <a:solidFill>
-                            <a:schemeClr val="tx1"/>
+                            <a:srgbClr val="212121"/>
                           </a:solidFill>
                         </a:rPr>
                         <a:t>출력 척도</a:t>
@@ -14489,7 +14392,7 @@
                       <a:tailEnd type="none" w="med" len="med"/>
                     </a:lnB>
                     <a:solidFill>
-                      <a:schemeClr val="bg1"/>
+                      <a:srgbClr val="FFFFFF"/>
                     </a:solidFill>
                   </a:tcPr>
                 </a:tc>
@@ -14504,7 +14407,7 @@
                       <a:r>
                         <a:rPr lang="en-US" sz="1150" dirty="0">
                           <a:solidFill>
-                            <a:schemeClr val="tx1"/>
+                            <a:srgbClr val="212121"/>
                           </a:solidFill>
                         </a:rPr>
                         <a:t>확률 (prob)</a:t>
@@ -14550,7 +14453,7 @@
                       <a:tailEnd type="none" w="med" len="med"/>
                     </a:lnB>
                     <a:solidFill>
-                      <a:schemeClr val="bg1"/>
+                      <a:srgbClr val="FFFFFF"/>
                     </a:solidFill>
                   </a:tcPr>
                 </a:tc>
@@ -14565,7 +14468,7 @@
                       <a:r>
                         <a:rPr lang="en-US" sz="1150" dirty="0">
                           <a:solidFill>
-                            <a:schemeClr val="tx1"/>
+                            <a:srgbClr val="212121"/>
                           </a:solidFill>
                         </a:rPr>
                         <a:t>Tanh (-1 ~ 1)</a:t>
@@ -14611,7 +14514,7 @@
                       <a:tailEnd type="none" w="med" len="med"/>
                     </a:lnB>
                     <a:solidFill>
-                      <a:schemeClr val="bg1"/>
+                      <a:srgbClr val="FFFFFF"/>
                     </a:solidFill>
                   </a:tcPr>
                 </a:tc>
@@ -14628,7 +14531,7 @@
                       <a:r>
                         <a:rPr lang="en-US" sz="1150" dirty="0">
                           <a:solidFill>
-                            <a:schemeClr val="tx1"/>
+                            <a:srgbClr val="212121"/>
                           </a:solidFill>
                         </a:rPr>
                         <a:t>실제 이미지</a:t>
@@ -14674,7 +14577,7 @@
                       <a:tailEnd type="none" w="med" len="med"/>
                     </a:lnB>
                     <a:solidFill>
-                      <a:schemeClr val="bg2"/>
+                      <a:srgbClr val="F2F0EB"/>
                     </a:solidFill>
                   </a:tcPr>
                 </a:tc>
@@ -14689,7 +14592,7 @@
                       <a:r>
                         <a:rPr lang="en-US" sz="1150" dirty="0">
                           <a:solidFill>
-                            <a:schemeClr val="tx1"/>
+                            <a:srgbClr val="212121"/>
                           </a:solidFill>
                         </a:rPr>
                         <a:t>이미지 합 = 1</a:t>
@@ -14735,7 +14638,7 @@
                       <a:tailEnd type="none" w="med" len="med"/>
                     </a:lnB>
                     <a:solidFill>
-                      <a:schemeClr val="bg2"/>
+                      <a:srgbClr val="F2F0EB"/>
                     </a:solidFill>
                   </a:tcPr>
                 </a:tc>
@@ -14750,7 +14653,7 @@
                       <a:r>
                         <a:rPr lang="en-US" sz="1150" dirty="0">
                           <a:solidFill>
-                            <a:schemeClr val="tx1"/>
+                            <a:srgbClr val="212121"/>
                           </a:solidFill>
                         </a:rPr>
                         <a:t>2x - 1</a:t>
@@ -14796,7 +14699,7 @@
                       <a:tailEnd type="none" w="med" len="med"/>
                     </a:lnB>
                     <a:solidFill>
-                      <a:schemeClr val="bg2"/>
+                      <a:srgbClr val="F2F0EB"/>
                     </a:solidFill>
                   </a:tcPr>
                 </a:tc>
@@ -14813,7 +14716,7 @@
                       <a:r>
                         <a:rPr lang="en-US" sz="1150" dirty="0">
                           <a:solidFill>
-                            <a:schemeClr val="tx1"/>
+                            <a:srgbClr val="212121"/>
                           </a:solidFill>
                         </a:rPr>
                         <a:t>잠재벡터</a:t>
@@ -14859,7 +14762,7 @@
                       <a:tailEnd type="none" w="med" len="med"/>
                     </a:lnB>
                     <a:solidFill>
-                      <a:schemeClr val="bg1"/>
+                      <a:srgbClr val="FFFFFF"/>
                     </a:solidFill>
                   </a:tcPr>
                 </a:tc>
@@ -14874,7 +14777,7 @@
                       <a:r>
                         <a:rPr lang="en-US" sz="1150" dirty="0">
                           <a:solidFill>
-                            <a:schemeClr val="tx1"/>
+                            <a:srgbClr val="212121"/>
                           </a:solidFill>
                         </a:rPr>
                         <a:t>U(0, π) 각도</a:t>
@@ -14920,7 +14823,7 @@
                       <a:tailEnd type="none" w="med" len="med"/>
                     </a:lnB>
                     <a:solidFill>
-                      <a:schemeClr val="bg1"/>
+                      <a:srgbClr val="FFFFFF"/>
                     </a:solidFill>
                   </a:tcPr>
                 </a:tc>
@@ -14935,7 +14838,7 @@
                       <a:r>
                         <a:rPr lang="en-US" sz="1150" dirty="0">
                           <a:solidFill>
-                            <a:schemeClr val="tx1"/>
+                            <a:srgbClr val="212121"/>
                           </a:solidFill>
                         </a:rPr>
                         <a:t>N(0, 1)</a:t>
@@ -14981,7 +14884,7 @@
                       <a:tailEnd type="none" w="med" len="med"/>
                     </a:lnB>
                     <a:solidFill>
-                      <a:schemeClr val="bg1"/>
+                      <a:srgbClr val="FFFFFF"/>
                     </a:solidFill>
                   </a:tcPr>
                 </a:tc>
@@ -14998,7 +14901,7 @@
                       <a:r>
                         <a:rPr lang="en-US" sz="1150" dirty="0">
                           <a:solidFill>
-                            <a:schemeClr val="tx1"/>
+                            <a:srgbClr val="212121"/>
                           </a:solidFill>
                         </a:rPr>
                         <a:t>학습률 G / D</a:t>
@@ -15044,7 +14947,7 @@
                       <a:tailEnd type="none" w="med" len="med"/>
                     </a:lnB>
                     <a:solidFill>
-                      <a:schemeClr val="bg2"/>
+                      <a:srgbClr val="F2F0EB"/>
                     </a:solidFill>
                   </a:tcPr>
                 </a:tc>
@@ -15059,7 +14962,7 @@
                       <a:r>
                         <a:rPr lang="en-US" sz="1150" dirty="0">
                           <a:solidFill>
-                            <a:schemeClr val="tx1"/>
+                            <a:srgbClr val="212121"/>
                           </a:solidFill>
                         </a:rPr>
                         <a:t>0.05 / 0.001</a:t>
@@ -15105,7 +15008,7 @@
                       <a:tailEnd type="none" w="med" len="med"/>
                     </a:lnB>
                     <a:solidFill>
-                      <a:schemeClr val="bg2"/>
+                      <a:srgbClr val="F2F0EB"/>
                     </a:solidFill>
                   </a:tcPr>
                 </a:tc>
@@ -15120,7 +15023,7 @@
                       <a:r>
                         <a:rPr lang="en-US" sz="1150" dirty="0">
                           <a:solidFill>
-                            <a:schemeClr val="tx1"/>
+                            <a:srgbClr val="212121"/>
                           </a:solidFill>
                         </a:rPr>
                         <a:t>2e-4 / 2e-4</a:t>
@@ -15166,7 +15069,7 @@
                       <a:tailEnd type="none" w="med" len="med"/>
                     </a:lnB>
                     <a:solidFill>
-                      <a:schemeClr val="bg2"/>
+                      <a:srgbClr val="F2F0EB"/>
                     </a:solidFill>
                   </a:tcPr>
                 </a:tc>
@@ -15183,7 +15086,7 @@
                       <a:r>
                         <a:rPr lang="en-US" sz="1150" dirty="0">
                           <a:solidFill>
-                            <a:schemeClr val="tx1"/>
+                            <a:srgbClr val="212121"/>
                           </a:solidFill>
                         </a:rPr>
                         <a:t>Adam betas</a:t>
@@ -15229,7 +15132,7 @@
                       <a:tailEnd type="none" w="med" len="med"/>
                     </a:lnB>
                     <a:solidFill>
-                      <a:schemeClr val="bg1"/>
+                      <a:srgbClr val="FFFFFF"/>
                     </a:solidFill>
                   </a:tcPr>
                 </a:tc>
@@ -15244,7 +15147,7 @@
                       <a:r>
                         <a:rPr lang="en-US" sz="1150" dirty="0">
                           <a:solidFill>
-                            <a:schemeClr val="tx1"/>
+                            <a:srgbClr val="212121"/>
                           </a:solidFill>
                         </a:rPr>
                         <a:t>(0.9, 0.999)</a:t>
@@ -15290,7 +15193,7 @@
                       <a:tailEnd type="none" w="med" len="med"/>
                     </a:lnB>
                     <a:solidFill>
-                      <a:schemeClr val="bg1"/>
+                      <a:srgbClr val="FFFFFF"/>
                     </a:solidFill>
                   </a:tcPr>
                 </a:tc>
@@ -15305,7 +15208,7 @@
                       <a:r>
                         <a:rPr lang="en-US" sz="1150" dirty="0">
                           <a:solidFill>
-                            <a:schemeClr val="tx1"/>
+                            <a:srgbClr val="212121"/>
                           </a:solidFill>
                         </a:rPr>
                         <a:t>(0.5, 0.999)</a:t>
@@ -15351,7 +15254,7 @@
                       <a:tailEnd type="none" w="med" len="med"/>
                     </a:lnB>
                     <a:solidFill>
-                      <a:schemeClr val="bg1"/>
+                      <a:srgbClr val="FFFFFF"/>
                     </a:solidFill>
                   </a:tcPr>
                 </a:tc>
@@ -15368,7 +15271,7 @@
                       <a:r>
                         <a:rPr lang="en-US" sz="1150" dirty="0">
                           <a:solidFill>
-                            <a:schemeClr val="tx1"/>
+                            <a:srgbClr val="212121"/>
                           </a:solidFill>
                         </a:rPr>
                         <a:t>batch · step</a:t>
@@ -15414,7 +15317,7 @@
                       <a:tailEnd type="none" w="med" len="med"/>
                     </a:lnB>
                     <a:solidFill>
-                      <a:schemeClr val="bg2"/>
+                      <a:srgbClr val="F2F0EB"/>
                     </a:solidFill>
                   </a:tcPr>
                 </a:tc>
@@ -15429,7 +15332,7 @@
                       <a:r>
                         <a:rPr lang="en-US" sz="1150" dirty="0">
                           <a:solidFill>
-                            <a:schemeClr val="tx1"/>
+                            <a:srgbClr val="212121"/>
                           </a:solidFill>
                         </a:rPr>
                         <a:t>8 · 400</a:t>
@@ -15475,7 +15378,7 @@
                       <a:tailEnd type="none" w="med" len="med"/>
                     </a:lnB>
                     <a:solidFill>
-                      <a:schemeClr val="bg2"/>
+                      <a:srgbClr val="F2F0EB"/>
                     </a:solidFill>
                   </a:tcPr>
                 </a:tc>
@@ -15490,7 +15393,7 @@
                       <a:r>
                         <a:rPr lang="en-US" sz="1150" dirty="0">
                           <a:solidFill>
-                            <a:schemeClr val="tx1"/>
+                            <a:srgbClr val="212121"/>
                           </a:solidFill>
                         </a:rPr>
                         <a:t>4 · 20 (미세조정)</a:t>
@@ -15536,7 +15439,7 @@
                       <a:tailEnd type="none" w="med" len="med"/>
                     </a:lnB>
                     <a:solidFill>
-                      <a:schemeClr val="bg2"/>
+                      <a:srgbClr val="F2F0EB"/>
                     </a:solidFill>
                   </a:tcPr>
                 </a:tc>
@@ -15572,7 +15475,7 @@
             <a:r>
               <a:rPr lang="en-US" sz="1150" dirty="0">
                 <a:solidFill>
-                  <a:schemeClr val="accent6"/>
+                  <a:srgbClr val="6B6B6B"/>
                 </a:solidFill>
               </a:rPr>
               <a:t>lr 2e-4, beta1 0.5는 DCGAN 논문(Radford et al., 2016)의 설정값</a:t>
@@ -15611,7 +15514,7 @@
             <a:lvl1pPr>
               <a:defRPr sz="1000">
                 <a:solidFill>
-                  <a:schemeClr val="accent6"/>
+                  <a:srgbClr val="6B6B6B"/>
                 </a:solidFill>
               </a:defRPr>
             </a:lvl1pPr>
@@ -15680,7 +15583,7 @@
             <a:r>
               <a:rPr lang="en-US" sz="1200" b="1" spc="100" kern="0" dirty="0">
                 <a:solidFill>
-                  <a:schemeClr val="accent1"/>
+                  <a:srgbClr val="00754A"/>
                 </a:solidFill>
               </a:rPr>
               <a:t>PART 2 · 학습 안정성</a:t>
@@ -15718,7 +15621,7 @@
             <a:r>
               <a:rPr lang="en-US" sz="3000" b="1" dirty="0">
                 <a:solidFill>
-                  <a:schemeClr val="tx1"/>
+                  <a:srgbClr val="212121"/>
                 </a:solidFill>
               </a:rPr>
               <a:t>사전학습 손실 기록 (25 epoch)</a:t>
@@ -15756,7 +15659,7 @@
             <a:r>
               <a:rPr lang="en-US" sz="1400" dirty="0">
                 <a:solidFill>
-                  <a:schemeClr val="accent6"/>
+                  <a:srgbClr val="6B6B6B"/>
                 </a:solidFill>
               </a:rPr>
               <a:t>강사 checkpoint의 학습 기록(epoch별 평균). 15 ~ 21 epoch에서 판별자가 우세해졌다가 22 epoch부터 회복함</a:t>
@@ -15796,7 +15699,7 @@
             <a:avLst/>
           </a:prstGeom>
           <a:solidFill>
-            <a:schemeClr val="accent1"/>
+            <a:srgbClr val="00754A"/>
           </a:solidFill>
           <a:ln/>
         </p:spPr>
@@ -15828,7 +15731,7 @@
             <a:r>
               <a:rPr lang="en-US" sz="1500" b="1" dirty="0">
                 <a:solidFill>
-                  <a:schemeClr val="tx1"/>
+                  <a:srgbClr val="212121"/>
                 </a:solidFill>
               </a:rPr>
               <a:t>10 epoch까지</a:t>
@@ -15864,7 +15767,7 @@
             <a:r>
               <a:rPr lang="en-US" sz="1250" dirty="0">
                 <a:solidFill>
-                  <a:schemeClr val="accent6"/>
+                  <a:srgbClr val="6B6B6B"/>
                 </a:solidFill>
               </a:rPr>
               <a:t>loss_d 1.39 → 1.22, 2 ln 2 근처의 균형 상태</a:t>
@@ -15888,7 +15791,7 @@
             <a:avLst/>
           </a:prstGeom>
           <a:solidFill>
-            <a:schemeClr val="accent2"/>
+            <a:srgbClr val="5B3E8C"/>
           </a:solidFill>
           <a:ln/>
         </p:spPr>
@@ -15920,7 +15823,7 @@
             <a:r>
               <a:rPr lang="en-US" sz="1500" b="1" dirty="0">
                 <a:solidFill>
-                  <a:schemeClr val="tx1"/>
+                  <a:srgbClr val="212121"/>
                 </a:solidFill>
               </a:rPr>
               <a:t>11 ~ 21 epoch</a:t>
@@ -15956,7 +15859,7 @@
             <a:r>
               <a:rPr lang="en-US" sz="1250" dirty="0">
                 <a:solidFill>
-                  <a:schemeClr val="accent6"/>
+                  <a:srgbClr val="6B6B6B"/>
                 </a:solidFill>
               </a:rPr>
               <a:t>loss_d 최저 0.74 (19 epoch), loss_g 최고 3.37 - 판별자 우세</a:t>
@@ -15980,7 +15883,7 @@
             <a:avLst/>
           </a:prstGeom>
           <a:solidFill>
-            <a:schemeClr val="accent6"/>
+            <a:srgbClr val="6B6B6B"/>
           </a:solidFill>
           <a:ln/>
         </p:spPr>
@@ -16012,7 +15915,7 @@
             <a:r>
               <a:rPr lang="en-US" sz="1500" b="1" dirty="0">
                 <a:solidFill>
-                  <a:schemeClr val="tx1"/>
+                  <a:srgbClr val="212121"/>
                 </a:solidFill>
               </a:rPr>
               <a:t>22 epoch 이후</a:t>
@@ -16048,7 +15951,7 @@
             <a:r>
               <a:rPr lang="en-US" sz="1250" dirty="0">
                 <a:solidFill>
-                  <a:schemeClr val="accent6"/>
+                  <a:srgbClr val="6B6B6B"/>
                 </a:solidFill>
               </a:rPr>
               <a:t>loss_d 1.3 부근으로 회복</a:t>
@@ -16072,7 +15975,7 @@
             <a:avLst/>
           </a:prstGeom>
           <a:solidFill>
-            <a:schemeClr val="accent4"/>
+            <a:srgbClr val="9C5000"/>
           </a:solidFill>
           <a:ln/>
         </p:spPr>
@@ -16104,7 +16007,7 @@
             <a:r>
               <a:rPr lang="en-US" sz="1500" b="1" dirty="0">
                 <a:solidFill>
-                  <a:schemeClr val="tx1"/>
+                  <a:srgbClr val="212121"/>
                 </a:solidFill>
               </a:rPr>
               <a:t>lr_g 0.02 사전 실험</a:t>
@@ -16140,7 +16043,7 @@
             <a:r>
               <a:rPr lang="en-US" sz="1250" dirty="0">
                 <a:solidFill>
-                  <a:schemeClr val="accent6"/>
+                  <a:srgbClr val="6B6B6B"/>
                 </a:solidFill>
               </a:rPr>
               <a:t>3 epoch 만에 loss_d 0.0027, 다양성 0.000 (완전 mode collapse)</a:t>
@@ -16176,7 +16079,7 @@
             <a:r>
               <a:rPr lang="en-US" sz="900" dirty="0">
                 <a:solidFill>
-                  <a:schemeClr val="accent6"/>
+                  <a:srgbClr val="6B6B6B"/>
                 </a:solidFill>
               </a:rPr>
               <a:t>mediqgan_final.pt history, 700 step = 25 epoch × 28 step</a:t>
@@ -16215,7 +16118,7 @@
             <a:lvl1pPr>
               <a:defRPr sz="1000">
                 <a:solidFill>
-                  <a:schemeClr val="accent6"/>
+                  <a:srgbClr val="6B6B6B"/>
                 </a:solidFill>
               </a:defRPr>
             </a:lvl1pPr>
@@ -16284,7 +16187,7 @@
             <a:r>
               <a:rPr lang="en-US" sz="1200" b="1" spc="100" kern="0" dirty="0">
                 <a:solidFill>
-                  <a:schemeClr val="accent1"/>
+                  <a:srgbClr val="00754A"/>
                 </a:solidFill>
               </a:rPr>
               <a:t>PART 2 · 계산 비용</a:t>
@@ -16322,7 +16225,7 @@
             <a:r>
               <a:rPr lang="en-US" sz="3000" b="1" dirty="0">
                 <a:solidFill>
-                  <a:schemeClr val="tx1"/>
+                  <a:srgbClr val="212121"/>
                 </a:solidFill>
               </a:rPr>
               <a:t>계산 비용 : 수업에서 미세조정만 하는 이유</a:t>
@@ -16360,7 +16263,7 @@
             <a:r>
               <a:rPr lang="en-US" sz="1400" dirty="0">
                 <a:solidFill>
-                  <a:schemeClr val="accent6"/>
+                  <a:srgbClr val="6B6B6B"/>
                 </a:solidFill>
               </a:rPr>
               <a:t>16큐빗 회로 시뮬레이션이 비싸 25 epoch 사전학습에 196분(약 3시간 15분)이 걸림</a:t>
@@ -16446,7 +16349,7 @@
                       <a:tailEnd type="none" w="med" len="med"/>
                     </a:lnB>
                     <a:solidFill>
-                      <a:schemeClr val="tx2"/>
+                      <a:srgbClr val="1E3932"/>
                     </a:solidFill>
                   </a:tcPr>
                 </a:tc>
@@ -16461,7 +16364,7 @@
                       <a:r>
                         <a:rPr lang="en-US" sz="1300" b="1" dirty="0">
                           <a:solidFill>
-                            <a:schemeClr val="bg1"/>
+                            <a:srgbClr val="FFFFFF"/>
                           </a:solidFill>
                         </a:rPr>
                         <a:t>2일차 QGAN</a:t>
@@ -16507,7 +16410,7 @@
                       <a:tailEnd type="none" w="med" len="med"/>
                     </a:lnB>
                     <a:solidFill>
-                      <a:schemeClr val="tx2"/>
+                      <a:srgbClr val="1E3932"/>
                     </a:solidFill>
                   </a:tcPr>
                 </a:tc>
@@ -16522,7 +16425,7 @@
                       <a:r>
                         <a:rPr lang="en-US" sz="1300" b="1" dirty="0">
                           <a:solidFill>
-                            <a:schemeClr val="bg1"/>
+                            <a:srgbClr val="FFFFFF"/>
                           </a:solidFill>
                         </a:rPr>
                         <a:t>3일차 MediQ-GAN</a:t>
@@ -16568,7 +16471,7 @@
                       <a:tailEnd type="none" w="med" len="med"/>
                     </a:lnB>
                     <a:solidFill>
-                      <a:schemeClr val="tx2"/>
+                      <a:srgbClr val="1E3932"/>
                     </a:solidFill>
                   </a:tcPr>
                 </a:tc>
@@ -16585,7 +16488,7 @@
                       <a:r>
                         <a:rPr lang="en-US" sz="1300" dirty="0">
                           <a:solidFill>
-                            <a:schemeClr val="tx1"/>
+                            <a:srgbClr val="212121"/>
                           </a:solidFill>
                         </a:rPr>
                         <a:t>큐빗 (회로 하나)</a:t>
@@ -16631,7 +16534,7 @@
                       <a:tailEnd type="none" w="med" len="med"/>
                     </a:lnB>
                     <a:solidFill>
-                      <a:schemeClr val="bg1"/>
+                      <a:srgbClr val="FFFFFF"/>
                     </a:solidFill>
                   </a:tcPr>
                 </a:tc>
@@ -16646,7 +16549,7 @@
                       <a:r>
                         <a:rPr lang="en-US" sz="1300" dirty="0">
                           <a:solidFill>
-                            <a:schemeClr val="tx1"/>
+                            <a:srgbClr val="212121"/>
                           </a:solidFill>
                         </a:rPr>
                         <a:t>7</a:t>
@@ -16692,7 +16595,7 @@
                       <a:tailEnd type="none" w="med" len="med"/>
                     </a:lnB>
                     <a:solidFill>
-                      <a:schemeClr val="bg1"/>
+                      <a:srgbClr val="FFFFFF"/>
                     </a:solidFill>
                   </a:tcPr>
                 </a:tc>
@@ -16707,7 +16610,7 @@
                       <a:r>
                         <a:rPr lang="en-US" sz="1300" dirty="0">
                           <a:solidFill>
-                            <a:schemeClr val="tx1"/>
+                            <a:srgbClr val="212121"/>
                           </a:solidFill>
                         </a:rPr>
                         <a:t>16</a:t>
@@ -16753,7 +16656,7 @@
                       <a:tailEnd type="none" w="med" len="med"/>
                     </a:lnB>
                     <a:solidFill>
-                      <a:schemeClr val="bg1"/>
+                      <a:srgbClr val="FFFFFF"/>
                     </a:solidFill>
                   </a:tcPr>
                 </a:tc>
@@ -16770,7 +16673,7 @@
                       <a:r>
                         <a:rPr lang="en-US" sz="1300" dirty="0">
                           <a:solidFill>
-                            <a:schemeClr val="tx1"/>
+                            <a:srgbClr val="212121"/>
                           </a:solidFill>
                         </a:rPr>
                         <a:t>상태벡터 차원</a:t>
@@ -16816,7 +16719,7 @@
                       <a:tailEnd type="none" w="med" len="med"/>
                     </a:lnB>
                     <a:solidFill>
-                      <a:schemeClr val="bg2"/>
+                      <a:srgbClr val="F2F0EB"/>
                     </a:solidFill>
                   </a:tcPr>
                 </a:tc>
@@ -16831,7 +16734,7 @@
                       <a:r>
                         <a:rPr lang="en-US" sz="1300" dirty="0">
                           <a:solidFill>
-                            <a:schemeClr val="tx1"/>
+                            <a:srgbClr val="212121"/>
                           </a:solidFill>
                         </a:rPr>
                         <a:t>2⁷ = 128</a:t>
@@ -16877,7 +16780,7 @@
                       <a:tailEnd type="none" w="med" len="med"/>
                     </a:lnB>
                     <a:solidFill>
-                      <a:schemeClr val="bg2"/>
+                      <a:srgbClr val="F2F0EB"/>
                     </a:solidFill>
                   </a:tcPr>
                 </a:tc>
@@ -16892,7 +16795,7 @@
                       <a:r>
                         <a:rPr lang="en-US" sz="1300" dirty="0">
                           <a:solidFill>
-                            <a:schemeClr val="tx1"/>
+                            <a:srgbClr val="212121"/>
                           </a:solidFill>
                         </a:rPr>
                         <a:t>2¹⁶ = 65,536</a:t>
@@ -16938,7 +16841,7 @@
                       <a:tailEnd type="none" w="med" len="med"/>
                     </a:lnB>
                     <a:solidFill>
-                      <a:schemeClr val="bg2"/>
+                      <a:srgbClr val="F2F0EB"/>
                     </a:solidFill>
                   </a:tcPr>
                 </a:tc>
@@ -16955,7 +16858,7 @@
                       <a:r>
                         <a:rPr lang="en-US" sz="1300" dirty="0">
                           <a:solidFill>
-                            <a:schemeClr val="tx1"/>
+                            <a:srgbClr val="212121"/>
                           </a:solidFill>
                         </a:rPr>
                         <a:t>미분 방식</a:t>
@@ -17001,7 +16904,7 @@
                       <a:tailEnd type="none" w="med" len="med"/>
                     </a:lnB>
                     <a:solidFill>
-                      <a:schemeClr val="bg1"/>
+                      <a:srgbClr val="FFFFFF"/>
                     </a:solidFill>
                   </a:tcPr>
                 </a:tc>
@@ -17016,7 +16919,7 @@
                       <a:r>
                         <a:rPr lang="en-US" sz="1300" dirty="0">
                           <a:solidFill>
-                            <a:schemeClr val="tx1"/>
+                            <a:srgbClr val="212121"/>
                           </a:solidFill>
                         </a:rPr>
                         <a:t>backprop (default.qubit)</a:t>
@@ -17062,7 +16965,7 @@
                       <a:tailEnd type="none" w="med" len="med"/>
                     </a:lnB>
                     <a:solidFill>
-                      <a:schemeClr val="bg1"/>
+                      <a:srgbClr val="FFFFFF"/>
                     </a:solidFill>
                   </a:tcPr>
                 </a:tc>
@@ -17077,7 +16980,7 @@
                       <a:r>
                         <a:rPr lang="en-US" sz="1300" dirty="0">
                           <a:solidFill>
-                            <a:schemeClr val="tx1"/>
+                            <a:srgbClr val="212121"/>
                           </a:solidFill>
                         </a:rPr>
                         <a:t>adjoint (lightning.qubit)</a:t>
@@ -17123,7 +17026,7 @@
                       <a:tailEnd type="none" w="med" len="med"/>
                     </a:lnB>
                     <a:solidFill>
-                      <a:schemeClr val="bg1"/>
+                      <a:srgbClr val="FFFFFF"/>
                     </a:solidFill>
                   </a:tcPr>
                 </a:tc>
@@ -17140,7 +17043,7 @@
                       <a:r>
                         <a:rPr lang="en-US" sz="1300" dirty="0">
                           <a:solidFill>
-                            <a:schemeClr val="tx1"/>
+                            <a:srgbClr val="212121"/>
                           </a:solidFill>
                         </a:rPr>
                         <a:t>1 step</a:t>
@@ -17186,7 +17089,7 @@
                       <a:tailEnd type="none" w="med" len="med"/>
                     </a:lnB>
                     <a:solidFill>
-                      <a:schemeClr val="bg2"/>
+                      <a:srgbClr val="F2F0EB"/>
                     </a:solidFill>
                   </a:tcPr>
                 </a:tc>
@@ -17201,7 +17104,7 @@
                       <a:r>
                         <a:rPr lang="en-US" sz="1300" dirty="0">
                           <a:solidFill>
-                            <a:schemeClr val="tx1"/>
+                            <a:srgbClr val="212121"/>
                           </a:solidFill>
                         </a:rPr>
                         <a:t>약 2.2초 (batch 8)</a:t>
@@ -17247,7 +17150,7 @@
                       <a:tailEnd type="none" w="med" len="med"/>
                     </a:lnB>
                     <a:solidFill>
-                      <a:schemeClr val="bg2"/>
+                      <a:srgbClr val="F2F0EB"/>
                     </a:solidFill>
                   </a:tcPr>
                 </a:tc>
@@ -17262,7 +17165,7 @@
                       <a:r>
                         <a:rPr lang="en-US" sz="1300" b="1" dirty="0">
                           <a:solidFill>
-                            <a:schemeClr val="tx1"/>
+                            <a:srgbClr val="212121"/>
                           </a:solidFill>
                         </a:rPr>
                         <a:t>약 20초 (batch 4)</a:t>
@@ -17308,7 +17211,7 @@
                       <a:tailEnd type="none" w="med" len="med"/>
                     </a:lnB>
                     <a:solidFill>
-                      <a:schemeClr val="bg2"/>
+                      <a:srgbClr val="F2F0EB"/>
                     </a:solidFill>
                   </a:tcPr>
                 </a:tc>
@@ -17325,7 +17228,7 @@
                       <a:r>
                         <a:rPr lang="en-US" sz="1300" dirty="0">
                           <a:solidFill>
-                            <a:schemeClr val="tx1"/>
+                            <a:srgbClr val="212121"/>
                           </a:solidFill>
                         </a:rPr>
                         <a:t>전체 학습</a:t>
@@ -17371,7 +17274,7 @@
                       <a:tailEnd type="none" w="med" len="med"/>
                     </a:lnB>
                     <a:solidFill>
-                      <a:schemeClr val="bg1"/>
+                      <a:srgbClr val="FFFFFF"/>
                     </a:solidFill>
                   </a:tcPr>
                 </a:tc>
@@ -17386,7 +17289,7 @@
                       <a:r>
                         <a:rPr lang="en-US" sz="1300" dirty="0">
                           <a:solidFill>
-                            <a:schemeClr val="tx1"/>
+                            <a:srgbClr val="212121"/>
                           </a:solidFill>
                         </a:rPr>
                         <a:t>600 step 약 22분</a:t>
@@ -17432,7 +17335,7 @@
                       <a:tailEnd type="none" w="med" len="med"/>
                     </a:lnB>
                     <a:solidFill>
-                      <a:schemeClr val="bg1"/>
+                      <a:srgbClr val="FFFFFF"/>
                     </a:solidFill>
                   </a:tcPr>
                 </a:tc>
@@ -17447,7 +17350,7 @@
                       <a:r>
                         <a:rPr lang="en-US" sz="1300" b="1" dirty="0">
                           <a:solidFill>
-                            <a:schemeClr val="tx1"/>
+                            <a:srgbClr val="212121"/>
                           </a:solidFill>
                         </a:rPr>
                         <a:t>25 epoch 196분 (epoch당 7.8분)</a:t>
@@ -17493,7 +17396,7 @@
                       <a:tailEnd type="none" w="med" len="med"/>
                     </a:lnB>
                     <a:solidFill>
-                      <a:schemeClr val="bg1"/>
+                      <a:srgbClr val="FFFFFF"/>
                     </a:solidFill>
                   </a:tcPr>
                 </a:tc>
@@ -17510,7 +17413,7 @@
                       <a:r>
                         <a:rPr lang="en-US" sz="1300" dirty="0">
                           <a:solidFill>
-                            <a:schemeClr val="tx1"/>
+                            <a:srgbClr val="212121"/>
                           </a:solidFill>
                         </a:rPr>
                         <a:t>수업 중 학습</a:t>
@@ -17556,7 +17459,7 @@
                       <a:tailEnd type="none" w="med" len="med"/>
                     </a:lnB>
                     <a:solidFill>
-                      <a:schemeClr val="bg2"/>
+                      <a:srgbClr val="F2F0EB"/>
                     </a:solidFill>
                   </a:tcPr>
                 </a:tc>
@@ -17571,7 +17474,7 @@
                       <a:r>
                         <a:rPr lang="en-US" sz="1300" dirty="0">
                           <a:solidFill>
-                            <a:schemeClr val="tx1"/>
+                            <a:srgbClr val="212121"/>
                           </a:solidFill>
                         </a:rPr>
                         <a:t>처음부터 400 step (Colab 약 35분)</a:t>
@@ -17617,7 +17520,7 @@
                       <a:tailEnd type="none" w="med" len="med"/>
                     </a:lnB>
                     <a:solidFill>
-                      <a:schemeClr val="bg2"/>
+                      <a:srgbClr val="F2F0EB"/>
                     </a:solidFill>
                   </a:tcPr>
                 </a:tc>
@@ -17632,7 +17535,7 @@
                       <a:r>
                         <a:rPr lang="en-US" sz="1300" dirty="0">
                           <a:solidFill>
-                            <a:schemeClr val="tx1"/>
+                            <a:srgbClr val="212121"/>
                           </a:solidFill>
                         </a:rPr>
                         <a:t>10 epoch checkpoint에서 20 step</a:t>
@@ -17678,7 +17581,7 @@
                       <a:tailEnd type="none" w="med" len="med"/>
                     </a:lnB>
                     <a:solidFill>
-                      <a:schemeClr val="bg2"/>
+                      <a:srgbClr val="F2F0EB"/>
                     </a:solidFill>
                   </a:tcPr>
                 </a:tc>
@@ -17714,7 +17617,7 @@
             <a:r>
               <a:rPr lang="en-US" sz="1300" dirty="0">
                 <a:solidFill>
-                  <a:schemeClr val="accent6"/>
+                  <a:srgbClr val="6B6B6B"/>
                 </a:solidFill>
               </a:rPr>
               <a:t>16큐빗은 12큐빗보다 상태벡터가 16배 크고(2¹⁶ vs 2¹²), 실측 소요 시간은 약 20배였음.</a:t>
@@ -17750,7 +17653,7 @@
             <a:r>
               <a:rPr lang="en-US" sz="900" dirty="0">
                 <a:solidFill>
-                  <a:schemeClr val="accent6"/>
+                  <a:srgbClr val="6B6B6B"/>
                 </a:solidFill>
               </a:rPr>
               <a:t>로컬 CPU 실측. epoch 시간은 checkpoint epoch_sec 평균</a:t>
@@ -17789,7 +17692,7 @@
             <a:lvl1pPr>
               <a:defRPr sz="1000">
                 <a:solidFill>
-                  <a:schemeClr val="accent6"/>
+                  <a:srgbClr val="6B6B6B"/>
                 </a:solidFill>
               </a:defRPr>
             </a:lvl1pPr>
@@ -17858,10 +17761,10 @@
             <a:r>
               <a:rPr lang="en-US" sz="1200" b="1" spc="100" kern="0" dirty="0">
                 <a:solidFill>
-                  <a:schemeClr val="accent3"/>
+                  <a:srgbClr val="DFC49D"/>
                 </a:solidFill>
               </a:rPr>
-              <a:t>PART 3 · 노트북 §5 직전</a:t>
+              <a:t>PART 3 · 노트북 §5</a:t>
             </a:r>
             <a:endParaRPr lang="en-US" sz="1200" dirty="0"/>
           </a:p>
@@ -17896,7 +17799,7 @@
             <a:r>
               <a:rPr lang="en-US" sz="3600" b="1" dirty="0">
                 <a:solidFill>
-                  <a:schemeClr val="bg1"/>
+                  <a:srgbClr val="FFFFFF"/>
                 </a:solidFill>
               </a:rPr>
               <a:t>QGAN vs MediQ-GAN</a:t>
@@ -17934,7 +17837,7 @@
             <a:r>
               <a:rPr lang="en-US" sz="1500" dirty="0">
                 <a:solidFill>
-                  <a:schemeClr val="bg2"/>
+                  <a:srgbClr val="F2F0EB"/>
                 </a:solidFill>
               </a:rPr>
               <a:t>두 모델의 출력을 0 ~ 1로 되돌린 뒤 같은 지표 4종으로 비교함</a:t>
@@ -17945,7 +17848,7 @@
       </p:sp>
       <p:sp>
         <p:nvSpPr>
-          <p:cNvPr id="6" name="Text 3"/>
+          <p:cNvPr id="5" name="Text 3"/>
           <p:cNvSpPr txBox="1"/>
           <p:nvPr/>
         </p:nvSpPr>
@@ -17970,7 +17873,7 @@
             <a:r>
               <a:rPr lang="en-US" sz="1400" b="1" dirty="0">
                 <a:solidFill>
-                  <a:schemeClr val="accent3"/>
+                  <a:srgbClr val="DFC49D"/>
                 </a:solidFill>
               </a:rPr>
               <a:t>노트북 범위</a:t>
@@ -17981,7 +17884,7 @@
       </p:sp>
       <p:sp>
         <p:nvSpPr>
-          <p:cNvPr id="7" name="Text 4"/>
+          <p:cNvPr id="6" name="Text 4"/>
           <p:cNvSpPr txBox="1"/>
           <p:nvPr/>
         </p:nvSpPr>
@@ -18006,7 +17909,7 @@
             <a:r>
               <a:rPr lang="en-US" sz="1500" dirty="0">
                 <a:solidFill>
-                  <a:schemeClr val="bg1"/>
+                  <a:srgbClr val="FFFFFF"/>
                 </a:solidFill>
               </a:rPr>
               <a:t>§5 지표 비교표, 상관계수·픽셀 분포 그림</a:t>
@@ -18017,7 +17920,7 @@
       </p:sp>
       <p:sp>
         <p:nvSpPr>
-          <p:cNvPr id="8" name="Text 5"/>
+          <p:cNvPr id="7" name="Text 5"/>
           <p:cNvSpPr txBox="1"/>
           <p:nvPr/>
         </p:nvSpPr>
@@ -18042,7 +17945,7 @@
             <a:r>
               <a:rPr lang="en-US" sz="1400" b="1" dirty="0">
                 <a:solidFill>
-                  <a:schemeClr val="accent3"/>
+                  <a:srgbClr val="DFC49D"/>
                 </a:solidFill>
               </a:rPr>
               <a:t>다루는 코드</a:t>
@@ -18053,7 +17956,7 @@
       </p:sp>
       <p:sp>
         <p:nvSpPr>
-          <p:cNvPr id="9" name="Text 6"/>
+          <p:cNvPr id="8" name="Text 6"/>
           <p:cNvSpPr txBox="1"/>
           <p:nvPr/>
         </p:nvSpPr>
@@ -18078,7 +17981,7 @@
             <a:r>
               <a:rPr lang="en-US" sz="1500" dirty="0">
                 <a:solidFill>
-                  <a:schemeClr val="bg1"/>
+                  <a:srgbClr val="FFFFFF"/>
                 </a:solidFill>
               </a:rPr>
               <a:t>gm.comparison_table · to_unit_scale(x, 'prob' / 'tanh')</a:t>
@@ -18117,7 +18020,7 @@
             <a:lvl1pPr>
               <a:defRPr sz="1000">
                 <a:solidFill>
-                  <a:schemeClr val="accent6"/>
+                  <a:srgbClr val="6B6B6B"/>
                 </a:solidFill>
               </a:defRPr>
             </a:lvl1pPr>
@@ -18186,7 +18089,7 @@
             <a:r>
               <a:rPr lang="en-US" sz="1200" b="1" spc="100" kern="0" dirty="0">
                 <a:solidFill>
-                  <a:schemeClr val="accent1"/>
+                  <a:srgbClr val="00754A"/>
                 </a:solidFill>
               </a:rPr>
               <a:t>PART 3 · 노트북 §5</a:t>
@@ -18224,7 +18127,7 @@
             <a:r>
               <a:rPr lang="en-US" sz="3000" b="1" dirty="0">
                 <a:solidFill>
-                  <a:schemeClr val="tx1"/>
+                  <a:srgbClr val="212121"/>
                 </a:solidFill>
               </a:rPr>
               <a:t>지표 비교 : 형태 재현과 다양성</a:t>
@@ -18262,7 +18165,7 @@
             <a:r>
               <a:rPr lang="en-US" sz="1400" dirty="0">
                 <a:solidFill>
-                  <a:schemeClr val="accent6"/>
+                  <a:srgbClr val="6B6B6B"/>
                 </a:solidFill>
               </a:rPr>
               <a:t>상관은 MediQ-GAN이 높고, 샘플 간 거리는 QGAN이 실제 DF에 가까움</a:t>
@@ -18330,7 +18233,7 @@
             <a:r>
               <a:rPr lang="en-US" sz="900" dirty="0">
                 <a:solidFill>
-                  <a:schemeClr val="accent6"/>
+                  <a:srgbClr val="6B6B6B"/>
                 </a:solidFill>
               </a:rPr>
               <a:t>수치: README 결과표 (로컬 CPU). MediQ-GAN은 16장, QGAN은 64장으로 평가</a:t>
@@ -18369,7 +18272,7 @@
             <a:lvl1pPr>
               <a:defRPr sz="1000">
                 <a:solidFill>
-                  <a:schemeClr val="accent6"/>
+                  <a:srgbClr val="6B6B6B"/>
                 </a:solidFill>
               </a:defRPr>
             </a:lvl1pPr>
@@ -18438,7 +18341,7 @@
             <a:r>
               <a:rPr lang="en-US" sz="1200" b="1" spc="100" kern="0" dirty="0">
                 <a:solidFill>
-                  <a:schemeClr val="accent1"/>
+                  <a:srgbClr val="00754A"/>
                 </a:solidFill>
               </a:rPr>
               <a:t>오리엔테이션</a:t>
@@ -18476,7 +18379,7 @@
             <a:r>
               <a:rPr lang="en-US" sz="3000" b="1" dirty="0">
                 <a:solidFill>
-                  <a:schemeClr val="tx1"/>
+                  <a:srgbClr val="212121"/>
                 </a:solidFill>
               </a:rPr>
               <a:t>3일차 진행 순서</a:t>
@@ -18514,10 +18417,10 @@
             <a:r>
               <a:rPr lang="en-US" sz="1400" dirty="0">
                 <a:solidFill>
-                  <a:schemeClr val="accent6"/>
+                  <a:srgbClr val="6B6B6B"/>
                 </a:solidFill>
               </a:rPr>
-              <a:t>노트북 섹션 순서대로 진행하고, 섹션 앞에서 해당 PART를 설명함</a:t>
+              <a:t>노트북 섹션과 이 자료의 PART 대응</a:t>
             </a:r>
             <a:endParaRPr lang="en-US" sz="1400" dirty="0"/>
           </a:p>
@@ -18563,7 +18466,7 @@
                       <a:r>
                         <a:rPr lang="en-US" sz="1300" b="1" dirty="0">
                           <a:solidFill>
-                            <a:schemeClr val="bg1"/>
+                            <a:srgbClr val="FFFFFF"/>
                           </a:solidFill>
                         </a:rPr>
                         <a:t>노트북</a:t>
@@ -18609,7 +18512,7 @@
                       <a:tailEnd type="none" w="med" len="med"/>
                     </a:lnB>
                     <a:solidFill>
-                      <a:schemeClr val="tx2"/>
+                      <a:srgbClr val="1E3932"/>
                     </a:solidFill>
                   </a:tcPr>
                 </a:tc>
@@ -18624,7 +18527,7 @@
                       <a:r>
                         <a:rPr lang="en-US" sz="1300" b="1" dirty="0">
                           <a:solidFill>
-                            <a:schemeClr val="bg1"/>
+                            <a:srgbClr val="FFFFFF"/>
                           </a:solidFill>
                         </a:rPr>
                         <a:t>내용</a:t>
@@ -18670,7 +18573,7 @@
                       <a:tailEnd type="none" w="med" len="med"/>
                     </a:lnB>
                     <a:solidFill>
-                      <a:schemeClr val="tx2"/>
+                      <a:srgbClr val="1E3932"/>
                     </a:solidFill>
                   </a:tcPr>
                 </a:tc>
@@ -18685,7 +18588,7 @@
                       <a:r>
                         <a:rPr lang="en-US" sz="1300" b="1" dirty="0">
                           <a:solidFill>
-                            <a:schemeClr val="bg1"/>
+                            <a:srgbClr val="FFFFFF"/>
                           </a:solidFill>
                         </a:rPr>
                         <a:t>실행 시간</a:t>
@@ -18731,7 +18634,7 @@
                       <a:tailEnd type="none" w="med" len="med"/>
                     </a:lnB>
                     <a:solidFill>
-                      <a:schemeClr val="tx2"/>
+                      <a:srgbClr val="1E3932"/>
                     </a:solidFill>
                   </a:tcPr>
                 </a:tc>
@@ -18746,7 +18649,7 @@
                       <a:r>
                         <a:rPr lang="en-US" sz="1300" b="1" dirty="0">
                           <a:solidFill>
-                            <a:schemeClr val="bg1"/>
+                            <a:srgbClr val="FFFFFF"/>
                           </a:solidFill>
                         </a:rPr>
                         <a:t>설명 자료</a:t>
@@ -18792,7 +18695,7 @@
                       <a:tailEnd type="none" w="med" len="med"/>
                     </a:lnB>
                     <a:solidFill>
-                      <a:schemeClr val="tx2"/>
+                      <a:srgbClr val="1E3932"/>
                     </a:solidFill>
                   </a:tcPr>
                 </a:tc>
@@ -18809,7 +18712,7 @@
                       <a:r>
                         <a:rPr lang="en-US" sz="1300" dirty="0">
                           <a:solidFill>
-                            <a:schemeClr val="tx1"/>
+                            <a:srgbClr val="212121"/>
                           </a:solidFill>
                         </a:rPr>
                         <a:t>§0 – §1</a:t>
@@ -18855,7 +18758,7 @@
                       <a:tailEnd type="none" w="med" len="med"/>
                     </a:lnB>
                     <a:solidFill>
-                      <a:schemeClr val="bg1"/>
+                      <a:srgbClr val="FFFFFF"/>
                     </a:solidFill>
                   </a:tcPr>
                 </a:tc>
@@ -18870,7 +18773,7 @@
                       <a:r>
                         <a:rPr lang="en-US" sz="1300" dirty="0">
                           <a:solidFill>
-                            <a:schemeClr val="tx1"/>
+                            <a:srgbClr val="212121"/>
                           </a:solidFill>
                         </a:rPr>
                         <a:t>Colab 설정, 저장소 clone, 실습 자산 로드</a:t>
@@ -18916,7 +18819,7 @@
                       <a:tailEnd type="none" w="med" len="med"/>
                     </a:lnB>
                     <a:solidFill>
-                      <a:schemeClr val="bg1"/>
+                      <a:srgbClr val="FFFFFF"/>
                     </a:solidFill>
                   </a:tcPr>
                 </a:tc>
@@ -18931,7 +18834,7 @@
                       <a:r>
                         <a:rPr lang="en-US" sz="1300" dirty="0">
                           <a:solidFill>
-                            <a:schemeClr val="tx1"/>
+                            <a:srgbClr val="212121"/>
                           </a:solidFill>
                         </a:rPr>
                         <a:t>1분 이내</a:t>
@@ -18977,7 +18880,7 @@
                       <a:tailEnd type="none" w="med" len="med"/>
                     </a:lnB>
                     <a:solidFill>
-                      <a:schemeClr val="bg1"/>
+                      <a:srgbClr val="FFFFFF"/>
                     </a:solidFill>
                   </a:tcPr>
                 </a:tc>
@@ -18992,7 +18895,7 @@
                       <a:r>
                         <a:rPr lang="en-US" sz="1300" dirty="0">
                           <a:solidFill>
-                            <a:schemeClr val="tx1"/>
+                            <a:srgbClr val="212121"/>
                           </a:solidFill>
                         </a:rPr>
                         <a:t>PART 0</a:t>
@@ -19038,7 +18941,7 @@
                       <a:tailEnd type="none" w="med" len="med"/>
                     </a:lnB>
                     <a:solidFill>
-                      <a:schemeClr val="bg1"/>
+                      <a:srgbClr val="FFFFFF"/>
                     </a:solidFill>
                   </a:tcPr>
                 </a:tc>
@@ -19055,7 +18958,7 @@
                       <a:r>
                         <a:rPr lang="en-US" sz="1300" dirty="0">
                           <a:solidFill>
-                            <a:schemeClr val="tx1"/>
+                            <a:srgbClr val="212121"/>
                           </a:solidFill>
                         </a:rPr>
                         <a:t>§2</a:t>
@@ -19101,7 +19004,7 @@
                       <a:tailEnd type="none" w="med" len="med"/>
                     </a:lnB>
                     <a:solidFill>
-                      <a:schemeClr val="bg2"/>
+                      <a:srgbClr val="F2F0EB"/>
                     </a:solidFill>
                   </a:tcPr>
                 </a:tc>
@@ -19116,7 +19019,7 @@
                       <a:r>
                         <a:rPr lang="en-US" sz="1300" dirty="0">
                           <a:solidFill>
-                            <a:schemeClr val="tx1"/>
+                            <a:srgbClr val="212121"/>
                           </a:solidFill>
                         </a:rPr>
                         <a:t>QGAN checkpoint(600 step) 생성·평가 - 비교 기준선</a:t>
@@ -19162,7 +19065,7 @@
                       <a:tailEnd type="none" w="med" len="med"/>
                     </a:lnB>
                     <a:solidFill>
-                      <a:schemeClr val="bg2"/>
+                      <a:srgbClr val="F2F0EB"/>
                     </a:solidFill>
                   </a:tcPr>
                 </a:tc>
@@ -19177,7 +19080,7 @@
                       <a:r>
                         <a:rPr lang="en-US" sz="1300" dirty="0">
                           <a:solidFill>
-                            <a:schemeClr val="tx1"/>
+                            <a:srgbClr val="212121"/>
                           </a:solidFill>
                         </a:rPr>
                         <a:t>수 초</a:t>
@@ -19223,7 +19126,7 @@
                       <a:tailEnd type="none" w="med" len="med"/>
                     </a:lnB>
                     <a:solidFill>
-                      <a:schemeClr val="bg2"/>
+                      <a:srgbClr val="F2F0EB"/>
                     </a:solidFill>
                   </a:tcPr>
                 </a:tc>
@@ -19238,7 +19141,7 @@
                       <a:r>
                         <a:rPr lang="en-US" sz="1300" dirty="0">
                           <a:solidFill>
-                            <a:schemeClr val="tx1"/>
+                            <a:srgbClr val="212121"/>
                           </a:solidFill>
                         </a:rPr>
                         <a:t>PART 0</a:t>
@@ -19284,7 +19187,7 @@
                       <a:tailEnd type="none" w="med" len="med"/>
                     </a:lnB>
                     <a:solidFill>
-                      <a:schemeClr val="bg2"/>
+                      <a:srgbClr val="F2F0EB"/>
                     </a:solidFill>
                   </a:tcPr>
                 </a:tc>
@@ -19301,7 +19204,7 @@
                       <a:r>
                         <a:rPr lang="en-US" sz="1300" dirty="0">
                           <a:solidFill>
-                            <a:schemeClr val="tx1"/>
+                            <a:srgbClr val="212121"/>
                           </a:solidFill>
                         </a:rPr>
                         <a:t>§3</a:t>
@@ -19347,7 +19250,7 @@
                       <a:tailEnd type="none" w="med" len="med"/>
                     </a:lnB>
                     <a:solidFill>
-                      <a:schemeClr val="bg1"/>
+                      <a:srgbClr val="FFFFFF"/>
                     </a:solidFill>
                   </a:tcPr>
                 </a:tc>
@@ -19362,7 +19265,7 @@
                       <a:r>
                         <a:rPr lang="en-US" sz="1300" dirty="0">
                           <a:solidFill>
-                            <a:schemeClr val="tx1"/>
+                            <a:srgbClr val="212121"/>
                           </a:solidFill>
                         </a:rPr>
                         <a:t>MediQ-GAN 구조: dual-stream, 16큐빗 회로 × 5</a:t>
@@ -19408,7 +19311,7 @@
                       <a:tailEnd type="none" w="med" len="med"/>
                     </a:lnB>
                     <a:solidFill>
-                      <a:schemeClr val="bg1"/>
+                      <a:srgbClr val="FFFFFF"/>
                     </a:solidFill>
                   </a:tcPr>
                 </a:tc>
@@ -19423,7 +19326,7 @@
                       <a:r>
                         <a:rPr lang="en-US" sz="1300" dirty="0">
                           <a:solidFill>
-                            <a:schemeClr val="tx1"/>
+                            <a:srgbClr val="212121"/>
                           </a:solidFill>
                         </a:rPr>
                         <a:t>십여 초</a:t>
@@ -19469,7 +19372,7 @@
                       <a:tailEnd type="none" w="med" len="med"/>
                     </a:lnB>
                     <a:solidFill>
-                      <a:schemeClr val="bg1"/>
+                      <a:srgbClr val="FFFFFF"/>
                     </a:solidFill>
                   </a:tcPr>
                 </a:tc>
@@ -19484,7 +19387,7 @@
                       <a:r>
                         <a:rPr lang="en-US" sz="1300" dirty="0">
                           <a:solidFill>
-                            <a:schemeClr val="tx1"/>
+                            <a:srgbClr val="212121"/>
                           </a:solidFill>
                         </a:rPr>
                         <a:t>PART 1</a:t>
@@ -19530,7 +19433,7 @@
                       <a:tailEnd type="none" w="med" len="med"/>
                     </a:lnB>
                     <a:solidFill>
-                      <a:schemeClr val="bg1"/>
+                      <a:srgbClr val="FFFFFF"/>
                     </a:solidFill>
                   </a:tcPr>
                 </a:tc>
@@ -19547,7 +19450,7 @@
                       <a:r>
                         <a:rPr lang="en-US" sz="1300" b="1" dirty="0">
                           <a:solidFill>
-                            <a:schemeClr val="accent1"/>
+                            <a:srgbClr val="00754A"/>
                           </a:solidFill>
                         </a:rPr>
                         <a:t>§4</a:t>
@@ -19593,7 +19496,7 @@
                       <a:tailEnd type="none" w="med" len="med"/>
                     </a:lnB>
                     <a:solidFill>
-                      <a:schemeClr val="bg2"/>
+                      <a:srgbClr val="F2F0EB"/>
                     </a:solidFill>
                   </a:tcPr>
                 </a:tc>
@@ -19608,7 +19511,7 @@
                       <a:r>
                         <a:rPr lang="en-US" sz="1300" b="1" dirty="0">
                           <a:solidFill>
-                            <a:schemeClr val="accent1"/>
+                            <a:srgbClr val="00754A"/>
                           </a:solidFill>
                         </a:rPr>
                         <a:t>10 epoch checkpoint에서 20 step 미세조정</a:t>
@@ -19654,7 +19557,7 @@
                       <a:tailEnd type="none" w="med" len="med"/>
                     </a:lnB>
                     <a:solidFill>
-                      <a:schemeClr val="bg2"/>
+                      <a:srgbClr val="F2F0EB"/>
                     </a:solidFill>
                   </a:tcPr>
                 </a:tc>
@@ -19669,7 +19572,7 @@
                       <a:r>
                         <a:rPr lang="en-US" sz="1300" b="1" dirty="0">
                           <a:solidFill>
-                            <a:schemeClr val="accent1"/>
+                            <a:srgbClr val="00754A"/>
                           </a:solidFill>
                         </a:rPr>
                         <a:t>약 7분 (로컬 CPU)</a:t>
@@ -19715,7 +19618,7 @@
                       <a:tailEnd type="none" w="med" len="med"/>
                     </a:lnB>
                     <a:solidFill>
-                      <a:schemeClr val="bg2"/>
+                      <a:srgbClr val="F2F0EB"/>
                     </a:solidFill>
                   </a:tcPr>
                 </a:tc>
@@ -19730,7 +19633,7 @@
                       <a:r>
                         <a:rPr lang="en-US" sz="1300" b="1" dirty="0">
                           <a:solidFill>
-                            <a:schemeClr val="accent1"/>
+                            <a:srgbClr val="00754A"/>
                           </a:solidFill>
                         </a:rPr>
                         <a:t>PART 2</a:t>
@@ -19776,7 +19679,7 @@
                       <a:tailEnd type="none" w="med" len="med"/>
                     </a:lnB>
                     <a:solidFill>
-                      <a:schemeClr val="bg2"/>
+                      <a:srgbClr val="F2F0EB"/>
                     </a:solidFill>
                   </a:tcPr>
                 </a:tc>
@@ -19793,7 +19696,7 @@
                       <a:r>
                         <a:rPr lang="en-US" sz="1300" dirty="0">
                           <a:solidFill>
-                            <a:schemeClr val="tx1"/>
+                            <a:srgbClr val="212121"/>
                           </a:solidFill>
                         </a:rPr>
                         <a:t>§5</a:t>
@@ -19839,7 +19742,7 @@
                       <a:tailEnd type="none" w="med" len="med"/>
                     </a:lnB>
                     <a:solidFill>
-                      <a:schemeClr val="bg1"/>
+                      <a:srgbClr val="FFFFFF"/>
                     </a:solidFill>
                   </a:tcPr>
                 </a:tc>
@@ -19854,7 +19757,7 @@
                       <a:r>
                         <a:rPr lang="en-US" sz="1300" dirty="0">
                           <a:solidFill>
-                            <a:schemeClr val="tx1"/>
+                            <a:srgbClr val="212121"/>
                           </a:solidFill>
                         </a:rPr>
                         <a:t>QGAN과 MediQ-GAN을 같은 지표 4종으로 비교</a:t>
@@ -19900,7 +19803,7 @@
                       <a:tailEnd type="none" w="med" len="med"/>
                     </a:lnB>
                     <a:solidFill>
-                      <a:schemeClr val="bg1"/>
+                      <a:srgbClr val="FFFFFF"/>
                     </a:solidFill>
                   </a:tcPr>
                 </a:tc>
@@ -19915,7 +19818,7 @@
                       <a:r>
                         <a:rPr lang="en-US" sz="1300" dirty="0">
                           <a:solidFill>
-                            <a:schemeClr val="tx1"/>
+                            <a:srgbClr val="212121"/>
                           </a:solidFill>
                         </a:rPr>
                         <a:t>수 초</a:t>
@@ -19961,7 +19864,7 @@
                       <a:tailEnd type="none" w="med" len="med"/>
                     </a:lnB>
                     <a:solidFill>
-                      <a:schemeClr val="bg1"/>
+                      <a:srgbClr val="FFFFFF"/>
                     </a:solidFill>
                   </a:tcPr>
                 </a:tc>
@@ -19976,7 +19879,7 @@
                       <a:r>
                         <a:rPr lang="en-US" sz="1300" dirty="0">
                           <a:solidFill>
-                            <a:schemeClr val="tx1"/>
+                            <a:srgbClr val="212121"/>
                           </a:solidFill>
                         </a:rPr>
                         <a:t>PART 3</a:t>
@@ -20022,7 +19925,7 @@
                       <a:tailEnd type="none" w="med" len="med"/>
                     </a:lnB>
                     <a:solidFill>
-                      <a:schemeClr val="bg1"/>
+                      <a:srgbClr val="FFFFFF"/>
                     </a:solidFill>
                   </a:tcPr>
                 </a:tc>
@@ -20039,7 +19942,7 @@
                       <a:r>
                         <a:rPr lang="en-US" sz="1300" dirty="0">
                           <a:solidFill>
-                            <a:schemeClr val="tx1"/>
+                            <a:srgbClr val="212121"/>
                           </a:solidFill>
                         </a:rPr>
                         <a:t>§6</a:t>
@@ -20085,7 +19988,7 @@
                       <a:tailEnd type="none" w="med" len="med"/>
                     </a:lnB>
                     <a:solidFill>
-                      <a:schemeClr val="bg2"/>
+                      <a:srgbClr val="F2F0EB"/>
                     </a:solidFill>
                   </a:tcPr>
                 </a:tc>
@@ -20100,7 +20003,7 @@
                       <a:r>
                         <a:rPr lang="en-US" sz="1300" dirty="0">
                           <a:solidFill>
-                            <a:schemeClr val="tx1"/>
+                            <a:srgbClr val="212121"/>
                           </a:solidFill>
                         </a:rPr>
                         <a:t>이미지 생성에서 양자컴퓨팅의 한계와 방향</a:t>
@@ -20146,7 +20049,7 @@
                       <a:tailEnd type="none" w="med" len="med"/>
                     </a:lnB>
                     <a:solidFill>
-                      <a:schemeClr val="bg2"/>
+                      <a:srgbClr val="F2F0EB"/>
                     </a:solidFill>
                   </a:tcPr>
                 </a:tc>
@@ -20161,7 +20064,7 @@
                       <a:r>
                         <a:rPr lang="en-US" sz="1300" dirty="0">
                           <a:solidFill>
-                            <a:schemeClr val="tx1"/>
+                            <a:srgbClr val="212121"/>
                           </a:solidFill>
                         </a:rPr>
                         <a:t>-</a:t>
@@ -20207,7 +20110,7 @@
                       <a:tailEnd type="none" w="med" len="med"/>
                     </a:lnB>
                     <a:solidFill>
-                      <a:schemeClr val="bg2"/>
+                      <a:srgbClr val="F2F0EB"/>
                     </a:solidFill>
                   </a:tcPr>
                 </a:tc>
@@ -20222,7 +20125,7 @@
                       <a:r>
                         <a:rPr lang="en-US" sz="1300" dirty="0">
                           <a:solidFill>
-                            <a:schemeClr val="tx1"/>
+                            <a:srgbClr val="212121"/>
                           </a:solidFill>
                         </a:rPr>
                         <a:t>PART 4</a:t>
@@ -20268,7 +20171,7 @@
                       <a:tailEnd type="none" w="med" len="med"/>
                     </a:lnB>
                     <a:solidFill>
-                      <a:schemeClr val="bg2"/>
+                      <a:srgbClr val="F2F0EB"/>
                     </a:solidFill>
                   </a:tcPr>
                 </a:tc>
@@ -20277,42 +20180,6 @@
           </a:graphicData>
         </a:graphic>
       </p:graphicFrame>
-      <p:sp>
-        <p:nvSpPr>
-          <p:cNvPr id="7" name="Text 3"/>
-          <p:cNvSpPr txBox="1"/>
-          <p:nvPr/>
-        </p:nvSpPr>
-        <p:spPr>
-          <a:xfrm>
-            <a:off x="548640" y="5715000"/>
-            <a:ext cx="11064240" cy="320040"/>
-          </a:xfrm>
-          <a:prstGeom prst="rect">
-            <a:avLst/>
-          </a:prstGeom>
-          <a:noFill/>
-          <a:ln/>
-        </p:spPr>
-        <p:txBody>
-          <a:bodyPr wrap="square" lIns="0" tIns="0" rIns="0" bIns="0" rtlCol="0" anchor="t"/>
-          <a:lstStyle/>
-          <a:p>
-            <a:pPr indent="0" marL="0">
-              <a:buNone/>
-            </a:pPr>
-            <a:r>
-              <a:rPr lang="en-US" sz="1200" dirty="0">
-                <a:solidFill>
-                  <a:schemeClr val="accent6"/>
-                </a:solidFill>
-              </a:rPr>
-              <a:t>§4 셀은 먼저 실행해 두고, 학습이 진행되는 동안 PART 2를 설명함.</a:t>
-            </a:r>
-            <a:endParaRPr lang="en-US" sz="1200" dirty="0"/>
-          </a:p>
-        </p:txBody>
-      </p:sp>
       <p:sp>
         <p:nvSpPr>
           <p:cNvPr id="25" name="Slide Number Placeholder 0"/>
@@ -20343,7 +20210,7 @@
             <a:lvl1pPr>
               <a:defRPr sz="1000">
                 <a:solidFill>
-                  <a:schemeClr val="accent6"/>
+                  <a:srgbClr val="6B6B6B"/>
                 </a:solidFill>
               </a:defRPr>
             </a:lvl1pPr>
@@ -20412,7 +20279,7 @@
             <a:r>
               <a:rPr lang="en-US" sz="1200" b="1" spc="100" kern="0" dirty="0">
                 <a:solidFill>
-                  <a:schemeClr val="accent1"/>
+                  <a:srgbClr val="00754A"/>
                 </a:solidFill>
               </a:rPr>
               <a:t>PART 3 · 결과 해석</a:t>
@@ -20450,7 +20317,7 @@
             <a:r>
               <a:rPr lang="en-US" sz="3000" b="1" dirty="0">
                 <a:solidFill>
-                  <a:schemeClr val="tx1"/>
+                  <a:srgbClr val="212121"/>
                 </a:solidFill>
               </a:rPr>
               <a:t>결과 해석 : 두 모델의 한계</a:t>
@@ -20488,7 +20355,7 @@
             <a:r>
               <a:rPr lang="en-US" sz="1400" dirty="0">
                 <a:solidFill>
-                  <a:schemeClr val="accent6"/>
+                  <a:srgbClr val="6B6B6B"/>
                 </a:solidFill>
               </a:rPr>
               <a:t>QGAN은 형태 재현이 약하고, MediQ-GAN은 평균 이미지에 가까운 그림을 반복함</a:t>
@@ -20537,7 +20404,7 @@
                       <a:r>
                         <a:rPr lang="en-US" sz="1300" b="1" dirty="0">
                           <a:solidFill>
-                            <a:schemeClr val="bg1"/>
+                            <a:srgbClr val="FFFFFF"/>
                           </a:solidFill>
                         </a:rPr>
                         <a:t>지표</a:t>
@@ -20583,7 +20450,7 @@
                       <a:tailEnd type="none" w="med" len="med"/>
                     </a:lnB>
                     <a:solidFill>
-                      <a:schemeClr val="tx2"/>
+                      <a:srgbClr val="1E3932"/>
                     </a:solidFill>
                   </a:tcPr>
                 </a:tc>
@@ -20598,7 +20465,7 @@
                       <a:r>
                         <a:rPr lang="en-US" sz="1300" b="1" dirty="0">
                           <a:solidFill>
-                            <a:schemeClr val="bg1"/>
+                            <a:srgbClr val="FFFFFF"/>
                           </a:solidFill>
                         </a:rPr>
                         <a:t>QGAN 600 step</a:t>
@@ -20644,7 +20511,7 @@
                       <a:tailEnd type="none" w="med" len="med"/>
                     </a:lnB>
                     <a:solidFill>
-                      <a:schemeClr val="tx2"/>
+                      <a:srgbClr val="1E3932"/>
                     </a:solidFill>
                   </a:tcPr>
                 </a:tc>
@@ -20659,7 +20526,7 @@
                       <a:r>
                         <a:rPr lang="en-US" sz="1300" b="1" dirty="0">
                           <a:solidFill>
-                            <a:schemeClr val="bg1"/>
+                            <a:srgbClr val="FFFFFF"/>
                           </a:solidFill>
                         </a:rPr>
                         <a:t>MediQ-GAN 25 epoch</a:t>
@@ -20705,7 +20572,7 @@
                       <a:tailEnd type="none" w="med" len="med"/>
                     </a:lnB>
                     <a:solidFill>
-                      <a:schemeClr val="tx2"/>
+                      <a:srgbClr val="1E3932"/>
                     </a:solidFill>
                   </a:tcPr>
                 </a:tc>
@@ -20720,7 +20587,7 @@
                       <a:r>
                         <a:rPr lang="en-US" sz="1300" b="1" dirty="0">
                           <a:solidFill>
-                            <a:schemeClr val="bg1"/>
+                            <a:srgbClr val="FFFFFF"/>
                           </a:solidFill>
                         </a:rPr>
                         <a:t>의미</a:t>
@@ -20766,7 +20633,7 @@
                       <a:tailEnd type="none" w="med" len="med"/>
                     </a:lnB>
                     <a:solidFill>
-                      <a:schemeClr val="tx2"/>
+                      <a:srgbClr val="1E3932"/>
                     </a:solidFill>
                   </a:tcPr>
                 </a:tc>
@@ -20783,7 +20650,7 @@
                       <a:r>
                         <a:rPr lang="en-US" sz="1300" dirty="0">
                           <a:solidFill>
-                            <a:schemeClr val="tx1"/>
+                            <a:srgbClr val="212121"/>
                           </a:solidFill>
                         </a:rPr>
                         <a:t>② 클래스 평균 상관 ↑</a:t>
@@ -20829,7 +20696,7 @@
                       <a:tailEnd type="none" w="med" len="med"/>
                     </a:lnB>
                     <a:solidFill>
-                      <a:schemeClr val="bg1"/>
+                      <a:srgbClr val="FFFFFF"/>
                     </a:solidFill>
                   </a:tcPr>
                 </a:tc>
@@ -20844,7 +20711,7 @@
                       <a:r>
                         <a:rPr lang="en-US" sz="1300" dirty="0">
                           <a:solidFill>
-                            <a:schemeClr val="tx1"/>
+                            <a:srgbClr val="212121"/>
                           </a:solidFill>
                         </a:rPr>
                         <a:t>0.195</a:t>
@@ -20890,7 +20757,7 @@
                       <a:tailEnd type="none" w="med" len="med"/>
                     </a:lnB>
                     <a:solidFill>
-                      <a:schemeClr val="bg1"/>
+                      <a:srgbClr val="FFFFFF"/>
                     </a:solidFill>
                   </a:tcPr>
                 </a:tc>
@@ -20905,7 +20772,7 @@
                       <a:r>
                         <a:rPr lang="en-US" sz="1300" b="1" dirty="0">
                           <a:solidFill>
-                            <a:schemeClr val="accent2"/>
+                            <a:srgbClr val="5B3E8C"/>
                           </a:solidFill>
                         </a:rPr>
                         <a:t>0.365</a:t>
@@ -20951,7 +20818,7 @@
                       <a:tailEnd type="none" w="med" len="med"/>
                     </a:lnB>
                     <a:solidFill>
-                      <a:schemeClr val="bg1"/>
+                      <a:srgbClr val="FFFFFF"/>
                     </a:solidFill>
                   </a:tcPr>
                 </a:tc>
@@ -20966,7 +20833,7 @@
                       <a:r>
                         <a:rPr lang="en-US" sz="1300" dirty="0">
                           <a:solidFill>
-                            <a:schemeClr val="tx1"/>
+                            <a:srgbClr val="212121"/>
                           </a:solidFill>
                         </a:rPr>
                         <a:t>평균 형태는 MediQ-GAN이 더 가까움</a:t>
@@ -21012,7 +20879,7 @@
                       <a:tailEnd type="none" w="med" len="med"/>
                     </a:lnB>
                     <a:solidFill>
-                      <a:schemeClr val="bg1"/>
+                      <a:srgbClr val="FFFFFF"/>
                     </a:solidFill>
                   </a:tcPr>
                 </a:tc>
@@ -21029,7 +20896,7 @@
                       <a:r>
                         <a:rPr lang="en-US" sz="1300" dirty="0">
                           <a:solidFill>
-                            <a:schemeClr val="tx1"/>
+                            <a:srgbClr val="212121"/>
                           </a:solidFill>
                         </a:rPr>
                         <a:t>③ 최근접 실제 거리</a:t>
@@ -21075,7 +20942,7 @@
                       <a:tailEnd type="none" w="med" len="med"/>
                     </a:lnB>
                     <a:solidFill>
-                      <a:schemeClr val="bg2"/>
+                      <a:srgbClr val="F2F0EB"/>
                     </a:solidFill>
                   </a:tcPr>
                 </a:tc>
@@ -21090,7 +20957,7 @@
                       <a:r>
                         <a:rPr lang="en-US" sz="1300" dirty="0">
                           <a:solidFill>
-                            <a:schemeClr val="tx1"/>
+                            <a:srgbClr val="212121"/>
                           </a:solidFill>
                         </a:rPr>
                         <a:t>1.64</a:t>
@@ -21136,7 +21003,7 @@
                       <a:tailEnd type="none" w="med" len="med"/>
                     </a:lnB>
                     <a:solidFill>
-                      <a:schemeClr val="bg2"/>
+                      <a:srgbClr val="F2F0EB"/>
                     </a:solidFill>
                   </a:tcPr>
                 </a:tc>
@@ -21151,7 +21018,7 @@
                       <a:r>
                         <a:rPr lang="en-US" sz="1300" dirty="0">
                           <a:solidFill>
-                            <a:schemeClr val="tx1"/>
+                            <a:srgbClr val="212121"/>
                           </a:solidFill>
                         </a:rPr>
                         <a:t>3.44</a:t>
@@ -21197,7 +21064,7 @@
                       <a:tailEnd type="none" w="med" len="med"/>
                     </a:lnB>
                     <a:solidFill>
-                      <a:schemeClr val="bg2"/>
+                      <a:srgbClr val="F2F0EB"/>
                     </a:solidFill>
                   </a:tcPr>
                 </a:tc>
@@ -21212,7 +21079,7 @@
                       <a:r>
                         <a:rPr lang="en-US" sz="1300" dirty="0">
                           <a:solidFill>
-                            <a:schemeClr val="tx1"/>
+                            <a:srgbClr val="212121"/>
                           </a:solidFill>
                         </a:rPr>
                         <a:t>MediQ-GAN은 실제 이미지 어느 것과도 멂</a:t>
@@ -21258,7 +21125,7 @@
                       <a:tailEnd type="none" w="med" len="med"/>
                     </a:lnB>
                     <a:solidFill>
-                      <a:schemeClr val="bg2"/>
+                      <a:srgbClr val="F2F0EB"/>
                     </a:solidFill>
                   </a:tcPr>
                 </a:tc>
@@ -21275,7 +21142,7 @@
                       <a:r>
                         <a:rPr lang="en-US" sz="1300" dirty="0">
                           <a:solidFill>
-                            <a:schemeClr val="tx1"/>
+                            <a:srgbClr val="212121"/>
                           </a:solidFill>
                         </a:rPr>
                         <a:t>④ 샘플 간 거리 (실제 2.505)</a:t>
@@ -21321,7 +21188,7 @@
                       <a:tailEnd type="none" w="med" len="med"/>
                     </a:lnB>
                     <a:solidFill>
-                      <a:schemeClr val="bg1"/>
+                      <a:srgbClr val="FFFFFF"/>
                     </a:solidFill>
                   </a:tcPr>
                 </a:tc>
@@ -21336,7 +21203,7 @@
                       <a:r>
                         <a:rPr lang="en-US" sz="1300" b="1" dirty="0">
                           <a:solidFill>
-                            <a:schemeClr val="accent1"/>
+                            <a:srgbClr val="00754A"/>
                           </a:solidFill>
                         </a:rPr>
                         <a:t>1.92</a:t>
@@ -21382,7 +21249,7 @@
                       <a:tailEnd type="none" w="med" len="med"/>
                     </a:lnB>
                     <a:solidFill>
-                      <a:schemeClr val="bg1"/>
+                      <a:srgbClr val="FFFFFF"/>
                     </a:solidFill>
                   </a:tcPr>
                 </a:tc>
@@ -21397,7 +21264,7 @@
                       <a:r>
                         <a:rPr lang="en-US" sz="1300" dirty="0">
                           <a:solidFill>
-                            <a:schemeClr val="tx1"/>
+                            <a:srgbClr val="212121"/>
                           </a:solidFill>
                         </a:rPr>
                         <a:t>0.30</a:t>
@@ -21443,7 +21310,7 @@
                       <a:tailEnd type="none" w="med" len="med"/>
                     </a:lnB>
                     <a:solidFill>
-                      <a:schemeClr val="bg1"/>
+                      <a:srgbClr val="FFFFFF"/>
                     </a:solidFill>
                   </a:tcPr>
                 </a:tc>
@@ -21458,7 +21325,7 @@
                       <a:r>
                         <a:rPr lang="en-US" sz="1300" dirty="0">
                           <a:solidFill>
-                            <a:schemeClr val="tx1"/>
+                            <a:srgbClr val="212121"/>
                           </a:solidFill>
                         </a:rPr>
                         <a:t>MediQ-GAN은 비슷한 그림을 반복</a:t>
@@ -21504,7 +21371,7 @@
                       <a:tailEnd type="none" w="med" len="med"/>
                     </a:lnB>
                     <a:solidFill>
-                      <a:schemeClr val="bg1"/>
+                      <a:srgbClr val="FFFFFF"/>
                     </a:solidFill>
                   </a:tcPr>
                 </a:tc>
@@ -21540,7 +21407,7 @@
             <a:r>
               <a:rPr lang="en-US" sz="1400" b="1" dirty="0">
                 <a:solidFill>
-                  <a:schemeClr val="accent1"/>
+                  <a:srgbClr val="00754A"/>
                 </a:solidFill>
               </a:rPr>
               <a:t>해석</a:t>
@@ -21579,7 +21446,7 @@
             <a:r>
               <a:rPr lang="en-US" sz="1300" dirty="0">
                 <a:solidFill>
-                  <a:schemeClr val="tx1"/>
+                  <a:srgbClr val="212121"/>
                 </a:solidFill>
               </a:rPr>
               <a:t>QGAN: 다양성은 실제에 가깝지만 병변 형태 재현이 약함. patch를 서로 독립적으로 만들어 이미지 전체 구조를 잡기 어려움.</a:t>
@@ -21596,7 +21463,7 @@
             <a:r>
               <a:rPr lang="en-US" sz="1300" dirty="0">
                 <a:solidFill>
-                  <a:schemeClr val="tx1"/>
+                  <a:srgbClr val="212121"/>
                 </a:solidFill>
               </a:rPr>
               <a:t>MediQ-GAN: 평균 형태는 잘 맞추지만 다양성이 실제의 1/8. 최종 출력을 고전 decoder가 만들기 때문에 Tanh가 포화되면 z와 무관한 이미지가 나옴.</a:t>
@@ -21613,7 +21480,7 @@
             <a:r>
               <a:rPr lang="en-US" sz="1300" dirty="0">
                 <a:solidFill>
-                  <a:schemeClr val="tx1"/>
+                  <a:srgbClr val="212121"/>
                 </a:solidFill>
               </a:rPr>
               <a:t>②만 보면 MediQ-GAN이 낫다고 결론 내리게 됨. ②는 평균 형태만 보므로 같은 이미지를 반복해도 높게 나옴.</a:t>
@@ -21652,7 +21519,7 @@
             <a:lvl1pPr>
               <a:defRPr sz="1000">
                 <a:solidFill>
-                  <a:schemeClr val="accent6"/>
+                  <a:srgbClr val="6B6B6B"/>
                 </a:solidFill>
               </a:defRPr>
             </a:lvl1pPr>
@@ -21721,7 +21588,7 @@
             <a:r>
               <a:rPr lang="en-US" sz="1200" b="1" spc="100" kern="0" dirty="0">
                 <a:solidFill>
-                  <a:schemeClr val="accent1"/>
+                  <a:srgbClr val="00754A"/>
                 </a:solidFill>
               </a:rPr>
               <a:t>PART 4 · 노트북 §6</a:t>
@@ -21759,7 +21626,7 @@
             <a:r>
               <a:rPr lang="en-US" sz="3000" b="1" dirty="0">
                 <a:solidFill>
-                  <a:schemeClr val="tx1"/>
+                  <a:srgbClr val="212121"/>
                 </a:solidFill>
               </a:rPr>
               <a:t>이미지 생성에서 양자컴퓨팅의 한계</a:t>
@@ -21797,7 +21664,7 @@
             <a:r>
               <a:rPr lang="en-US" sz="1400" dirty="0">
                 <a:solidFill>
-                  <a:schemeClr val="accent6"/>
+                  <a:srgbClr val="6B6B6B"/>
                 </a:solidFill>
               </a:rPr>
               <a:t>3일 동안의 실습에서 확인한 내용 (노트북 §6)</a:t>
@@ -21883,7 +21750,7 @@
                       <a:tailEnd type="none" w="med" len="med"/>
                     </a:lnB>
                     <a:solidFill>
-                      <a:schemeClr val="tx2"/>
+                      <a:srgbClr val="1E3932"/>
                     </a:solidFill>
                   </a:tcPr>
                 </a:tc>
@@ -21898,7 +21765,7 @@
                       <a:r>
                         <a:rPr lang="en-US" sz="1250" b="1" dirty="0">
                           <a:solidFill>
-                            <a:schemeClr val="bg1"/>
+                            <a:srgbClr val="FFFFFF"/>
                           </a:solidFill>
                         </a:rPr>
                         <a:t>관찰</a:t>
@@ -21944,7 +21811,7 @@
                       <a:tailEnd type="none" w="med" len="med"/>
                     </a:lnB>
                     <a:solidFill>
-                      <a:schemeClr val="tx2"/>
+                      <a:srgbClr val="1E3932"/>
                     </a:solidFill>
                   </a:tcPr>
                 </a:tc>
@@ -21959,7 +21826,7 @@
                       <a:r>
                         <a:rPr lang="en-US" sz="1250" b="1" dirty="0">
                           <a:solidFill>
-                            <a:schemeClr val="bg1"/>
+                            <a:srgbClr val="FFFFFF"/>
                           </a:solidFill>
                         </a:rPr>
                         <a:t>실습에서 확인한 근거</a:t>
@@ -22005,7 +21872,7 @@
                       <a:tailEnd type="none" w="med" len="med"/>
                     </a:lnB>
                     <a:solidFill>
-                      <a:schemeClr val="tx2"/>
+                      <a:srgbClr val="1E3932"/>
                     </a:solidFill>
                   </a:tcPr>
                 </a:tc>
@@ -22022,7 +21889,7 @@
                       <a:r>
                         <a:rPr lang="en-US" sz="1250" dirty="0">
                           <a:solidFill>
-                            <a:schemeClr val="tx1"/>
+                            <a:srgbClr val="212121"/>
                           </a:solidFill>
                         </a:rPr>
                         <a:t>①</a:t>
@@ -22068,7 +21935,7 @@
                       <a:tailEnd type="none" w="med" len="med"/>
                     </a:lnB>
                     <a:solidFill>
-                      <a:schemeClr val="bg1"/>
+                      <a:srgbClr val="FFFFFF"/>
                     </a:solidFill>
                   </a:tcPr>
                 </a:tc>
@@ -22083,7 +21950,7 @@
                       <a:r>
                         <a:rPr lang="en-US" sz="1250" dirty="0">
                           <a:solidFill>
-                            <a:schemeClr val="tx1"/>
+                            <a:srgbClr val="212121"/>
                           </a:solidFill>
                         </a:rPr>
                         <a:t>측정 방식이 학습 성패를 가름</a:t>
@@ -22129,7 +21996,7 @@
                       <a:tailEnd type="none" w="med" len="med"/>
                     </a:lnB>
                     <a:solidFill>
-                      <a:schemeClr val="bg1"/>
+                      <a:srgbClr val="FFFFFF"/>
                     </a:solidFill>
                   </a:tcPr>
                 </a:tc>
@@ -22144,7 +22011,7 @@
                       <a:r>
                         <a:rPr lang="en-US" sz="1250" dirty="0">
                           <a:solidFill>
-                            <a:schemeClr val="tx1"/>
+                            <a:srgbClr val="212121"/>
                           </a:solidFill>
                         </a:rPr>
                         <a:t>ancilla qubit = 0만 쓰도록 바꾸자 생성 평균과 실제 평균의 상관 0.00 → 0.49 (8×8 사전 실험)</a:t>
@@ -22190,7 +22057,7 @@
                       <a:tailEnd type="none" w="med" len="med"/>
                     </a:lnB>
                     <a:solidFill>
-                      <a:schemeClr val="bg1"/>
+                      <a:srgbClr val="FFFFFF"/>
                     </a:solidFill>
                   </a:tcPr>
                 </a:tc>
@@ -22207,7 +22074,7 @@
                       <a:r>
                         <a:rPr lang="en-US" sz="1250" dirty="0">
                           <a:solidFill>
-                            <a:schemeClr val="tx1"/>
+                            <a:srgbClr val="212121"/>
                           </a:solidFill>
                         </a:rPr>
                         <a:t>②</a:t>
@@ -22253,7 +22120,7 @@
                       <a:tailEnd type="none" w="med" len="med"/>
                     </a:lnB>
                     <a:solidFill>
-                      <a:schemeClr val="bg2"/>
+                      <a:srgbClr val="F2F0EB"/>
                     </a:solidFill>
                   </a:tcPr>
                 </a:tc>
@@ -22268,7 +22135,7 @@
                       <a:r>
                         <a:rPr lang="en-US" sz="1250" dirty="0">
                           <a:solidFill>
-                            <a:schemeClr val="tx1"/>
+                            <a:srgbClr val="212121"/>
                           </a:solidFill>
                         </a:rPr>
                         <a:t>현재 학습은 시뮬레이터에서만 가능한 규모</a:t>
@@ -22314,7 +22181,7 @@
                       <a:tailEnd type="none" w="med" len="med"/>
                     </a:lnB>
                     <a:solidFill>
-                      <a:schemeClr val="bg2"/>
+                      <a:srgbClr val="F2F0EB"/>
                     </a:solidFill>
                   </a:tcPr>
                 </a:tc>
@@ -22329,7 +22196,7 @@
                       <a:r>
                         <a:rPr lang="en-US" sz="1250" dirty="0">
                           <a:solidFill>
-                            <a:schemeClr val="tx1"/>
+                            <a:srgbClr val="212121"/>
                           </a:solidFill>
                         </a:rPr>
                         <a:t>두 모델 모두 exact 상태벡터 시뮬레이션. 실제 장치는 parameter-shift로 파라미터당 회로 2회 × shot</a:t>
@@ -22375,7 +22242,7 @@
                       <a:tailEnd type="none" w="med" len="med"/>
                     </a:lnB>
                     <a:solidFill>
-                      <a:schemeClr val="bg2"/>
+                      <a:srgbClr val="F2F0EB"/>
                     </a:solidFill>
                   </a:tcPr>
                 </a:tc>
@@ -22392,7 +22259,7 @@
                       <a:r>
                         <a:rPr lang="en-US" sz="1250" dirty="0">
                           <a:solidFill>
-                            <a:schemeClr val="tx1"/>
+                            <a:srgbClr val="212121"/>
                           </a:solidFill>
                         </a:rPr>
                         <a:t>③</a:t>
@@ -22438,7 +22305,7 @@
                       <a:tailEnd type="none" w="med" len="med"/>
                     </a:lnB>
                     <a:solidFill>
-                      <a:schemeClr val="bg1"/>
+                      <a:srgbClr val="FFFFFF"/>
                     </a:solidFill>
                   </a:tcPr>
                 </a:tc>
@@ -22453,7 +22320,7 @@
                       <a:r>
                         <a:rPr lang="en-US" sz="1250" dirty="0">
                           <a:solidFill>
-                            <a:schemeClr val="tx1"/>
+                            <a:srgbClr val="212121"/>
                           </a:solidFill>
                         </a:rPr>
                         <a:t>해상도 한계가 평가 한계로 이어짐</a:t>
@@ -22499,7 +22366,7 @@
                       <a:tailEnd type="none" w="med" len="med"/>
                     </a:lnB>
                     <a:solidFill>
-                      <a:schemeClr val="bg1"/>
+                      <a:srgbClr val="FFFFFF"/>
                     </a:solidFill>
                   </a:tcPr>
                 </a:tc>
@@ -22514,7 +22381,7 @@
                       <a:r>
                         <a:rPr lang="en-US" sz="1250" dirty="0">
                           <a:solidFill>
-                            <a:schemeClr val="tx1"/>
+                            <a:srgbClr val="212121"/>
                           </a:solidFill>
                         </a:rPr>
                         <a:t>16×16에서는 FID를 쓸 수 없어 지표 4종으로 대신함</a:t>
@@ -22560,7 +22427,7 @@
                       <a:tailEnd type="none" w="med" len="med"/>
                     </a:lnB>
                     <a:solidFill>
-                      <a:schemeClr val="bg1"/>
+                      <a:srgbClr val="FFFFFF"/>
                     </a:solidFill>
                   </a:tcPr>
                 </a:tc>
@@ -22577,7 +22444,7 @@
                       <a:r>
                         <a:rPr lang="en-US" sz="1250" dirty="0">
                           <a:solidFill>
-                            <a:schemeClr val="tx1"/>
+                            <a:srgbClr val="212121"/>
                           </a:solidFill>
                         </a:rPr>
                         <a:t>④</a:t>
@@ -22623,7 +22490,7 @@
                       <a:tailEnd type="none" w="med" len="med"/>
                     </a:lnB>
                     <a:solidFill>
-                      <a:schemeClr val="bg2"/>
+                      <a:srgbClr val="F2F0EB"/>
                     </a:solidFill>
                   </a:tcPr>
                 </a:tc>
@@ -22638,7 +22505,7 @@
                       <a:r>
                         <a:rPr lang="en-US" sz="1250" dirty="0">
                           <a:solidFill>
-                            <a:schemeClr val="tx1"/>
+                            <a:srgbClr val="212121"/>
                           </a:solidFill>
                         </a:rPr>
                         <a:t>큐빗 수에 지수적으로 늘어나는 비용</a:t>
@@ -22684,7 +22551,7 @@
                       <a:tailEnd type="none" w="med" len="med"/>
                     </a:lnB>
                     <a:solidFill>
-                      <a:schemeClr val="bg2"/>
+                      <a:srgbClr val="F2F0EB"/>
                     </a:solidFill>
                   </a:tcPr>
                 </a:tc>
@@ -22699,7 +22566,7 @@
                       <a:r>
                         <a:rPr lang="en-US" sz="1250" dirty="0">
                           <a:solidFill>
-                            <a:schemeClr val="tx1"/>
+                            <a:srgbClr val="212121"/>
                           </a:solidFill>
                         </a:rPr>
                         <a:t>16큐빗은 12큐빗 대비 상태벡터 16배, 실측 시간 약 20배</a:t>
@@ -22745,7 +22612,7 @@
                       <a:tailEnd type="none" w="med" len="med"/>
                     </a:lnB>
                     <a:solidFill>
-                      <a:schemeClr val="bg2"/>
+                      <a:srgbClr val="F2F0EB"/>
                     </a:solidFill>
                   </a:tcPr>
                 </a:tc>
@@ -22762,7 +22629,7 @@
                       <a:r>
                         <a:rPr lang="en-US" sz="1250" dirty="0">
                           <a:solidFill>
-                            <a:schemeClr val="tx1"/>
+                            <a:srgbClr val="212121"/>
                           </a:solidFill>
                         </a:rPr>
                         <a:t>⑤</a:t>
@@ -22808,7 +22675,7 @@
                       <a:tailEnd type="none" w="med" len="med"/>
                     </a:lnB>
                     <a:solidFill>
-                      <a:schemeClr val="bg1"/>
+                      <a:srgbClr val="FFFFFF"/>
                     </a:solidFill>
                   </a:tcPr>
                 </a:tc>
@@ -22823,7 +22690,7 @@
                       <a:r>
                         <a:rPr lang="en-US" sz="1250" dirty="0">
                           <a:solidFill>
-                            <a:schemeClr val="tx1"/>
+                            <a:srgbClr val="212121"/>
                           </a:solidFill>
                         </a:rPr>
                         <a:t>고전 쪽 학습 안정화가 결과를 좌우</a:t>
@@ -22869,7 +22736,7 @@
                       <a:tailEnd type="none" w="med" len="med"/>
                     </a:lnB>
                     <a:solidFill>
-                      <a:schemeClr val="bg1"/>
+                      <a:srgbClr val="FFFFFF"/>
                     </a:solidFill>
                   </a:tcPr>
                 </a:tc>
@@ -22884,7 +22751,7 @@
                       <a:r>
                         <a:rPr lang="en-US" sz="1250" dirty="0">
                           <a:solidFill>
-                            <a:schemeClr val="tx1"/>
+                            <a:srgbClr val="212121"/>
                           </a:solidFill>
                         </a:rPr>
                         <a:t>BCE 판별자가 쉽게 이김. 원 논문은 WGAN-GP critic으로 판별자를 제약</a:t>
@@ -22930,7 +22797,7 @@
                       <a:tailEnd type="none" w="med" len="med"/>
                     </a:lnB>
                     <a:solidFill>
-                      <a:schemeClr val="bg1"/>
+                      <a:srgbClr val="FFFFFF"/>
                     </a:solidFill>
                   </a:tcPr>
                 </a:tc>
@@ -22947,7 +22814,7 @@
                       <a:r>
                         <a:rPr lang="en-US" sz="1250" dirty="0">
                           <a:solidFill>
-                            <a:schemeClr val="tx1"/>
+                            <a:srgbClr val="212121"/>
                           </a:solidFill>
                         </a:rPr>
                         <a:t>⑥</a:t>
@@ -22993,7 +22860,7 @@
                       <a:tailEnd type="none" w="med" len="med"/>
                     </a:lnB>
                     <a:solidFill>
-                      <a:schemeClr val="bg2"/>
+                      <a:srgbClr val="F2F0EB"/>
                     </a:solidFill>
                   </a:tcPr>
                 </a:tc>
@@ -23008,7 +22875,7 @@
                       <a:r>
                         <a:rPr lang="en-US" sz="1250" dirty="0">
                           <a:solidFill>
-                            <a:schemeClr val="tx1"/>
+                            <a:srgbClr val="212121"/>
                           </a:solidFill>
                         </a:rPr>
                         <a:t>고전 이미지 생성에서의 우위는 미검증</a:t>
@@ -23054,7 +22921,7 @@
                       <a:tailEnd type="none" w="med" len="med"/>
                     </a:lnB>
                     <a:solidFill>
-                      <a:schemeClr val="bg2"/>
+                      <a:srgbClr val="F2F0EB"/>
                     </a:solidFill>
                   </a:tcPr>
                 </a:tc>
@@ -23069,7 +22936,7 @@
                       <a:r>
                         <a:rPr lang="en-US" sz="1250" dirty="0">
                           <a:solidFill>
-                            <a:schemeClr val="tx1"/>
+                            <a:srgbClr val="212121"/>
                           </a:solidFill>
                         </a:rPr>
                         <a:t>양자 생성모델은 양자 데이터·해밀토니안 상태 생성에서 먼저 의미를 가짐</a:t>
@@ -23115,7 +22982,7 @@
                       <a:tailEnd type="none" w="med" len="med"/>
                     </a:lnB>
                     <a:solidFill>
-                      <a:schemeClr val="bg2"/>
+                      <a:srgbClr val="F2F0EB"/>
                     </a:solidFill>
                   </a:tcPr>
                 </a:tc>
@@ -23154,7 +23021,7 @@
             <a:lvl1pPr>
               <a:defRPr sz="1000">
                 <a:solidFill>
-                  <a:schemeClr val="accent6"/>
+                  <a:srgbClr val="6B6B6B"/>
                 </a:solidFill>
               </a:defRPr>
             </a:lvl1pPr>
@@ -23223,7 +23090,7 @@
             <a:r>
               <a:rPr lang="en-US" sz="1200" b="1" spc="100" kern="0" dirty="0">
                 <a:solidFill>
-                  <a:schemeClr val="accent1"/>
+                  <a:srgbClr val="00754A"/>
                 </a:solidFill>
               </a:rPr>
               <a:t>PART 4 · 참고</a:t>
@@ -23261,7 +23128,7 @@
             <a:r>
               <a:rPr lang="en-US" sz="3000" b="1" dirty="0">
                 <a:solidFill>
-                  <a:schemeClr val="tx1"/>
+                  <a:srgbClr val="212121"/>
                 </a:solidFill>
               </a:rPr>
               <a:t>MediQ-GAN 원 논문 결과</a:t>
@@ -23299,7 +23166,7 @@
             <a:r>
               <a:rPr lang="en-US" sz="1400" dirty="0">
                 <a:solidFill>
-                  <a:schemeClr val="accent6"/>
+                  <a:srgbClr val="6B6B6B"/>
                 </a:solidFill>
               </a:rPr>
               <a:t>논문 수치 인용 - 실습의 16×16 결과와 직접 비교하지 않음</a:t>
@@ -23347,7 +23214,7 @@
                       <a:r>
                         <a:rPr lang="en-US" sz="1300" b="1" dirty="0">
                           <a:solidFill>
-                            <a:schemeClr val="bg1"/>
+                            <a:srgbClr val="FFFFFF"/>
                           </a:solidFill>
                         </a:rPr>
                         <a:t>데이터셋</a:t>
@@ -23393,7 +23260,7 @@
                       <a:tailEnd type="none" w="med" len="med"/>
                     </a:lnB>
                     <a:solidFill>
-                      <a:schemeClr val="tx2"/>
+                      <a:srgbClr val="1E3932"/>
                     </a:solidFill>
                   </a:tcPr>
                 </a:tc>
@@ -23408,7 +23275,7 @@
                       <a:r>
                         <a:rPr lang="en-US" sz="1300" b="1" dirty="0">
                           <a:solidFill>
-                            <a:schemeClr val="bg1"/>
+                            <a:srgbClr val="FFFFFF"/>
                           </a:solidFill>
                         </a:rPr>
                         <a:t>내용</a:t>
@@ -23454,7 +23321,7 @@
                       <a:tailEnd type="none" w="med" len="med"/>
                     </a:lnB>
                     <a:solidFill>
-                      <a:schemeClr val="tx2"/>
+                      <a:srgbClr val="1E3932"/>
                     </a:solidFill>
                   </a:tcPr>
                 </a:tc>
@@ -23469,7 +23336,7 @@
                       <a:r>
                         <a:rPr lang="en-US" sz="1300" b="1" dirty="0">
                           <a:solidFill>
-                            <a:schemeClr val="bg1"/>
+                            <a:srgbClr val="FFFFFF"/>
                           </a:solidFill>
                         </a:rPr>
                         <a:t>결과</a:t>
@@ -23515,7 +23382,7 @@
                       <a:tailEnd type="none" w="med" len="med"/>
                     </a:lnB>
                     <a:solidFill>
-                      <a:schemeClr val="tx2"/>
+                      <a:srgbClr val="1E3932"/>
                     </a:solidFill>
                   </a:tcPr>
                 </a:tc>
@@ -23532,7 +23399,7 @@
                       <a:r>
                         <a:rPr lang="en-US" sz="1300" dirty="0">
                           <a:solidFill>
-                            <a:schemeClr val="tx1"/>
+                            <a:srgbClr val="212121"/>
                           </a:solidFill>
                         </a:rPr>
                         <a:t>ISIC 2019</a:t>
@@ -23578,7 +23445,7 @@
                       <a:tailEnd type="none" w="med" len="med"/>
                     </a:lnB>
                     <a:solidFill>
-                      <a:schemeClr val="bg1"/>
+                      <a:srgbClr val="FFFFFF"/>
                     </a:solidFill>
                   </a:tcPr>
                 </a:tc>
@@ -23593,7 +23460,7 @@
                       <a:r>
                         <a:rPr lang="en-US" sz="1300" dirty="0">
                           <a:solidFill>
-                            <a:schemeClr val="tx1"/>
+                            <a:srgbClr val="212121"/>
                           </a:solidFill>
                         </a:rPr>
                         <a:t>피부경검사 8클래스</a:t>
@@ -23639,7 +23506,7 @@
                       <a:tailEnd type="none" w="med" len="med"/>
                     </a:lnB>
                     <a:solidFill>
-                      <a:schemeClr val="bg1"/>
+                      <a:srgbClr val="FFFFFF"/>
                     </a:solidFill>
                   </a:tcPr>
                 </a:tc>
@@ -23654,7 +23521,7 @@
                       <a:r>
                         <a:rPr lang="en-US" sz="1300" dirty="0">
                           <a:solidFill>
-                            <a:schemeClr val="tx1"/>
+                            <a:srgbClr val="212121"/>
                           </a:solidFill>
                         </a:rPr>
                         <a:t>소수클래스(df, vasc, scc)에서 모든 고전 baseline보다 낮은 FID</a:t>
@@ -23700,7 +23567,7 @@
                       <a:tailEnd type="none" w="med" len="med"/>
                     </a:lnB>
                     <a:solidFill>
-                      <a:schemeClr val="bg1"/>
+                      <a:srgbClr val="FFFFFF"/>
                     </a:solidFill>
                   </a:tcPr>
                 </a:tc>
@@ -23717,7 +23584,7 @@
                       <a:r>
                         <a:rPr lang="en-US" sz="1300" dirty="0">
                           <a:solidFill>
-                            <a:schemeClr val="tx1"/>
+                            <a:srgbClr val="212121"/>
                           </a:solidFill>
                         </a:rPr>
                         <a:t>ODIR-5k</a:t>
@@ -23763,7 +23630,7 @@
                       <a:tailEnd type="none" w="med" len="med"/>
                     </a:lnB>
                     <a:solidFill>
-                      <a:schemeClr val="bg2"/>
+                      <a:srgbClr val="F2F0EB"/>
                     </a:solidFill>
                   </a:tcPr>
                 </a:tc>
@@ -23778,7 +23645,7 @@
                       <a:r>
                         <a:rPr lang="en-US" sz="1300" dirty="0">
                           <a:solidFill>
-                            <a:schemeClr val="tx1"/>
+                            <a:srgbClr val="212121"/>
                           </a:solidFill>
                         </a:rPr>
                         <a:t>안저사진</a:t>
@@ -23824,7 +23691,7 @@
                       <a:tailEnd type="none" w="med" len="med"/>
                     </a:lnB>
                     <a:solidFill>
-                      <a:schemeClr val="bg2"/>
+                      <a:srgbClr val="F2F0EB"/>
                     </a:solidFill>
                   </a:tcPr>
                 </a:tc>
@@ -23839,7 +23706,7 @@
                       <a:r>
                         <a:rPr lang="en-US" sz="1300" dirty="0">
                           <a:solidFill>
-                            <a:schemeClr val="tx1"/>
+                            <a:srgbClr val="212121"/>
                           </a:solidFill>
                         </a:rPr>
                         <a:t>증강 후 분류: 두 backbone(EfficientNet-B0, ViT-small) 모두 최고 성능</a:t>
@@ -23885,7 +23752,7 @@
                       <a:tailEnd type="none" w="med" len="med"/>
                     </a:lnB>
                     <a:solidFill>
-                      <a:schemeClr val="bg2"/>
+                      <a:srgbClr val="F2F0EB"/>
                     </a:solidFill>
                   </a:tcPr>
                 </a:tc>
@@ -23902,7 +23769,7 @@
                       <a:r>
                         <a:rPr lang="en-US" sz="1300" dirty="0">
                           <a:solidFill>
-                            <a:schemeClr val="tx1"/>
+                            <a:srgbClr val="212121"/>
                           </a:solidFill>
                         </a:rPr>
                         <a:t>RetinaMNIST</a:t>
@@ -23948,7 +23815,7 @@
                       <a:tailEnd type="none" w="med" len="med"/>
                     </a:lnB>
                     <a:solidFill>
-                      <a:schemeClr val="bg1"/>
+                      <a:srgbClr val="FFFFFF"/>
                     </a:solidFill>
                   </a:tcPr>
                 </a:tc>
@@ -23963,7 +23830,7 @@
                       <a:r>
                         <a:rPr lang="en-US" sz="1300" dirty="0">
                           <a:solidFill>
-                            <a:schemeClr val="tx1"/>
+                            <a:srgbClr val="212121"/>
                           </a:solidFill>
                         </a:rPr>
                         <a:t>다운샘플 안저사진</a:t>
@@ -24009,7 +23876,7 @@
                       <a:tailEnd type="none" w="med" len="med"/>
                     </a:lnB>
                     <a:solidFill>
-                      <a:schemeClr val="bg1"/>
+                      <a:srgbClr val="FFFFFF"/>
                     </a:solidFill>
                   </a:tcPr>
                 </a:tc>
@@ -24024,7 +23891,7 @@
                       <a:r>
                         <a:rPr lang="en-US" sz="1300" dirty="0">
                           <a:solidFill>
-                            <a:schemeClr val="tx1"/>
+                            <a:srgbClr val="212121"/>
                           </a:solidFill>
                         </a:rPr>
                         <a:t>5개 클래스 중 4개에서 최저(최고품질) FID</a:t>
@@ -24070,7 +23937,7 @@
                       <a:tailEnd type="none" w="med" len="med"/>
                     </a:lnB>
                     <a:solidFill>
-                      <a:schemeClr val="bg1"/>
+                      <a:srgbClr val="FFFFFF"/>
                     </a:solidFill>
                   </a:tcPr>
                 </a:tc>
@@ -24109,7 +23976,7 @@
             <a:r>
               <a:rPr lang="en-US" sz="1300" b="1" dirty="0">
                 <a:solidFill>
-                  <a:schemeClr val="accent1"/>
+                  <a:srgbClr val="00754A"/>
                 </a:solidFill>
               </a:rPr>
               <a:t>비교 대상  </a:t>
@@ -24123,7 +23990,7 @@
             <a:r>
               <a:rPr lang="en-US" sz="1300" dirty="0">
                 <a:solidFill>
-                  <a:schemeClr val="tx1"/>
+                  <a:srgbClr val="212121"/>
                 </a:solidFill>
               </a:rPr>
               <a:t>DCGAN, WGAN-GP, Structure-Preserving GAN, StyleGAN2-ADA, FastGAN, DiT · Stable Diffusion 3(LoRA 미세조정), 이전 세대 hybrid 모델 MosaiQ</a:t>
@@ -24140,7 +24007,7 @@
             <a:r>
               <a:rPr lang="en-US" sz="1300" b="1" dirty="0">
                 <a:solidFill>
-                  <a:schemeClr val="accent2"/>
+                  <a:srgbClr val="5B3E8C"/>
                 </a:solidFill>
               </a:rPr>
               <a:t>실기기 검증  </a:t>
@@ -24154,7 +24021,7 @@
             <a:r>
               <a:rPr lang="en-US" sz="1300" dirty="0">
                 <a:solidFill>
-                  <a:schemeClr val="tx1"/>
+                  <a:srgbClr val="212121"/>
                 </a:solidFill>
               </a:rPr>
               <a:t>IBM 양자 장치(ibm_marrakesh)에서 대표 클래스의 추론만 검증 (대기열·shot 제한)</a:t>
@@ -24190,7 +24057,7 @@
             <a:r>
               <a:rPr lang="en-US" sz="900" dirty="0">
                 <a:solidFill>
-                  <a:schemeClr val="accent6"/>
+                  <a:srgbClr val="6B6B6B"/>
                 </a:solidFill>
               </a:rPr>
               <a:t>출처: Jiao et al., MediQ-GAN, arXiv:2506.21015v2, Table 1 · 2</a:t>
@@ -24229,7 +24096,7 @@
             <a:lvl1pPr>
               <a:defRPr sz="1000">
                 <a:solidFill>
-                  <a:schemeClr val="accent6"/>
+                  <a:srgbClr val="6B6B6B"/>
                 </a:solidFill>
               </a:defRPr>
             </a:lvl1pPr>
@@ -24298,10 +24165,10 @@
             <a:r>
               <a:rPr lang="en-US" sz="1200" b="1" spc="100" kern="0" dirty="0">
                 <a:solidFill>
-                  <a:schemeClr val="accent1"/>
+                  <a:srgbClr val="00754A"/>
                 </a:solidFill>
               </a:rPr>
-              <a:t>PART 4 · 정리</a:t>
+              <a:t>정리</a:t>
             </a:r>
             <a:endParaRPr lang="en-US" sz="1200" dirty="0"/>
           </a:p>
@@ -24336,10 +24203,10 @@
             <a:r>
               <a:rPr lang="en-US" sz="3000" b="1" dirty="0">
                 <a:solidFill>
-                  <a:schemeClr val="tx1"/>
+                  <a:srgbClr val="212121"/>
                 </a:solidFill>
               </a:rPr>
-              <a:t>확인 질문</a:t>
+              <a:t>3일차 정리</a:t>
             </a:r>
             <a:endParaRPr lang="en-US" sz="3000" dirty="0"/>
           </a:p>
@@ -24374,122 +24241,1037 @@
             <a:r>
               <a:rPr lang="en-US" sz="1400" dirty="0">
                 <a:solidFill>
-                  <a:schemeClr val="accent6"/>
+                  <a:srgbClr val="6B6B6B"/>
                 </a:solidFill>
               </a:rPr>
-              <a:t>답은 발표자 노트에 있음</a:t>
+              <a:t>MediQ-GAN 구조와 미세조정, QGAN과의 비교</a:t>
             </a:r>
             <a:endParaRPr lang="en-US" sz="1400" dirty="0"/>
           </a:p>
         </p:txBody>
       </p:sp>
-      <p:sp>
-        <p:nvSpPr>
-          <p:cNvPr id="6" name="Text 3"/>
-          <p:cNvSpPr txBox="1"/>
-          <p:nvPr/>
-        </p:nvSpPr>
-        <p:spPr>
-          <a:xfrm>
-            <a:off x="548640" y="2103120"/>
-            <a:ext cx="11064240" cy="3840480"/>
-          </a:xfrm>
-          <a:prstGeom prst="rect">
-            <a:avLst/>
-          </a:prstGeom>
-          <a:noFill/>
-          <a:ln/>
-        </p:spPr>
-        <p:txBody>
-          <a:bodyPr wrap="square" lIns="0" tIns="0" rIns="0" bIns="0" rtlCol="0" anchor="t"/>
-          <a:lstStyle/>
-          <a:p>
-            <a:pPr indent="0" marL="0">
-              <a:lnSpc>
-                <a:spcPct val="200000"/>
-              </a:lnSpc>
-              <a:buNone/>
-            </a:pPr>
-            <a:r>
-              <a:rPr lang="en-US" sz="1700" dirty="0">
-                <a:solidFill>
-                  <a:schemeClr val="tx1"/>
-                </a:solidFill>
-              </a:rPr>
-              <a:t>1.  QGAN과 MediQ-GAN의 hybrid 수준 차이를 '어디까지가 양자인가'로 설명하면</a:t>
-            </a:r>
-            <a:endParaRPr lang="en-US" sz="1700" dirty="0"/>
-          </a:p>
-          <a:p>
-            <a:pPr indent="0" marL="0">
-              <a:lnSpc>
-                <a:spcPct val="200000"/>
-              </a:lnSpc>
-              <a:buNone/>
-            </a:pPr>
-            <a:r>
-              <a:rPr lang="en-US" sz="1700" dirty="0">
-                <a:solidFill>
-                  <a:schemeClr val="tx1"/>
-                </a:solidFill>
-              </a:rPr>
-              <a:t>2.  checkpoint에 가중치뿐 아니라 config를 함께 저장하는 이유는</a:t>
-            </a:r>
-            <a:endParaRPr lang="en-US" sz="1700" dirty="0"/>
-          </a:p>
-          <a:p>
-            <a:pPr indent="0" marL="0">
-              <a:lnSpc>
-                <a:spcPct val="200000"/>
-              </a:lnSpc>
-              <a:buNone/>
-            </a:pPr>
-            <a:r>
-              <a:rPr lang="en-US" sz="1700" dirty="0">
-                <a:solidFill>
-                  <a:schemeClr val="tx1"/>
-                </a:solidFill>
-              </a:rPr>
-              <a:t>3.  MediQ-GAN 양자 회로에 ancilla qubit과 post-selection이 필요 없는 이유는</a:t>
-            </a:r>
-            <a:endParaRPr lang="en-US" sz="1700" dirty="0"/>
-          </a:p>
-          <a:p>
-            <a:pPr indent="0" marL="0">
-              <a:lnSpc>
-                <a:spcPct val="200000"/>
-              </a:lnSpc>
-              <a:buNone/>
-            </a:pPr>
-            <a:r>
-              <a:rPr lang="en-US" sz="1700" dirty="0">
-                <a:solidFill>
-                  <a:schemeClr val="tx1"/>
-                </a:solidFill>
-              </a:rPr>
-              <a:t>4.  MediQ-GAN의 상관계수가 더 높은데도 더 좋은 생성모델이라고 단정할 수 없는 이유는</a:t>
-            </a:r>
-            <a:endParaRPr lang="en-US" sz="1700" dirty="0"/>
-          </a:p>
-          <a:p>
-            <a:pPr indent="0" marL="0">
-              <a:lnSpc>
-                <a:spcPct val="200000"/>
-              </a:lnSpc>
-              <a:buNone/>
-            </a:pPr>
-            <a:r>
-              <a:rPr lang="en-US" sz="1700" dirty="0">
-                <a:solidFill>
-                  <a:schemeClr val="tx1"/>
-                </a:solidFill>
-              </a:rPr>
-              <a:t>5.  학습률을 크게 두거나 BCE 판별자를 쓰면 어떤 문제가 생기고, 원 논문은 어떻게 대응했는가</a:t>
-            </a:r>
-            <a:endParaRPr lang="en-US" sz="1700" dirty="0"/>
-          </a:p>
-        </p:txBody>
-      </p:sp>
+      <p:graphicFrame>
+        <p:nvGraphicFramePr>
+          <p:cNvPr id="24" name="Table 0"/>
+          <p:cNvGraphicFramePr>
+            <a:graphicFrameLocks noGrp="1"/>
+          </p:cNvGraphicFramePr>
+          <p:nvPr>
+            <p:extLst>
+              <p:ext uri="{D42A27DB-BD31-4B8C-83A1-F6EECF244321}">
+                <p14:modId xmlns:p14="http://schemas.microsoft.com/office/powerpoint/2010/main" val="1579011935"/>
+              </p:ext>
+            </p:extLst>
+          </p:nvPr>
+        </p:nvGraphicFramePr>
+        <p:xfrm>
+          <a:off x="548640" y="2057400"/>
+          <a:ext cx="11064240" cy="914400"/>
+        </p:xfrm>
+        <a:graphic>
+          <a:graphicData uri="http://schemas.openxmlformats.org/drawingml/2006/table">
+            <a:tbl>
+              <a:tblPr/>
+              <a:tblGrid>
+                <a:gridCol w="2194560"/>
+                <a:gridCol w="8869680"/>
+              </a:tblGrid>
+              <a:tr h="502920">
+                <a:tc>
+                  <a:txBody>
+                    <a:bodyPr/>
+                    <a:lstStyle/>
+                    <a:p>
+                      <a:pPr indent="0" marL="0">
+                        <a:buNone/>
+                      </a:pPr>
+                      <a:r>
+                        <a:rPr lang="en-US" sz="1300" b="1" dirty="0">
+                          <a:solidFill>
+                            <a:srgbClr val="FFFFFF"/>
+                          </a:solidFill>
+                        </a:rPr>
+                        <a:t>주제</a:t>
+                      </a:r>
+                      <a:endParaRPr lang="en-US" sz="1300" dirty="0"/>
+                    </a:p>
+                  </a:txBody>
+                  <a:tcPr marL="91440" marR="91440" marT="54864" marB="54864" anchor="ctr">
+                    <a:lnL w="6350" cap="flat" cmpd="sng" algn="ctr">
+                      <a:solidFill>
+                        <a:srgbClr val="C9C5BE"/>
+                      </a:solidFill>
+                      <a:prstDash val="solid"/>
+                      <a:round/>
+                      <a:headEnd type="none" w="med" len="med"/>
+                      <a:tailEnd type="none" w="med" len="med"/>
+                    </a:lnL>
+                    <a:lnR w="6350" cap="flat" cmpd="sng" algn="ctr">
+                      <a:solidFill>
+                        <a:srgbClr val="C9C5BE"/>
+                      </a:solidFill>
+                      <a:prstDash val="solid"/>
+                      <a:round/>
+                      <a:headEnd type="none" w="med" len="med"/>
+                      <a:tailEnd type="none" w="med" len="med"/>
+                    </a:lnR>
+                    <a:lnT w="6350" cap="flat" cmpd="sng" algn="ctr">
+                      <a:solidFill>
+                        <a:srgbClr val="C9C5BE"/>
+                      </a:solidFill>
+                      <a:prstDash val="solid"/>
+                      <a:round/>
+                      <a:headEnd type="none" w="med" len="med"/>
+                      <a:tailEnd type="none" w="med" len="med"/>
+                    </a:lnT>
+                    <a:lnB w="6350" cap="flat" cmpd="sng" algn="ctr">
+                      <a:solidFill>
+                        <a:srgbClr val="C9C5BE"/>
+                      </a:solidFill>
+                      <a:prstDash val="solid"/>
+                      <a:round/>
+                      <a:headEnd type="none" w="med" len="med"/>
+                      <a:tailEnd type="none" w="med" len="med"/>
+                    </a:lnB>
+                    <a:solidFill>
+                      <a:srgbClr val="1E3932"/>
+                    </a:solidFill>
+                  </a:tcPr>
+                </a:tc>
+                <a:tc>
+                  <a:txBody>
+                    <a:bodyPr/>
+                    <a:lstStyle/>
+                    <a:p>
+                      <a:pPr indent="0" marL="0">
+                        <a:buNone/>
+                      </a:pPr>
+                      <a:r>
+                        <a:rPr lang="en-US" sz="1300" b="1" dirty="0">
+                          <a:solidFill>
+                            <a:srgbClr val="FFFFFF"/>
+                          </a:solidFill>
+                        </a:rPr>
+                        <a:t>정리</a:t>
+                      </a:r>
+                      <a:endParaRPr lang="en-US" sz="1300" dirty="0"/>
+                    </a:p>
+                  </a:txBody>
+                  <a:tcPr marL="91440" marR="91440" marT="54864" marB="54864" anchor="ctr">
+                    <a:lnL w="6350" cap="flat" cmpd="sng" algn="ctr">
+                      <a:solidFill>
+                        <a:srgbClr val="C9C5BE"/>
+                      </a:solidFill>
+                      <a:prstDash val="solid"/>
+                      <a:round/>
+                      <a:headEnd type="none" w="med" len="med"/>
+                      <a:tailEnd type="none" w="med" len="med"/>
+                    </a:lnL>
+                    <a:lnR w="6350" cap="flat" cmpd="sng" algn="ctr">
+                      <a:solidFill>
+                        <a:srgbClr val="C9C5BE"/>
+                      </a:solidFill>
+                      <a:prstDash val="solid"/>
+                      <a:round/>
+                      <a:headEnd type="none" w="med" len="med"/>
+                      <a:tailEnd type="none" w="med" len="med"/>
+                    </a:lnR>
+                    <a:lnT w="6350" cap="flat" cmpd="sng" algn="ctr">
+                      <a:solidFill>
+                        <a:srgbClr val="C9C5BE"/>
+                      </a:solidFill>
+                      <a:prstDash val="solid"/>
+                      <a:round/>
+                      <a:headEnd type="none" w="med" len="med"/>
+                      <a:tailEnd type="none" w="med" len="med"/>
+                    </a:lnT>
+                    <a:lnB w="6350" cap="flat" cmpd="sng" algn="ctr">
+                      <a:solidFill>
+                        <a:srgbClr val="C9C5BE"/>
+                      </a:solidFill>
+                      <a:prstDash val="solid"/>
+                      <a:round/>
+                      <a:headEnd type="none" w="med" len="med"/>
+                      <a:tailEnd type="none" w="med" len="med"/>
+                    </a:lnB>
+                    <a:solidFill>
+                      <a:srgbClr val="1E3932"/>
+                    </a:solidFill>
+                  </a:tcPr>
+                </a:tc>
+              </a:tr>
+              <a:tr h="502920">
+                <a:tc>
+                  <a:txBody>
+                    <a:bodyPr/>
+                    <a:lstStyle/>
+                    <a:p>
+                      <a:pPr indent="0" marL="0">
+                        <a:buNone/>
+                      </a:pPr>
+                      <a:r>
+                        <a:rPr lang="en-US" sz="1300" b="1" dirty="0">
+                          <a:solidFill>
+                            <a:srgbClr val="212121"/>
+                          </a:solidFill>
+                        </a:rPr>
+                        <a:t>hybrid 수준</a:t>
+                      </a:r>
+                      <a:endParaRPr lang="en-US" sz="1300" dirty="0"/>
+                    </a:p>
+                  </a:txBody>
+                  <a:tcPr marL="91440" marR="91440" marT="54864" marB="54864" anchor="ctr">
+                    <a:lnL w="6350" cap="flat" cmpd="sng" algn="ctr">
+                      <a:solidFill>
+                        <a:srgbClr val="C9C5BE"/>
+                      </a:solidFill>
+                      <a:prstDash val="solid"/>
+                      <a:round/>
+                      <a:headEnd type="none" w="med" len="med"/>
+                      <a:tailEnd type="none" w="med" len="med"/>
+                    </a:lnL>
+                    <a:lnR w="6350" cap="flat" cmpd="sng" algn="ctr">
+                      <a:solidFill>
+                        <a:srgbClr val="C9C5BE"/>
+                      </a:solidFill>
+                      <a:prstDash val="solid"/>
+                      <a:round/>
+                      <a:headEnd type="none" w="med" len="med"/>
+                      <a:tailEnd type="none" w="med" len="med"/>
+                    </a:lnR>
+                    <a:lnT w="6350" cap="flat" cmpd="sng" algn="ctr">
+                      <a:solidFill>
+                        <a:srgbClr val="C9C5BE"/>
+                      </a:solidFill>
+                      <a:prstDash val="solid"/>
+                      <a:round/>
+                      <a:headEnd type="none" w="med" len="med"/>
+                      <a:tailEnd type="none" w="med" len="med"/>
+                    </a:lnT>
+                    <a:lnB w="6350" cap="flat" cmpd="sng" algn="ctr">
+                      <a:solidFill>
+                        <a:srgbClr val="C9C5BE"/>
+                      </a:solidFill>
+                      <a:prstDash val="solid"/>
+                      <a:round/>
+                      <a:headEnd type="none" w="med" len="med"/>
+                      <a:tailEnd type="none" w="med" len="med"/>
+                    </a:lnB>
+                    <a:solidFill>
+                      <a:srgbClr val="FFFFFF"/>
+                    </a:solidFill>
+                  </a:tcPr>
+                </a:tc>
+                <a:tc>
+                  <a:txBody>
+                    <a:bodyPr/>
+                    <a:lstStyle/>
+                    <a:p>
+                      <a:pPr indent="0" marL="0">
+                        <a:buNone/>
+                      </a:pPr>
+                      <a:r>
+                        <a:rPr lang="en-US" sz="1300" dirty="0">
+                          <a:solidFill>
+                            <a:srgbClr val="212121"/>
+                          </a:solidFill>
+                        </a:rPr>
+                        <a:t>QGAN은 생성자 전체가 양자회로(model-level), MediQ-GAN은 생성자 안의 양자 stream만 양자회로(layer-level)</a:t>
+                      </a:r>
+                      <a:endParaRPr lang="en-US" sz="1300" dirty="0"/>
+                    </a:p>
+                  </a:txBody>
+                  <a:tcPr marL="91440" marR="91440" marT="54864" marB="54864" anchor="ctr">
+                    <a:lnL w="6350" cap="flat" cmpd="sng" algn="ctr">
+                      <a:solidFill>
+                        <a:srgbClr val="C9C5BE"/>
+                      </a:solidFill>
+                      <a:prstDash val="solid"/>
+                      <a:round/>
+                      <a:headEnd type="none" w="med" len="med"/>
+                      <a:tailEnd type="none" w="med" len="med"/>
+                    </a:lnL>
+                    <a:lnR w="6350" cap="flat" cmpd="sng" algn="ctr">
+                      <a:solidFill>
+                        <a:srgbClr val="C9C5BE"/>
+                      </a:solidFill>
+                      <a:prstDash val="solid"/>
+                      <a:round/>
+                      <a:headEnd type="none" w="med" len="med"/>
+                      <a:tailEnd type="none" w="med" len="med"/>
+                    </a:lnR>
+                    <a:lnT w="6350" cap="flat" cmpd="sng" algn="ctr">
+                      <a:solidFill>
+                        <a:srgbClr val="C9C5BE"/>
+                      </a:solidFill>
+                      <a:prstDash val="solid"/>
+                      <a:round/>
+                      <a:headEnd type="none" w="med" len="med"/>
+                      <a:tailEnd type="none" w="med" len="med"/>
+                    </a:lnT>
+                    <a:lnB w="6350" cap="flat" cmpd="sng" algn="ctr">
+                      <a:solidFill>
+                        <a:srgbClr val="C9C5BE"/>
+                      </a:solidFill>
+                      <a:prstDash val="solid"/>
+                      <a:round/>
+                      <a:headEnd type="none" w="med" len="med"/>
+                      <a:tailEnd type="none" w="med" len="med"/>
+                    </a:lnB>
+                    <a:solidFill>
+                      <a:srgbClr val="FFFFFF"/>
+                    </a:solidFill>
+                  </a:tcPr>
+                </a:tc>
+              </a:tr>
+              <a:tr h="502920">
+                <a:tc>
+                  <a:txBody>
+                    <a:bodyPr/>
+                    <a:lstStyle/>
+                    <a:p>
+                      <a:pPr indent="0" marL="0">
+                        <a:buNone/>
+                      </a:pPr>
+                      <a:r>
+                        <a:rPr lang="en-US" sz="1300" b="1" dirty="0">
+                          <a:solidFill>
+                            <a:srgbClr val="212121"/>
+                          </a:solidFill>
+                        </a:rPr>
+                        <a:t>dual-stream</a:t>
+                      </a:r>
+                      <a:endParaRPr lang="en-US" sz="1300" dirty="0"/>
+                    </a:p>
+                  </a:txBody>
+                  <a:tcPr marL="91440" marR="91440" marT="54864" marB="54864" anchor="ctr">
+                    <a:lnL w="6350" cap="flat" cmpd="sng" algn="ctr">
+                      <a:solidFill>
+                        <a:srgbClr val="C9C5BE"/>
+                      </a:solidFill>
+                      <a:prstDash val="solid"/>
+                      <a:round/>
+                      <a:headEnd type="none" w="med" len="med"/>
+                      <a:tailEnd type="none" w="med" len="med"/>
+                    </a:lnL>
+                    <a:lnR w="6350" cap="flat" cmpd="sng" algn="ctr">
+                      <a:solidFill>
+                        <a:srgbClr val="C9C5BE"/>
+                      </a:solidFill>
+                      <a:prstDash val="solid"/>
+                      <a:round/>
+                      <a:headEnd type="none" w="med" len="med"/>
+                      <a:tailEnd type="none" w="med" len="med"/>
+                    </a:lnR>
+                    <a:lnT w="6350" cap="flat" cmpd="sng" algn="ctr">
+                      <a:solidFill>
+                        <a:srgbClr val="C9C5BE"/>
+                      </a:solidFill>
+                      <a:prstDash val="solid"/>
+                      <a:round/>
+                      <a:headEnd type="none" w="med" len="med"/>
+                      <a:tailEnd type="none" w="med" len="med"/>
+                    </a:lnT>
+                    <a:lnB w="6350" cap="flat" cmpd="sng" algn="ctr">
+                      <a:solidFill>
+                        <a:srgbClr val="C9C5BE"/>
+                      </a:solidFill>
+                      <a:prstDash val="solid"/>
+                      <a:round/>
+                      <a:headEnd type="none" w="med" len="med"/>
+                      <a:tailEnd type="none" w="med" len="med"/>
+                    </a:lnB>
+                    <a:solidFill>
+                      <a:srgbClr val="F2F0EB"/>
+                    </a:solidFill>
+                  </a:tcPr>
+                </a:tc>
+                <a:tc>
+                  <a:txBody>
+                    <a:bodyPr/>
+                    <a:lstStyle/>
+                    <a:p>
+                      <a:pPr indent="0" marL="0">
+                        <a:buNone/>
+                      </a:pPr>
+                      <a:r>
+                        <a:rPr lang="en-US" sz="1300" dirty="0">
+                          <a:solidFill>
+                            <a:srgbClr val="212121"/>
+                          </a:solidFill>
+                        </a:rPr>
+                        <a:t>잠재벡터 256차원을 절반씩 고전 MLP와 양자 stream으로 나눠 처리한 뒤 concat → decoder → Tanh</a:t>
+                      </a:r>
+                      <a:endParaRPr lang="en-US" sz="1300" dirty="0"/>
+                    </a:p>
+                  </a:txBody>
+                  <a:tcPr marL="91440" marR="91440" marT="54864" marB="54864" anchor="ctr">
+                    <a:lnL w="6350" cap="flat" cmpd="sng" algn="ctr">
+                      <a:solidFill>
+                        <a:srgbClr val="C9C5BE"/>
+                      </a:solidFill>
+                      <a:prstDash val="solid"/>
+                      <a:round/>
+                      <a:headEnd type="none" w="med" len="med"/>
+                      <a:tailEnd type="none" w="med" len="med"/>
+                    </a:lnL>
+                    <a:lnR w="6350" cap="flat" cmpd="sng" algn="ctr">
+                      <a:solidFill>
+                        <a:srgbClr val="C9C5BE"/>
+                      </a:solidFill>
+                      <a:prstDash val="solid"/>
+                      <a:round/>
+                      <a:headEnd type="none" w="med" len="med"/>
+                      <a:tailEnd type="none" w="med" len="med"/>
+                    </a:lnR>
+                    <a:lnT w="6350" cap="flat" cmpd="sng" algn="ctr">
+                      <a:solidFill>
+                        <a:srgbClr val="C9C5BE"/>
+                      </a:solidFill>
+                      <a:prstDash val="solid"/>
+                      <a:round/>
+                      <a:headEnd type="none" w="med" len="med"/>
+                      <a:tailEnd type="none" w="med" len="med"/>
+                    </a:lnT>
+                    <a:lnB w="6350" cap="flat" cmpd="sng" algn="ctr">
+                      <a:solidFill>
+                        <a:srgbClr val="C9C5BE"/>
+                      </a:solidFill>
+                      <a:prstDash val="solid"/>
+                      <a:round/>
+                      <a:headEnd type="none" w="med" len="med"/>
+                      <a:tailEnd type="none" w="med" len="med"/>
+                    </a:lnB>
+                    <a:solidFill>
+                      <a:srgbClr val="F2F0EB"/>
+                    </a:solidFill>
+                  </a:tcPr>
+                </a:tc>
+              </a:tr>
+              <a:tr h="502920">
+                <a:tc>
+                  <a:txBody>
+                    <a:bodyPr/>
+                    <a:lstStyle/>
+                    <a:p>
+                      <a:pPr indent="0" marL="0">
+                        <a:buNone/>
+                      </a:pPr>
+                      <a:r>
+                        <a:rPr lang="en-US" sz="1300" b="1" dirty="0">
+                          <a:solidFill>
+                            <a:srgbClr val="212121"/>
+                          </a:solidFill>
+                        </a:rPr>
+                        <a:t>양자 stream</a:t>
+                      </a:r>
+                      <a:endParaRPr lang="en-US" sz="1300" dirty="0"/>
+                    </a:p>
+                  </a:txBody>
+                  <a:tcPr marL="91440" marR="91440" marT="54864" marB="54864" anchor="ctr">
+                    <a:lnL w="6350" cap="flat" cmpd="sng" algn="ctr">
+                      <a:solidFill>
+                        <a:srgbClr val="C9C5BE"/>
+                      </a:solidFill>
+                      <a:prstDash val="solid"/>
+                      <a:round/>
+                      <a:headEnd type="none" w="med" len="med"/>
+                      <a:tailEnd type="none" w="med" len="med"/>
+                    </a:lnL>
+                    <a:lnR w="6350" cap="flat" cmpd="sng" algn="ctr">
+                      <a:solidFill>
+                        <a:srgbClr val="C9C5BE"/>
+                      </a:solidFill>
+                      <a:prstDash val="solid"/>
+                      <a:round/>
+                      <a:headEnd type="none" w="med" len="med"/>
+                      <a:tailEnd type="none" w="med" len="med"/>
+                    </a:lnR>
+                    <a:lnT w="6350" cap="flat" cmpd="sng" algn="ctr">
+                      <a:solidFill>
+                        <a:srgbClr val="C9C5BE"/>
+                      </a:solidFill>
+                      <a:prstDash val="solid"/>
+                      <a:round/>
+                      <a:headEnd type="none" w="med" len="med"/>
+                      <a:tailEnd type="none" w="med" len="med"/>
+                    </a:lnT>
+                    <a:lnB w="6350" cap="flat" cmpd="sng" algn="ctr">
+                      <a:solidFill>
+                        <a:srgbClr val="C9C5BE"/>
+                      </a:solidFill>
+                      <a:prstDash val="solid"/>
+                      <a:round/>
+                      <a:headEnd type="none" w="med" len="med"/>
+                      <a:tailEnd type="none" w="med" len="med"/>
+                    </a:lnB>
+                    <a:solidFill>
+                      <a:srgbClr val="FFFFFF"/>
+                    </a:solidFill>
+                  </a:tcPr>
+                </a:tc>
+                <a:tc>
+                  <a:txBody>
+                    <a:bodyPr/>
+                    <a:lstStyle/>
+                    <a:p>
+                      <a:pPr indent="0" marL="0">
+                        <a:buNone/>
+                      </a:pPr>
+                      <a:r>
+                        <a:rPr lang="en-US" sz="1300" dirty="0">
+                          <a:solidFill>
+                            <a:srgbClr val="212121"/>
+                          </a:solidFill>
+                        </a:rPr>
+                        <a:t>16큐빗 × depth 8 회로 5개가 16 site 중 5개만 처리. PauliX 기댓값 출력이라 ancilla qubit이 필요 없음</a:t>
+                      </a:r>
+                      <a:endParaRPr lang="en-US" sz="1300" dirty="0"/>
+                    </a:p>
+                  </a:txBody>
+                  <a:tcPr marL="91440" marR="91440" marT="54864" marB="54864" anchor="ctr">
+                    <a:lnL w="6350" cap="flat" cmpd="sng" algn="ctr">
+                      <a:solidFill>
+                        <a:srgbClr val="C9C5BE"/>
+                      </a:solidFill>
+                      <a:prstDash val="solid"/>
+                      <a:round/>
+                      <a:headEnd type="none" w="med" len="med"/>
+                      <a:tailEnd type="none" w="med" len="med"/>
+                    </a:lnL>
+                    <a:lnR w="6350" cap="flat" cmpd="sng" algn="ctr">
+                      <a:solidFill>
+                        <a:srgbClr val="C9C5BE"/>
+                      </a:solidFill>
+                      <a:prstDash val="solid"/>
+                      <a:round/>
+                      <a:headEnd type="none" w="med" len="med"/>
+                      <a:tailEnd type="none" w="med" len="med"/>
+                    </a:lnR>
+                    <a:lnT w="6350" cap="flat" cmpd="sng" algn="ctr">
+                      <a:solidFill>
+                        <a:srgbClr val="C9C5BE"/>
+                      </a:solidFill>
+                      <a:prstDash val="solid"/>
+                      <a:round/>
+                      <a:headEnd type="none" w="med" len="med"/>
+                      <a:tailEnd type="none" w="med" len="med"/>
+                    </a:lnT>
+                    <a:lnB w="6350" cap="flat" cmpd="sng" algn="ctr">
+                      <a:solidFill>
+                        <a:srgbClr val="C9C5BE"/>
+                      </a:solidFill>
+                      <a:prstDash val="solid"/>
+                      <a:round/>
+                      <a:headEnd type="none" w="med" len="med"/>
+                      <a:tailEnd type="none" w="med" len="med"/>
+                    </a:lnB>
+                    <a:solidFill>
+                      <a:srgbClr val="FFFFFF"/>
+                    </a:solidFill>
+                  </a:tcPr>
+                </a:tc>
+              </a:tr>
+              <a:tr h="502920">
+                <a:tc>
+                  <a:txBody>
+                    <a:bodyPr/>
+                    <a:lstStyle/>
+                    <a:p>
+                      <a:pPr indent="0" marL="0">
+                        <a:buNone/>
+                      </a:pPr>
+                      <a:r>
+                        <a:rPr lang="en-US" sz="1300" b="1" dirty="0">
+                          <a:solidFill>
+                            <a:srgbClr val="212121"/>
+                          </a:solidFill>
+                        </a:rPr>
+                        <a:t>파라미터와 비용</a:t>
+                      </a:r>
+                      <a:endParaRPr lang="en-US" sz="1300" dirty="0"/>
+                    </a:p>
+                  </a:txBody>
+                  <a:tcPr marL="91440" marR="91440" marT="54864" marB="54864" anchor="ctr">
+                    <a:lnL w="6350" cap="flat" cmpd="sng" algn="ctr">
+                      <a:solidFill>
+                        <a:srgbClr val="C9C5BE"/>
+                      </a:solidFill>
+                      <a:prstDash val="solid"/>
+                      <a:round/>
+                      <a:headEnd type="none" w="med" len="med"/>
+                      <a:tailEnd type="none" w="med" len="med"/>
+                    </a:lnL>
+                    <a:lnR w="6350" cap="flat" cmpd="sng" algn="ctr">
+                      <a:solidFill>
+                        <a:srgbClr val="C9C5BE"/>
+                      </a:solidFill>
+                      <a:prstDash val="solid"/>
+                      <a:round/>
+                      <a:headEnd type="none" w="med" len="med"/>
+                      <a:tailEnd type="none" w="med" len="med"/>
+                    </a:lnR>
+                    <a:lnT w="6350" cap="flat" cmpd="sng" algn="ctr">
+                      <a:solidFill>
+                        <a:srgbClr val="C9C5BE"/>
+                      </a:solidFill>
+                      <a:prstDash val="solid"/>
+                      <a:round/>
+                      <a:headEnd type="none" w="med" len="med"/>
+                      <a:tailEnd type="none" w="med" len="med"/>
+                    </a:lnT>
+                    <a:lnB w="6350" cap="flat" cmpd="sng" algn="ctr">
+                      <a:solidFill>
+                        <a:srgbClr val="C9C5BE"/>
+                      </a:solidFill>
+                      <a:prstDash val="solid"/>
+                      <a:round/>
+                      <a:headEnd type="none" w="med" len="med"/>
+                      <a:tailEnd type="none" w="med" len="med"/>
+                    </a:lnB>
+                    <a:solidFill>
+                      <a:srgbClr val="F2F0EB"/>
+                    </a:solidFill>
+                  </a:tcPr>
+                </a:tc>
+                <a:tc>
+                  <a:txBody>
+                    <a:bodyPr/>
+                    <a:lstStyle/>
+                    <a:p>
+                      <a:pPr indent="0" marL="0">
+                        <a:buNone/>
+                      </a:pPr>
+                      <a:r>
+                        <a:rPr lang="en-US" sz="1300" dirty="0">
+                          <a:solidFill>
+                            <a:srgbClr val="212121"/>
+                          </a:solidFill>
+                        </a:rPr>
+                        <a:t>30,000개 중 양자 회전각은 640개(2.1%)지만 학습 시간 대부분이 16큐빗 시뮬레이션 (25 epoch 196분)</a:t>
+                      </a:r>
+                      <a:endParaRPr lang="en-US" sz="1300" dirty="0"/>
+                    </a:p>
+                  </a:txBody>
+                  <a:tcPr marL="91440" marR="91440" marT="54864" marB="54864" anchor="ctr">
+                    <a:lnL w="6350" cap="flat" cmpd="sng" algn="ctr">
+                      <a:solidFill>
+                        <a:srgbClr val="C9C5BE"/>
+                      </a:solidFill>
+                      <a:prstDash val="solid"/>
+                      <a:round/>
+                      <a:headEnd type="none" w="med" len="med"/>
+                      <a:tailEnd type="none" w="med" len="med"/>
+                    </a:lnL>
+                    <a:lnR w="6350" cap="flat" cmpd="sng" algn="ctr">
+                      <a:solidFill>
+                        <a:srgbClr val="C9C5BE"/>
+                      </a:solidFill>
+                      <a:prstDash val="solid"/>
+                      <a:round/>
+                      <a:headEnd type="none" w="med" len="med"/>
+                      <a:tailEnd type="none" w="med" len="med"/>
+                    </a:lnR>
+                    <a:lnT w="6350" cap="flat" cmpd="sng" algn="ctr">
+                      <a:solidFill>
+                        <a:srgbClr val="C9C5BE"/>
+                      </a:solidFill>
+                      <a:prstDash val="solid"/>
+                      <a:round/>
+                      <a:headEnd type="none" w="med" len="med"/>
+                      <a:tailEnd type="none" w="med" len="med"/>
+                    </a:lnT>
+                    <a:lnB w="6350" cap="flat" cmpd="sng" algn="ctr">
+                      <a:solidFill>
+                        <a:srgbClr val="C9C5BE"/>
+                      </a:solidFill>
+                      <a:prstDash val="solid"/>
+                      <a:round/>
+                      <a:headEnd type="none" w="med" len="med"/>
+                      <a:tailEnd type="none" w="med" len="med"/>
+                    </a:lnB>
+                    <a:solidFill>
+                      <a:srgbClr val="F2F0EB"/>
+                    </a:solidFill>
+                  </a:tcPr>
+                </a:tc>
+              </a:tr>
+              <a:tr h="502920">
+                <a:tc>
+                  <a:txBody>
+                    <a:bodyPr/>
+                    <a:lstStyle/>
+                    <a:p>
+                      <a:pPr indent="0" marL="0">
+                        <a:buNone/>
+                      </a:pPr>
+                      <a:r>
+                        <a:rPr lang="en-US" sz="1300" b="1" dirty="0">
+                          <a:solidFill>
+                            <a:srgbClr val="212121"/>
+                          </a:solidFill>
+                        </a:rPr>
+                        <a:t>checkpoint와 미세조정</a:t>
+                      </a:r>
+                      <a:endParaRPr lang="en-US" sz="1300" dirty="0"/>
+                    </a:p>
+                  </a:txBody>
+                  <a:tcPr marL="91440" marR="91440" marT="54864" marB="54864" anchor="ctr">
+                    <a:lnL w="6350" cap="flat" cmpd="sng" algn="ctr">
+                      <a:solidFill>
+                        <a:srgbClr val="C9C5BE"/>
+                      </a:solidFill>
+                      <a:prstDash val="solid"/>
+                      <a:round/>
+                      <a:headEnd type="none" w="med" len="med"/>
+                      <a:tailEnd type="none" w="med" len="med"/>
+                    </a:lnL>
+                    <a:lnR w="6350" cap="flat" cmpd="sng" algn="ctr">
+                      <a:solidFill>
+                        <a:srgbClr val="C9C5BE"/>
+                      </a:solidFill>
+                      <a:prstDash val="solid"/>
+                      <a:round/>
+                      <a:headEnd type="none" w="med" len="med"/>
+                      <a:tailEnd type="none" w="med" len="med"/>
+                    </a:lnR>
+                    <a:lnT w="6350" cap="flat" cmpd="sng" algn="ctr">
+                      <a:solidFill>
+                        <a:srgbClr val="C9C5BE"/>
+                      </a:solidFill>
+                      <a:prstDash val="solid"/>
+                      <a:round/>
+                      <a:headEnd type="none" w="med" len="med"/>
+                      <a:tailEnd type="none" w="med" len="med"/>
+                    </a:lnT>
+                    <a:lnB w="6350" cap="flat" cmpd="sng" algn="ctr">
+                      <a:solidFill>
+                        <a:srgbClr val="C9C5BE"/>
+                      </a:solidFill>
+                      <a:prstDash val="solid"/>
+                      <a:round/>
+                      <a:headEnd type="none" w="med" len="med"/>
+                      <a:tailEnd type="none" w="med" len="med"/>
+                    </a:lnB>
+                    <a:solidFill>
+                      <a:srgbClr val="FFFFFF"/>
+                    </a:solidFill>
+                  </a:tcPr>
+                </a:tc>
+                <a:tc>
+                  <a:txBody>
+                    <a:bodyPr/>
+                    <a:lstStyle/>
+                    <a:p>
+                      <a:pPr indent="0" marL="0">
+                        <a:buNone/>
+                      </a:pPr>
+                      <a:r>
+                        <a:rPr lang="en-US" sz="1300" dirty="0">
+                          <a:solidFill>
+                            <a:srgbClr val="212121"/>
+                          </a:solidFill>
+                        </a:rPr>
+                        <a:t>config로 같은 구조를 만든 뒤 가중치를 불러옴. 판별자도 같은 시점 상태로 불러와 20 step 추가 학습</a:t>
+                      </a:r>
+                      <a:endParaRPr lang="en-US" sz="1300" dirty="0"/>
+                    </a:p>
+                  </a:txBody>
+                  <a:tcPr marL="91440" marR="91440" marT="54864" marB="54864" anchor="ctr">
+                    <a:lnL w="6350" cap="flat" cmpd="sng" algn="ctr">
+                      <a:solidFill>
+                        <a:srgbClr val="C9C5BE"/>
+                      </a:solidFill>
+                      <a:prstDash val="solid"/>
+                      <a:round/>
+                      <a:headEnd type="none" w="med" len="med"/>
+                      <a:tailEnd type="none" w="med" len="med"/>
+                    </a:lnL>
+                    <a:lnR w="6350" cap="flat" cmpd="sng" algn="ctr">
+                      <a:solidFill>
+                        <a:srgbClr val="C9C5BE"/>
+                      </a:solidFill>
+                      <a:prstDash val="solid"/>
+                      <a:round/>
+                      <a:headEnd type="none" w="med" len="med"/>
+                      <a:tailEnd type="none" w="med" len="med"/>
+                    </a:lnR>
+                    <a:lnT w="6350" cap="flat" cmpd="sng" algn="ctr">
+                      <a:solidFill>
+                        <a:srgbClr val="C9C5BE"/>
+                      </a:solidFill>
+                      <a:prstDash val="solid"/>
+                      <a:round/>
+                      <a:headEnd type="none" w="med" len="med"/>
+                      <a:tailEnd type="none" w="med" len="med"/>
+                    </a:lnT>
+                    <a:lnB w="6350" cap="flat" cmpd="sng" algn="ctr">
+                      <a:solidFill>
+                        <a:srgbClr val="C9C5BE"/>
+                      </a:solidFill>
+                      <a:prstDash val="solid"/>
+                      <a:round/>
+                      <a:headEnd type="none" w="med" len="med"/>
+                      <a:tailEnd type="none" w="med" len="med"/>
+                    </a:lnB>
+                    <a:solidFill>
+                      <a:srgbClr val="FFFFFF"/>
+                    </a:solidFill>
+                  </a:tcPr>
+                </a:tc>
+              </a:tr>
+              <a:tr h="502920">
+                <a:tc>
+                  <a:txBody>
+                    <a:bodyPr/>
+                    <a:lstStyle/>
+                    <a:p>
+                      <a:pPr indent="0" marL="0">
+                        <a:buNone/>
+                      </a:pPr>
+                      <a:r>
+                        <a:rPr lang="en-US" sz="1300" b="1" dirty="0">
+                          <a:solidFill>
+                            <a:srgbClr val="212121"/>
+                          </a:solidFill>
+                        </a:rPr>
+                        <a:t>학습 안정성</a:t>
+                      </a:r>
+                      <a:endParaRPr lang="en-US" sz="1300" dirty="0"/>
+                    </a:p>
+                  </a:txBody>
+                  <a:tcPr marL="91440" marR="91440" marT="54864" marB="54864" anchor="ctr">
+                    <a:lnL w="6350" cap="flat" cmpd="sng" algn="ctr">
+                      <a:solidFill>
+                        <a:srgbClr val="C9C5BE"/>
+                      </a:solidFill>
+                      <a:prstDash val="solid"/>
+                      <a:round/>
+                      <a:headEnd type="none" w="med" len="med"/>
+                      <a:tailEnd type="none" w="med" len="med"/>
+                    </a:lnL>
+                    <a:lnR w="6350" cap="flat" cmpd="sng" algn="ctr">
+                      <a:solidFill>
+                        <a:srgbClr val="C9C5BE"/>
+                      </a:solidFill>
+                      <a:prstDash val="solid"/>
+                      <a:round/>
+                      <a:headEnd type="none" w="med" len="med"/>
+                      <a:tailEnd type="none" w="med" len="med"/>
+                    </a:lnR>
+                    <a:lnT w="6350" cap="flat" cmpd="sng" algn="ctr">
+                      <a:solidFill>
+                        <a:srgbClr val="C9C5BE"/>
+                      </a:solidFill>
+                      <a:prstDash val="solid"/>
+                      <a:round/>
+                      <a:headEnd type="none" w="med" len="med"/>
+                      <a:tailEnd type="none" w="med" len="med"/>
+                    </a:lnT>
+                    <a:lnB w="6350" cap="flat" cmpd="sng" algn="ctr">
+                      <a:solidFill>
+                        <a:srgbClr val="C9C5BE"/>
+                      </a:solidFill>
+                      <a:prstDash val="solid"/>
+                      <a:round/>
+                      <a:headEnd type="none" w="med" len="med"/>
+                      <a:tailEnd type="none" w="med" len="med"/>
+                    </a:lnB>
+                    <a:solidFill>
+                      <a:srgbClr val="F2F0EB"/>
+                    </a:solidFill>
+                  </a:tcPr>
+                </a:tc>
+                <a:tc>
+                  <a:txBody>
+                    <a:bodyPr/>
+                    <a:lstStyle/>
+                    <a:p>
+                      <a:pPr indent="0" marL="0">
+                        <a:buNone/>
+                      </a:pPr>
+                      <a:r>
+                        <a:rPr lang="en-US" sz="1300" dirty="0">
+                          <a:solidFill>
+                            <a:srgbClr val="212121"/>
+                          </a:solidFill>
+                        </a:rPr>
+                        <a:t>BCE 판별자가 쉽게 이김 (lr_g 0.02에서 3 epoch 만에 mode collapse). 원 논문은 WGAN-GP critic을 씀</a:t>
+                      </a:r>
+                      <a:endParaRPr lang="en-US" sz="1300" dirty="0"/>
+                    </a:p>
+                  </a:txBody>
+                  <a:tcPr marL="91440" marR="91440" marT="54864" marB="54864" anchor="ctr">
+                    <a:lnL w="6350" cap="flat" cmpd="sng" algn="ctr">
+                      <a:solidFill>
+                        <a:srgbClr val="C9C5BE"/>
+                      </a:solidFill>
+                      <a:prstDash val="solid"/>
+                      <a:round/>
+                      <a:headEnd type="none" w="med" len="med"/>
+                      <a:tailEnd type="none" w="med" len="med"/>
+                    </a:lnL>
+                    <a:lnR w="6350" cap="flat" cmpd="sng" algn="ctr">
+                      <a:solidFill>
+                        <a:srgbClr val="C9C5BE"/>
+                      </a:solidFill>
+                      <a:prstDash val="solid"/>
+                      <a:round/>
+                      <a:headEnd type="none" w="med" len="med"/>
+                      <a:tailEnd type="none" w="med" len="med"/>
+                    </a:lnR>
+                    <a:lnT w="6350" cap="flat" cmpd="sng" algn="ctr">
+                      <a:solidFill>
+                        <a:srgbClr val="C9C5BE"/>
+                      </a:solidFill>
+                      <a:prstDash val="solid"/>
+                      <a:round/>
+                      <a:headEnd type="none" w="med" len="med"/>
+                      <a:tailEnd type="none" w="med" len="med"/>
+                    </a:lnT>
+                    <a:lnB w="6350" cap="flat" cmpd="sng" algn="ctr">
+                      <a:solidFill>
+                        <a:srgbClr val="C9C5BE"/>
+                      </a:solidFill>
+                      <a:prstDash val="solid"/>
+                      <a:round/>
+                      <a:headEnd type="none" w="med" len="med"/>
+                      <a:tailEnd type="none" w="med" len="med"/>
+                    </a:lnB>
+                    <a:solidFill>
+                      <a:srgbClr val="F2F0EB"/>
+                    </a:solidFill>
+                  </a:tcPr>
+                </a:tc>
+              </a:tr>
+              <a:tr h="502920">
+                <a:tc>
+                  <a:txBody>
+                    <a:bodyPr/>
+                    <a:lstStyle/>
+                    <a:p>
+                      <a:pPr indent="0" marL="0">
+                        <a:buNone/>
+                      </a:pPr>
+                      <a:r>
+                        <a:rPr lang="en-US" sz="1300" b="1" dirty="0">
+                          <a:solidFill>
+                            <a:srgbClr val="212121"/>
+                          </a:solidFill>
+                        </a:rPr>
+                        <a:t>비교 결과</a:t>
+                      </a:r>
+                      <a:endParaRPr lang="en-US" sz="1300" dirty="0"/>
+                    </a:p>
+                  </a:txBody>
+                  <a:tcPr marL="91440" marR="91440" marT="54864" marB="54864" anchor="ctr">
+                    <a:lnL w="6350" cap="flat" cmpd="sng" algn="ctr">
+                      <a:solidFill>
+                        <a:srgbClr val="C9C5BE"/>
+                      </a:solidFill>
+                      <a:prstDash val="solid"/>
+                      <a:round/>
+                      <a:headEnd type="none" w="med" len="med"/>
+                      <a:tailEnd type="none" w="med" len="med"/>
+                    </a:lnL>
+                    <a:lnR w="6350" cap="flat" cmpd="sng" algn="ctr">
+                      <a:solidFill>
+                        <a:srgbClr val="C9C5BE"/>
+                      </a:solidFill>
+                      <a:prstDash val="solid"/>
+                      <a:round/>
+                      <a:headEnd type="none" w="med" len="med"/>
+                      <a:tailEnd type="none" w="med" len="med"/>
+                    </a:lnR>
+                    <a:lnT w="6350" cap="flat" cmpd="sng" algn="ctr">
+                      <a:solidFill>
+                        <a:srgbClr val="C9C5BE"/>
+                      </a:solidFill>
+                      <a:prstDash val="solid"/>
+                      <a:round/>
+                      <a:headEnd type="none" w="med" len="med"/>
+                      <a:tailEnd type="none" w="med" len="med"/>
+                    </a:lnT>
+                    <a:lnB w="6350" cap="flat" cmpd="sng" algn="ctr">
+                      <a:solidFill>
+                        <a:srgbClr val="C9C5BE"/>
+                      </a:solidFill>
+                      <a:prstDash val="solid"/>
+                      <a:round/>
+                      <a:headEnd type="none" w="med" len="med"/>
+                      <a:tailEnd type="none" w="med" len="med"/>
+                    </a:lnB>
+                    <a:solidFill>
+                      <a:srgbClr val="FFFFFF"/>
+                    </a:solidFill>
+                  </a:tcPr>
+                </a:tc>
+                <a:tc>
+                  <a:txBody>
+                    <a:bodyPr/>
+                    <a:lstStyle/>
+                    <a:p>
+                      <a:pPr indent="0" marL="0">
+                        <a:buNone/>
+                      </a:pPr>
+                      <a:r>
+                        <a:rPr lang="en-US" sz="1300" dirty="0">
+                          <a:solidFill>
+                            <a:srgbClr val="212121"/>
+                          </a:solidFill>
+                        </a:rPr>
+                        <a:t>상관은 MediQ-GAN 0.365 &gt; QGAN 0.195, 다양성은 QGAN 1.92 &gt; MediQ-GAN 0.30. 지표 하나로 순위를 정하지 않음</a:t>
+                      </a:r>
+                      <a:endParaRPr lang="en-US" sz="1300" dirty="0"/>
+                    </a:p>
+                  </a:txBody>
+                  <a:tcPr marL="91440" marR="91440" marT="54864" marB="54864" anchor="ctr">
+                    <a:lnL w="6350" cap="flat" cmpd="sng" algn="ctr">
+                      <a:solidFill>
+                        <a:srgbClr val="C9C5BE"/>
+                      </a:solidFill>
+                      <a:prstDash val="solid"/>
+                      <a:round/>
+                      <a:headEnd type="none" w="med" len="med"/>
+                      <a:tailEnd type="none" w="med" len="med"/>
+                    </a:lnL>
+                    <a:lnR w="6350" cap="flat" cmpd="sng" algn="ctr">
+                      <a:solidFill>
+                        <a:srgbClr val="C9C5BE"/>
+                      </a:solidFill>
+                      <a:prstDash val="solid"/>
+                      <a:round/>
+                      <a:headEnd type="none" w="med" len="med"/>
+                      <a:tailEnd type="none" w="med" len="med"/>
+                    </a:lnR>
+                    <a:lnT w="6350" cap="flat" cmpd="sng" algn="ctr">
+                      <a:solidFill>
+                        <a:srgbClr val="C9C5BE"/>
+                      </a:solidFill>
+                      <a:prstDash val="solid"/>
+                      <a:round/>
+                      <a:headEnd type="none" w="med" len="med"/>
+                      <a:tailEnd type="none" w="med" len="med"/>
+                    </a:lnT>
+                    <a:lnB w="6350" cap="flat" cmpd="sng" algn="ctr">
+                      <a:solidFill>
+                        <a:srgbClr val="C9C5BE"/>
+                      </a:solidFill>
+                      <a:prstDash val="solid"/>
+                      <a:round/>
+                      <a:headEnd type="none" w="med" len="med"/>
+                      <a:tailEnd type="none" w="med" len="med"/>
+                    </a:lnB>
+                    <a:solidFill>
+                      <a:srgbClr val="FFFFFF"/>
+                    </a:solidFill>
+                  </a:tcPr>
+                </a:tc>
+              </a:tr>
+            </a:tbl>
+          </a:graphicData>
+        </a:graphic>
+      </p:graphicFrame>
       <p:sp>
         <p:nvSpPr>
           <p:cNvPr id="25" name="Slide Number Placeholder 0"/>
@@ -24520,7 +25302,7 @@
             <a:lvl1pPr>
               <a:defRPr sz="1000">
                 <a:solidFill>
-                  <a:schemeClr val="accent6"/>
+                  <a:srgbClr val="6B6B6B"/>
                 </a:solidFill>
               </a:defRPr>
             </a:lvl1pPr>
@@ -24530,478 +25312,6 @@
             <a:fld id="{F7021451-1387-4CA6-816F-3879F97B5CBC}" type="slidenum">
               <a:rPr b="0" lang="en-US"/>
               <a:t>23</a:t>
-            </a:fld>
-            <a:endParaRPr lang="en-US"/>
-          </a:p>
-        </p:txBody>
-      </p:sp>
-    </p:spTree>
-  </p:cSld>
-  <p:clrMapOvr>
-    <a:masterClrMapping/>
-  </p:clrMapOvr>
-</p:sld>
-</file>
-
-<file path=ppt/slides/slide24.xml><?xml version="1.0" encoding="utf-8"?>
-<p:sld xmlns:a="http://schemas.openxmlformats.org/drawingml/2006/main" xmlns:r="http://schemas.openxmlformats.org/officeDocument/2006/relationships" xmlns:p="http://schemas.openxmlformats.org/presentationml/2006/main">
-  <p:cSld name="Slide 24">
-    <p:spTree>
-      <p:nvGrpSpPr>
-        <p:cNvPr id="1" name=""/>
-        <p:cNvGrpSpPr/>
-        <p:nvPr/>
-      </p:nvGrpSpPr>
-      <p:grpSpPr>
-        <a:xfrm>
-          <a:off x="0" y="0"/>
-          <a:ext cx="0" cy="0"/>
-          <a:chOff x="0" y="0"/>
-          <a:chExt cx="0" cy="0"/>
-        </a:xfrm>
-      </p:grpSpPr>
-      <p:sp>
-        <p:nvSpPr>
-          <p:cNvPr id="2" name="Text 0"/>
-          <p:cNvSpPr/>
-          <p:nvPr>
-            <p:ph idx="100" type="body" hasCustomPrompt="1"/>
-          </p:nvPr>
-        </p:nvSpPr>
-        <p:spPr>
-          <a:xfrm>
-            <a:off x="822960" y="685800"/>
-            <a:ext cx="7315200" cy="365760"/>
-          </a:xfrm>
-          <a:prstGeom prst="rect">
-            <a:avLst/>
-          </a:prstGeom>
-          <a:noFill/>
-          <a:ln/>
-        </p:spPr>
-        <p:txBody>
-          <a:bodyPr wrap="square" rtlCol="0"/>
-          <a:lstStyle/>
-          <a:p>
-            <a:pPr indent="0" marL="0">
-              <a:buNone/>
-            </a:pPr>
-            <a:r>
-              <a:rPr lang="en-US" sz="1200" b="1" spc="100" kern="0" dirty="0">
-                <a:solidFill>
-                  <a:schemeClr val="accent3"/>
-                </a:solidFill>
-              </a:rPr>
-              <a:t>정리</a:t>
-            </a:r>
-            <a:endParaRPr lang="en-US" sz="1200" dirty="0"/>
-          </a:p>
-        </p:txBody>
-      </p:sp>
-      <p:sp>
-        <p:nvSpPr>
-          <p:cNvPr id="3" name="Text 0"/>
-          <p:cNvSpPr/>
-          <p:nvPr>
-            <p:ph idx="101" type="title" hasCustomPrompt="1"/>
-          </p:nvPr>
-        </p:nvSpPr>
-        <p:spPr>
-          <a:xfrm>
-            <a:off x="822960" y="1051560"/>
-            <a:ext cx="10515600" cy="822960"/>
-          </a:xfrm>
-          <a:prstGeom prst="rect">
-            <a:avLst/>
-          </a:prstGeom>
-          <a:noFill/>
-          <a:ln/>
-        </p:spPr>
-        <p:txBody>
-          <a:bodyPr wrap="square" rtlCol="0"/>
-          <a:lstStyle/>
-          <a:p>
-            <a:pPr algn="l" indent="0" marL="0">
-              <a:buNone/>
-            </a:pPr>
-            <a:r>
-              <a:rPr lang="en-US" sz="3600" b="1" dirty="0">
-                <a:solidFill>
-                  <a:schemeClr val="bg1"/>
-                </a:solidFill>
-              </a:rPr>
-              <a:t>3일 과정 정리</a:t>
-            </a:r>
-            <a:endParaRPr lang="en-US" sz="3600" dirty="0"/>
-          </a:p>
-        </p:txBody>
-      </p:sp>
-      <p:sp>
-        <p:nvSpPr>
-          <p:cNvPr id="4" name="Text 0"/>
-          <p:cNvSpPr/>
-          <p:nvPr>
-            <p:ph idx="102" type="body" hasCustomPrompt="1"/>
-          </p:nvPr>
-        </p:nvSpPr>
-        <p:spPr>
-          <a:xfrm>
-            <a:off x="822960" y="1828800"/>
-            <a:ext cx="10515600" cy="457200"/>
-          </a:xfrm>
-          <a:prstGeom prst="rect">
-            <a:avLst/>
-          </a:prstGeom>
-          <a:noFill/>
-          <a:ln/>
-        </p:spPr>
-        <p:txBody>
-          <a:bodyPr wrap="square" rtlCol="0"/>
-          <a:lstStyle/>
-          <a:p>
-            <a:pPr indent="0" marL="0">
-              <a:buNone/>
-            </a:pPr>
-            <a:r>
-              <a:rPr lang="en-US" sz="1500" dirty="0">
-                <a:solidFill>
-                  <a:schemeClr val="bg2"/>
-                </a:solidFill>
-              </a:rPr>
-              <a:t>같은 데이터·같은 지표로 두 hybrid 전략을 나란히 비교함</a:t>
-            </a:r>
-            <a:endParaRPr lang="en-US" sz="1500" dirty="0"/>
-          </a:p>
-        </p:txBody>
-      </p:sp>
-      <p:sp>
-        <p:nvSpPr>
-          <p:cNvPr id="6" name="Text 3"/>
-          <p:cNvSpPr txBox="1"/>
-          <p:nvPr/>
-        </p:nvSpPr>
-        <p:spPr>
-          <a:xfrm>
-            <a:off x="822960" y="2743200"/>
-            <a:ext cx="2377440" cy="365760"/>
-          </a:xfrm>
-          <a:prstGeom prst="rect">
-            <a:avLst/>
-          </a:prstGeom>
-          <a:noFill/>
-          <a:ln/>
-        </p:spPr>
-        <p:txBody>
-          <a:bodyPr wrap="square" lIns="0" tIns="0" rIns="0" bIns="0" rtlCol="0" anchor="t"/>
-          <a:lstStyle/>
-          <a:p>
-            <a:pPr indent="0" marL="0">
-              <a:buNone/>
-            </a:pPr>
-            <a:r>
-              <a:rPr lang="en-US" sz="1400" b="1" dirty="0">
-                <a:solidFill>
-                  <a:schemeClr val="accent3"/>
-                </a:solidFill>
-              </a:rPr>
-              <a:t>1일차</a:t>
-            </a:r>
-            <a:endParaRPr lang="en-US" sz="1400" dirty="0"/>
-          </a:p>
-        </p:txBody>
-      </p:sp>
-      <p:sp>
-        <p:nvSpPr>
-          <p:cNvPr id="7" name="Text 4"/>
-          <p:cNvSpPr txBox="1"/>
-          <p:nvPr/>
-        </p:nvSpPr>
-        <p:spPr>
-          <a:xfrm>
-            <a:off x="3291840" y="2743200"/>
-            <a:ext cx="8046720" cy="548640"/>
-          </a:xfrm>
-          <a:prstGeom prst="rect">
-            <a:avLst/>
-          </a:prstGeom>
-          <a:noFill/>
-          <a:ln/>
-        </p:spPr>
-        <p:txBody>
-          <a:bodyPr wrap="square" lIns="0" tIns="0" rIns="0" bIns="0" rtlCol="0" anchor="t"/>
-          <a:lstStyle/>
-          <a:p>
-            <a:pPr indent="0" marL="0">
-              <a:buNone/>
-            </a:pPr>
-            <a:r>
-              <a:rPr lang="en-US" sz="1500" dirty="0">
-                <a:solidFill>
-                  <a:schemeClr val="bg1"/>
-                </a:solidFill>
-              </a:rPr>
-              <a:t>데이터셋 · 두 논문 아키텍처 · VQC 학습 방식과 계산 비용</a:t>
-            </a:r>
-            <a:endParaRPr lang="en-US" sz="1500" dirty="0"/>
-          </a:p>
-        </p:txBody>
-      </p:sp>
-      <p:sp>
-        <p:nvSpPr>
-          <p:cNvPr id="8" name="Text 5"/>
-          <p:cNvSpPr txBox="1"/>
-          <p:nvPr/>
-        </p:nvSpPr>
-        <p:spPr>
-          <a:xfrm>
-            <a:off x="822960" y="3520440"/>
-            <a:ext cx="2377440" cy="365760"/>
-          </a:xfrm>
-          <a:prstGeom prst="rect">
-            <a:avLst/>
-          </a:prstGeom>
-          <a:noFill/>
-          <a:ln/>
-        </p:spPr>
-        <p:txBody>
-          <a:bodyPr wrap="square" lIns="0" tIns="0" rIns="0" bIns="0" rtlCol="0" anchor="t"/>
-          <a:lstStyle/>
-          <a:p>
-            <a:pPr indent="0" marL="0">
-              <a:buNone/>
-            </a:pPr>
-            <a:r>
-              <a:rPr lang="en-US" sz="1400" b="1" dirty="0">
-                <a:solidFill>
-                  <a:schemeClr val="accent3"/>
-                </a:solidFill>
-              </a:rPr>
-              <a:t>2일차</a:t>
-            </a:r>
-            <a:endParaRPr lang="en-US" sz="1400" dirty="0"/>
-          </a:p>
-        </p:txBody>
-      </p:sp>
-      <p:sp>
-        <p:nvSpPr>
-          <p:cNvPr id="9" name="Text 6"/>
-          <p:cNvSpPr txBox="1"/>
-          <p:nvPr/>
-        </p:nvSpPr>
-        <p:spPr>
-          <a:xfrm>
-            <a:off x="3291840" y="3520440"/>
-            <a:ext cx="8046720" cy="548640"/>
-          </a:xfrm>
-          <a:prstGeom prst="rect">
-            <a:avLst/>
-          </a:prstGeom>
-          <a:noFill/>
-          <a:ln/>
-        </p:spPr>
-        <p:txBody>
-          <a:bodyPr wrap="square" lIns="0" tIns="0" rIns="0" bIns="0" rtlCol="0" anchor="t"/>
-          <a:lstStyle/>
-          <a:p>
-            <a:pPr indent="0" marL="0">
-              <a:buNone/>
-            </a:pPr>
-            <a:r>
-              <a:rPr lang="en-US" sz="1500" dirty="0">
-                <a:solidFill>
-                  <a:schemeClr val="bg1"/>
-                </a:solidFill>
-              </a:rPr>
-              <a:t>segmentation 전처리 · sub-generator 회로 · QGAN 학습 · 지표 4종</a:t>
-            </a:r>
-            <a:endParaRPr lang="en-US" sz="1500" dirty="0"/>
-          </a:p>
-        </p:txBody>
-      </p:sp>
-      <p:sp>
-        <p:nvSpPr>
-          <p:cNvPr id="10" name="Text 7"/>
-          <p:cNvSpPr txBox="1"/>
-          <p:nvPr/>
-        </p:nvSpPr>
-        <p:spPr>
-          <a:xfrm>
-            <a:off x="822960" y="4297680"/>
-            <a:ext cx="2377440" cy="365760"/>
-          </a:xfrm>
-          <a:prstGeom prst="rect">
-            <a:avLst/>
-          </a:prstGeom>
-          <a:noFill/>
-          <a:ln/>
-        </p:spPr>
-        <p:txBody>
-          <a:bodyPr wrap="square" lIns="0" tIns="0" rIns="0" bIns="0" rtlCol="0" anchor="t"/>
-          <a:lstStyle/>
-          <a:p>
-            <a:pPr indent="0" marL="0">
-              <a:buNone/>
-            </a:pPr>
-            <a:r>
-              <a:rPr lang="en-US" sz="1400" b="1" dirty="0">
-                <a:solidFill>
-                  <a:schemeClr val="accent3"/>
-                </a:solidFill>
-              </a:rPr>
-              <a:t>3일차</a:t>
-            </a:r>
-            <a:endParaRPr lang="en-US" sz="1400" dirty="0"/>
-          </a:p>
-        </p:txBody>
-      </p:sp>
-      <p:sp>
-        <p:nvSpPr>
-          <p:cNvPr id="11" name="Text 8"/>
-          <p:cNvSpPr txBox="1"/>
-          <p:nvPr/>
-        </p:nvSpPr>
-        <p:spPr>
-          <a:xfrm>
-            <a:off x="3291840" y="4297680"/>
-            <a:ext cx="8046720" cy="548640"/>
-          </a:xfrm>
-          <a:prstGeom prst="rect">
-            <a:avLst/>
-          </a:prstGeom>
-          <a:noFill/>
-          <a:ln/>
-        </p:spPr>
-        <p:txBody>
-          <a:bodyPr wrap="square" lIns="0" tIns="0" rIns="0" bIns="0" rtlCol="0" anchor="t"/>
-          <a:lstStyle/>
-          <a:p>
-            <a:pPr indent="0" marL="0">
-              <a:buNone/>
-            </a:pPr>
-            <a:r>
-              <a:rPr lang="en-US" sz="1500" dirty="0">
-                <a:solidFill>
-                  <a:schemeClr val="bg1"/>
-                </a:solidFill>
-              </a:rPr>
-              <a:t>MediQ-GAN 구조 · 미세조정 · QGAN과 같은 지표로 비교</a:t>
-            </a:r>
-            <a:endParaRPr lang="en-US" sz="1500" dirty="0"/>
-          </a:p>
-        </p:txBody>
-      </p:sp>
-      <p:sp>
-        <p:nvSpPr>
-          <p:cNvPr id="12" name="Text 9"/>
-          <p:cNvSpPr txBox="1"/>
-          <p:nvPr/>
-        </p:nvSpPr>
-        <p:spPr>
-          <a:xfrm>
-            <a:off x="822960" y="5074920"/>
-            <a:ext cx="2377440" cy="365760"/>
-          </a:xfrm>
-          <a:prstGeom prst="rect">
-            <a:avLst/>
-          </a:prstGeom>
-          <a:noFill/>
-          <a:ln/>
-        </p:spPr>
-        <p:txBody>
-          <a:bodyPr wrap="square" lIns="0" tIns="0" rIns="0" bIns="0" rtlCol="0" anchor="t"/>
-          <a:lstStyle/>
-          <a:p>
-            <a:pPr indent="0" marL="0">
-              <a:buNone/>
-            </a:pPr>
-            <a:r>
-              <a:rPr lang="en-US" sz="1400" b="1" dirty="0">
-                <a:solidFill>
-                  <a:schemeClr val="accent3"/>
-                </a:solidFill>
-              </a:rPr>
-              <a:t>결론</a:t>
-            </a:r>
-            <a:endParaRPr lang="en-US" sz="1400" dirty="0"/>
-          </a:p>
-        </p:txBody>
-      </p:sp>
-      <p:sp>
-        <p:nvSpPr>
-          <p:cNvPr id="13" name="Text 10"/>
-          <p:cNvSpPr txBox="1"/>
-          <p:nvPr/>
-        </p:nvSpPr>
-        <p:spPr>
-          <a:xfrm>
-            <a:off x="3291840" y="5074920"/>
-            <a:ext cx="8046720" cy="548640"/>
-          </a:xfrm>
-          <a:prstGeom prst="rect">
-            <a:avLst/>
-          </a:prstGeom>
-          <a:noFill/>
-          <a:ln/>
-        </p:spPr>
-        <p:txBody>
-          <a:bodyPr wrap="square" lIns="0" tIns="0" rIns="0" bIns="0" rtlCol="0" anchor="t"/>
-          <a:lstStyle/>
-          <a:p>
-            <a:pPr indent="0" marL="0">
-              <a:buNone/>
-            </a:pPr>
-            <a:r>
-              <a:rPr lang="en-US" sz="1500" dirty="0">
-                <a:solidFill>
-                  <a:schemeClr val="bg1"/>
-                </a:solidFill>
-              </a:rPr>
-              <a:t>형태(상관)와 다양성을 함께 봄 · 양자 비용과 학습 안정화가 결과를 좌우함</a:t>
-            </a:r>
-            <a:endParaRPr lang="en-US" sz="1500" dirty="0"/>
-          </a:p>
-        </p:txBody>
-      </p:sp>
-      <p:sp>
-        <p:nvSpPr>
-          <p:cNvPr id="25" name="Slide Number Placeholder 0"/>
-          <p:cNvSpPr>
-            <a:spLocks noGrp="1"/>
-          </p:cNvSpPr>
-          <p:nvPr>
-            <p:ph type="sldNum" sz="quarter" idx="4294967295"/>
-          </p:nvPr>
-        </p:nvSpPr>
-        <p:spPr>
-          <a:xfrm>
-            <a:off x="5870448" y="6355080"/>
-            <a:ext cx="457200" cy="274320"/>
-          </a:xfrm>
-          <a:prstGeom prst="rect">
-            <a:avLst/>
-          </a:prstGeom>
-          <a:extLst>
-            <a:ext uri="{C572A759-6A51-4108-AA02-DFA0A04FC94B}">
-              <ma14:wrappingTextBoxFlag xmlns:ma14="http://schemas.microsoft.com/office/mac/drawingml/2011/main" val="0"/>
-            </a:ext>
-          </a:extLst>
-        </p:spPr>
-        <p:txBody>
-          <a:bodyPr/>
-          <a:lstStyle>
-            <a:lvl1pPr>
-              <a:defRPr sz="1000">
-                <a:solidFill>
-                  <a:schemeClr val="accent6"/>
-                </a:solidFill>
-              </a:defRPr>
-            </a:lvl1pPr>
-          </a:lstStyle>
-          <a:p>
-            <a:pPr algn="ctr"/>
-            <a:fld id="{F7021451-1387-4CA6-816F-3879F97B5CBC}" type="slidenum">
-              <a:rPr b="0" lang="en-US"/>
-              <a:t>24</a:t>
             </a:fld>
             <a:endParaRPr lang="en-US"/>
           </a:p>
@@ -25061,7 +25371,7 @@
             <a:r>
               <a:rPr lang="en-US" sz="1200" b="1" spc="100" kern="0" dirty="0">
                 <a:solidFill>
-                  <a:schemeClr val="accent3"/>
+                  <a:srgbClr val="DFC49D"/>
                 </a:solidFill>
               </a:rPr>
               <a:t>PART 0 · 노트북 §1 – §2</a:t>
@@ -25099,7 +25409,7 @@
             <a:r>
               <a:rPr lang="en-US" sz="3600" b="1" dirty="0">
                 <a:solidFill>
-                  <a:schemeClr val="bg1"/>
+                  <a:srgbClr val="FFFFFF"/>
                 </a:solidFill>
               </a:rPr>
               <a:t>2일차 복습과 QGAN 기준선</a:t>
@@ -25137,7 +25447,7 @@
             <a:r>
               <a:rPr lang="en-US" sz="1500" dirty="0">
                 <a:solidFill>
-                  <a:schemeClr val="bg2"/>
+                  <a:srgbClr val="F2F0EB"/>
                 </a:solidFill>
               </a:rPr>
               <a:t>2일차에 만든 QGAN을 checkpoint로 불러와 오늘 비교의 기준선으로 씀</a:t>
@@ -25148,7 +25458,7 @@
       </p:sp>
       <p:sp>
         <p:nvSpPr>
-          <p:cNvPr id="6" name="Text 3"/>
+          <p:cNvPr id="5" name="Text 3"/>
           <p:cNvSpPr txBox="1"/>
           <p:nvPr/>
         </p:nvSpPr>
@@ -25173,7 +25483,7 @@
             <a:r>
               <a:rPr lang="en-US" sz="1400" b="1" dirty="0">
                 <a:solidFill>
-                  <a:schemeClr val="accent3"/>
+                  <a:srgbClr val="DFC49D"/>
                 </a:solidFill>
               </a:rPr>
               <a:t>노트북 범위</a:t>
@@ -25184,7 +25494,7 @@
       </p:sp>
       <p:sp>
         <p:nvSpPr>
-          <p:cNvPr id="7" name="Text 4"/>
+          <p:cNvPr id="6" name="Text 4"/>
           <p:cNvSpPr txBox="1"/>
           <p:nvPr/>
         </p:nvSpPr>
@@ -25209,7 +25519,7 @@
             <a:r>
               <a:rPr lang="en-US" sz="1500" dirty="0">
                 <a:solidFill>
-                  <a:schemeClr val="bg1"/>
+                  <a:srgbClr val="FFFFFF"/>
                 </a:solidFill>
               </a:rPr>
               <a:t>§1 실습 자산 로드, §2 QGAN 생성·평가</a:t>
@@ -25220,7 +25530,7 @@
       </p:sp>
       <p:sp>
         <p:nvSpPr>
-          <p:cNvPr id="8" name="Text 5"/>
+          <p:cNvPr id="7" name="Text 5"/>
           <p:cNvSpPr txBox="1"/>
           <p:nvPr/>
         </p:nvSpPr>
@@ -25245,7 +25555,7 @@
             <a:r>
               <a:rPr lang="en-US" sz="1400" b="1" dirty="0">
                 <a:solidFill>
-                  <a:schemeClr val="accent3"/>
+                  <a:srgbClr val="DFC49D"/>
                 </a:solidFill>
               </a:rPr>
               <a:t>다루는 코드</a:t>
@@ -25256,7 +25566,7 @@
       </p:sp>
       <p:sp>
         <p:nvSpPr>
-          <p:cNvPr id="9" name="Text 6"/>
+          <p:cNvPr id="8" name="Text 6"/>
           <p:cNvSpPr txBox="1"/>
           <p:nvPr/>
         </p:nvSpPr>
@@ -25281,7 +25591,7 @@
             <a:r>
               <a:rPr lang="en-US" sz="1500" dirty="0">
                 <a:solidFill>
-                  <a:schemeClr val="bg1"/>
+                  <a:srgbClr val="FFFFFF"/>
                 </a:solidFill>
               </a:rPr>
               <a:t>torch.load · PatchQuantumGenerator(**config) · gm.evaluate</a:t>
@@ -25320,7 +25630,7 @@
             <a:lvl1pPr>
               <a:defRPr sz="1000">
                 <a:solidFill>
-                  <a:schemeClr val="accent6"/>
+                  <a:srgbClr val="6B6B6B"/>
                 </a:solidFill>
               </a:defRPr>
             </a:lvl1pPr>
@@ -25389,7 +25699,7 @@
             <a:r>
               <a:rPr lang="en-US" sz="1200" b="1" spc="100" kern="0" dirty="0">
                 <a:solidFill>
-                  <a:schemeClr val="accent1"/>
+                  <a:srgbClr val="00754A"/>
                 </a:solidFill>
               </a:rPr>
               <a:t>PART 0 · 2일차 복습</a:t>
@@ -25427,7 +25737,7 @@
             <a:r>
               <a:rPr lang="en-US" sz="3000" b="1" dirty="0">
                 <a:solidFill>
-                  <a:schemeClr val="tx1"/>
+                  <a:srgbClr val="212121"/>
                 </a:solidFill>
               </a:rPr>
               <a:t>2일차 구성과 3일차에서 바뀌는 부분</a:t>
@@ -25465,7 +25775,7 @@
             <a:r>
               <a:rPr lang="en-US" sz="1400" dirty="0">
                 <a:solidFill>
-                  <a:schemeClr val="accent6"/>
+                  <a:srgbClr val="6B6B6B"/>
                 </a:solidFill>
               </a:rPr>
               <a:t>생성자만 MediQ-GAN으로 바꾸고, 데이터·판별자·지표는 2일차 그대로 씀</a:t>
@@ -25513,7 +25823,7 @@
                       <a:r>
                         <a:rPr lang="en-US" sz="1300" b="1" dirty="0">
                           <a:solidFill>
-                            <a:schemeClr val="bg1"/>
+                            <a:srgbClr val="FFFFFF"/>
                           </a:solidFill>
                         </a:rPr>
                         <a:t>항목</a:t>
@@ -25559,7 +25869,7 @@
                       <a:tailEnd type="none" w="med" len="med"/>
                     </a:lnB>
                     <a:solidFill>
-                      <a:schemeClr val="tx2"/>
+                      <a:srgbClr val="1E3932"/>
                     </a:solidFill>
                   </a:tcPr>
                 </a:tc>
@@ -25574,7 +25884,7 @@
                       <a:r>
                         <a:rPr lang="en-US" sz="1300" b="1" dirty="0">
                           <a:solidFill>
-                            <a:schemeClr val="bg1"/>
+                            <a:srgbClr val="FFFFFF"/>
                           </a:solidFill>
                         </a:rPr>
                         <a:t>2일차 (QGAN)</a:t>
@@ -25620,7 +25930,7 @@
                       <a:tailEnd type="none" w="med" len="med"/>
                     </a:lnB>
                     <a:solidFill>
-                      <a:schemeClr val="tx2"/>
+                      <a:srgbClr val="1E3932"/>
                     </a:solidFill>
                   </a:tcPr>
                 </a:tc>
@@ -25635,7 +25945,7 @@
                       <a:r>
                         <a:rPr lang="en-US" sz="1300" b="1" dirty="0">
                           <a:solidFill>
-                            <a:schemeClr val="bg1"/>
+                            <a:srgbClr val="FFFFFF"/>
                           </a:solidFill>
                         </a:rPr>
                         <a:t>3일차 (MediQ-GAN)</a:t>
@@ -25681,7 +25991,7 @@
                       <a:tailEnd type="none" w="med" len="med"/>
                     </a:lnB>
                     <a:solidFill>
-                      <a:schemeClr val="tx2"/>
+                      <a:srgbClr val="1E3932"/>
                     </a:solidFill>
                   </a:tcPr>
                 </a:tc>
@@ -25698,7 +26008,7 @@
                       <a:r>
                         <a:rPr lang="en-US" sz="1300" dirty="0">
                           <a:solidFill>
-                            <a:schemeClr val="tx1"/>
+                            <a:srgbClr val="212121"/>
                           </a:solidFill>
                         </a:rPr>
                         <a:t>데이터</a:t>
@@ -25744,7 +26054,7 @@
                       <a:tailEnd type="none" w="med" len="med"/>
                     </a:lnB>
                     <a:solidFill>
-                      <a:schemeClr val="bg1"/>
+                      <a:srgbClr val="FFFFFF"/>
                     </a:solidFill>
                   </a:tcPr>
                 </a:tc>
@@ -25759,7 +26069,7 @@
                       <a:r>
                         <a:rPr lang="en-US" sz="1300" dirty="0">
                           <a:solidFill>
-                            <a:schemeClr val="tx1"/>
+                            <a:srgbClr val="212121"/>
                           </a:solidFill>
                         </a:rPr>
                         <a:t>DF 115장, segmentation 후 16×16, 0 ~ 1</a:t>
@@ -25805,7 +26115,7 @@
                       <a:tailEnd type="none" w="med" len="med"/>
                     </a:lnB>
                     <a:solidFill>
-                      <a:schemeClr val="bg1"/>
+                      <a:srgbClr val="FFFFFF"/>
                     </a:solidFill>
                   </a:tcPr>
                 </a:tc>
@@ -25820,7 +26130,7 @@
                       <a:r>
                         <a:rPr lang="en-US" sz="1300" dirty="0">
                           <a:solidFill>
-                            <a:schemeClr val="accent6"/>
+                            <a:srgbClr val="6B6B6B"/>
                           </a:solidFill>
                         </a:rPr>
                         <a:t>2일차와 같음</a:t>
@@ -25866,7 +26176,7 @@
                       <a:tailEnd type="none" w="med" len="med"/>
                     </a:lnB>
                     <a:solidFill>
-                      <a:schemeClr val="bg1"/>
+                      <a:srgbClr val="FFFFFF"/>
                     </a:solidFill>
                   </a:tcPr>
                 </a:tc>
@@ -25883,7 +26193,7 @@
                       <a:r>
                         <a:rPr lang="en-US" sz="1300" b="1" dirty="0">
                           <a:solidFill>
-                            <a:schemeClr val="tx1"/>
+                            <a:srgbClr val="212121"/>
                           </a:solidFill>
                         </a:rPr>
                         <a:t>생성자</a:t>
@@ -25929,7 +26239,7 @@
                       <a:tailEnd type="none" w="med" len="med"/>
                     </a:lnB>
                     <a:solidFill>
-                      <a:schemeClr val="bg2"/>
+                      <a:srgbClr val="F2F0EB"/>
                     </a:solidFill>
                   </a:tcPr>
                 </a:tc>
@@ -25944,7 +26254,7 @@
                       <a:r>
                         <a:rPr lang="en-US" sz="1300" b="1" dirty="0">
                           <a:solidFill>
-                            <a:schemeClr val="tx1"/>
+                            <a:srgbClr val="212121"/>
                           </a:solidFill>
                         </a:rPr>
                         <a:t>sub-generator 4개 × 7큐빗, depth 10 - 생성자 전체가 양자회로</a:t>
@@ -25990,7 +26300,7 @@
                       <a:tailEnd type="none" w="med" len="med"/>
                     </a:lnB>
                     <a:solidFill>
-                      <a:schemeClr val="bg2"/>
+                      <a:srgbClr val="F2F0EB"/>
                     </a:solidFill>
                   </a:tcPr>
                 </a:tc>
@@ -26005,7 +26315,7 @@
                       <a:r>
                         <a:rPr lang="en-US" sz="1300" b="1" dirty="0">
                           <a:solidFill>
-                            <a:schemeClr val="accent2"/>
+                            <a:srgbClr val="5B3E8C"/>
                           </a:solidFill>
                         </a:rPr>
                         <a:t>고전 stream + 양자 stream(16큐빗 × 5, depth 8)</a:t>
@@ -26051,7 +26361,7 @@
                       <a:tailEnd type="none" w="med" len="med"/>
                     </a:lnB>
                     <a:solidFill>
-                      <a:schemeClr val="bg2"/>
+                      <a:srgbClr val="F2F0EB"/>
                     </a:solidFill>
                   </a:tcPr>
                 </a:tc>
@@ -26068,7 +26378,7 @@
                       <a:r>
                         <a:rPr lang="en-US" sz="1300" dirty="0">
                           <a:solidFill>
-                            <a:schemeClr val="tx1"/>
+                            <a:srgbClr val="212121"/>
                           </a:solidFill>
                         </a:rPr>
                         <a:t>출력 척도</a:t>
@@ -26114,7 +26424,7 @@
                       <a:tailEnd type="none" w="med" len="med"/>
                     </a:lnB>
                     <a:solidFill>
-                      <a:schemeClr val="bg1"/>
+                      <a:srgbClr val="FFFFFF"/>
                     </a:solidFill>
                   </a:tcPr>
                 </a:tc>
@@ -26129,7 +26439,7 @@
                       <a:r>
                         <a:rPr lang="en-US" sz="1300" dirty="0">
                           <a:solidFill>
-                            <a:schemeClr val="tx1"/>
+                            <a:srgbClr val="212121"/>
                           </a:solidFill>
                         </a:rPr>
                         <a:t>측정 확률 (patch별 합 0 ~ 1)</a:t>
@@ -26175,7 +26485,7 @@
                       <a:tailEnd type="none" w="med" len="med"/>
                     </a:lnB>
                     <a:solidFill>
-                      <a:schemeClr val="bg1"/>
+                      <a:srgbClr val="FFFFFF"/>
                     </a:solidFill>
                   </a:tcPr>
                 </a:tc>
@@ -26190,7 +26500,7 @@
                       <a:r>
                         <a:rPr lang="en-US" sz="1300" dirty="0">
                           <a:solidFill>
-                            <a:schemeClr val="tx1"/>
+                            <a:srgbClr val="212121"/>
                           </a:solidFill>
                         </a:rPr>
                         <a:t>Tanh (-1 ~ 1)</a:t>
@@ -26236,7 +26546,7 @@
                       <a:tailEnd type="none" w="med" len="med"/>
                     </a:lnB>
                     <a:solidFill>
-                      <a:schemeClr val="bg1"/>
+                      <a:srgbClr val="FFFFFF"/>
                     </a:solidFill>
                   </a:tcPr>
                 </a:tc>
@@ -26253,7 +26563,7 @@
                       <a:r>
                         <a:rPr lang="en-US" sz="1300" dirty="0">
                           <a:solidFill>
-                            <a:schemeClr val="tx1"/>
+                            <a:srgbClr val="212121"/>
                           </a:solidFill>
                         </a:rPr>
                         <a:t>판별자</a:t>
@@ -26299,7 +26609,7 @@
                       <a:tailEnd type="none" w="med" len="med"/>
                     </a:lnB>
                     <a:solidFill>
-                      <a:schemeClr val="bg2"/>
+                      <a:srgbClr val="F2F0EB"/>
                     </a:solidFill>
                   </a:tcPr>
                 </a:tc>
@@ -26314,7 +26624,7 @@
                       <a:r>
                         <a:rPr lang="en-US" sz="1300" dirty="0">
                           <a:solidFill>
-                            <a:schemeClr val="tx1"/>
+                            <a:srgbClr val="212121"/>
                           </a:solidFill>
                         </a:rPr>
                         <a:t>5층 FC (논문 Table 4)</a:t>
@@ -26360,7 +26670,7 @@
                       <a:tailEnd type="none" w="med" len="med"/>
                     </a:lnB>
                     <a:solidFill>
-                      <a:schemeClr val="bg2"/>
+                      <a:srgbClr val="F2F0EB"/>
                     </a:solidFill>
                   </a:tcPr>
                 </a:tc>
@@ -26375,7 +26685,7 @@
                       <a:r>
                         <a:rPr lang="en-US" sz="1300" dirty="0">
                           <a:solidFill>
-                            <a:schemeClr val="accent6"/>
+                            <a:srgbClr val="6B6B6B"/>
                           </a:solidFill>
                         </a:rPr>
                         <a:t>2일차와 같음</a:t>
@@ -26421,7 +26731,7 @@
                       <a:tailEnd type="none" w="med" len="med"/>
                     </a:lnB>
                     <a:solidFill>
-                      <a:schemeClr val="bg2"/>
+                      <a:srgbClr val="F2F0EB"/>
                     </a:solidFill>
                   </a:tcPr>
                 </a:tc>
@@ -26438,7 +26748,7 @@
                       <a:r>
                         <a:rPr lang="en-US" sz="1300" dirty="0">
                           <a:solidFill>
-                            <a:schemeClr val="tx1"/>
+                            <a:srgbClr val="212121"/>
                           </a:solidFill>
                         </a:rPr>
                         <a:t>지표</a:t>
@@ -26484,7 +26794,7 @@
                       <a:tailEnd type="none" w="med" len="med"/>
                     </a:lnB>
                     <a:solidFill>
-                      <a:schemeClr val="bg1"/>
+                      <a:srgbClr val="FFFFFF"/>
                     </a:solidFill>
                   </a:tcPr>
                 </a:tc>
@@ -26499,7 +26809,7 @@
                       <a:r>
                         <a:rPr lang="en-US" sz="1300" dirty="0">
                           <a:solidFill>
-                            <a:schemeClr val="tx1"/>
+                            <a:srgbClr val="212121"/>
                           </a:solidFill>
                         </a:rPr>
                         <a:t>상관 · 최근접 거리 · 다양성 · 픽셀 분포</a:t>
@@ -26545,7 +26855,7 @@
                       <a:tailEnd type="none" w="med" len="med"/>
                     </a:lnB>
                     <a:solidFill>
-                      <a:schemeClr val="bg1"/>
+                      <a:srgbClr val="FFFFFF"/>
                     </a:solidFill>
                   </a:tcPr>
                 </a:tc>
@@ -26560,7 +26870,7 @@
                       <a:r>
                         <a:rPr lang="en-US" sz="1300" dirty="0">
                           <a:solidFill>
-                            <a:schemeClr val="accent6"/>
+                            <a:srgbClr val="6B6B6B"/>
                           </a:solidFill>
                         </a:rPr>
                         <a:t>2일차와 같음</a:t>
@@ -26606,7 +26916,7 @@
                       <a:tailEnd type="none" w="med" len="med"/>
                     </a:lnB>
                     <a:solidFill>
-                      <a:schemeClr val="bg1"/>
+                      <a:srgbClr val="FFFFFF"/>
                     </a:solidFill>
                   </a:tcPr>
                 </a:tc>
@@ -26623,7 +26933,7 @@
                       <a:r>
                         <a:rPr lang="en-US" sz="1300" dirty="0">
                           <a:solidFill>
-                            <a:schemeClr val="tx1"/>
+                            <a:srgbClr val="212121"/>
                           </a:solidFill>
                         </a:rPr>
                         <a:t>학습량</a:t>
@@ -26669,7 +26979,7 @@
                       <a:tailEnd type="none" w="med" len="med"/>
                     </a:lnB>
                     <a:solidFill>
-                      <a:schemeClr val="bg2"/>
+                      <a:srgbClr val="F2F0EB"/>
                     </a:solidFill>
                   </a:tcPr>
                 </a:tc>
@@ -26684,7 +26994,7 @@
                       <a:r>
                         <a:rPr lang="en-US" sz="1300" dirty="0">
                           <a:solidFill>
-                            <a:schemeClr val="tx1"/>
+                            <a:srgbClr val="212121"/>
                           </a:solidFill>
                         </a:rPr>
                         <a:t>수업 중 400 step, 강사 checkpoint 600 step</a:t>
@@ -26730,7 +27040,7 @@
                       <a:tailEnd type="none" w="med" len="med"/>
                     </a:lnB>
                     <a:solidFill>
-                      <a:schemeClr val="bg2"/>
+                      <a:srgbClr val="F2F0EB"/>
                     </a:solidFill>
                   </a:tcPr>
                 </a:tc>
@@ -26745,7 +27055,7 @@
                       <a:r>
                         <a:rPr lang="en-US" sz="1300" dirty="0">
                           <a:solidFill>
-                            <a:schemeClr val="tx1"/>
+                            <a:srgbClr val="212121"/>
                           </a:solidFill>
                         </a:rPr>
                         <a:t>사전학습 25 epoch, 수업 중 20 step 미세조정</a:t>
@@ -26791,7 +27101,7 @@
                       <a:tailEnd type="none" w="med" len="med"/>
                     </a:lnB>
                     <a:solidFill>
-                      <a:schemeClr val="bg2"/>
+                      <a:srgbClr val="F2F0EB"/>
                     </a:solidFill>
                   </a:tcPr>
                 </a:tc>
@@ -26830,7 +27140,7 @@
             <a:lvl1pPr>
               <a:defRPr sz="1000">
                 <a:solidFill>
-                  <a:schemeClr val="accent6"/>
+                  <a:srgbClr val="6B6B6B"/>
                 </a:solidFill>
               </a:defRPr>
             </a:lvl1pPr>
@@ -26899,7 +27209,7 @@
             <a:r>
               <a:rPr lang="en-US" sz="1200" b="1" spc="100" kern="0" dirty="0">
                 <a:solidFill>
-                  <a:schemeClr val="accent1"/>
+                  <a:srgbClr val="00754A"/>
                 </a:solidFill>
               </a:rPr>
               <a:t>PART 0 · 노트북 §2 코드</a:t>
@@ -26937,7 +27247,7 @@
             <a:r>
               <a:rPr lang="en-US" sz="3000" b="1" dirty="0">
                 <a:solidFill>
-                  <a:schemeClr val="tx1"/>
+                  <a:srgbClr val="212121"/>
                 </a:solidFill>
               </a:rPr>
               <a:t>checkpoint 불러오기</a:t>
@@ -26975,7 +27285,7 @@
             <a:r>
               <a:rPr lang="en-US" sz="1400" dirty="0">
                 <a:solidFill>
-                  <a:schemeClr val="accent6"/>
+                  <a:srgbClr val="6B6B6B"/>
                 </a:solidFill>
               </a:rPr>
               <a:t>config로 같은 구조를 먼저 만들고, 학습된 가중치를 덮어씀</a:t>
@@ -27001,7 +27311,7 @@
             </a:avLst>
           </a:prstGeom>
           <a:solidFill>
-            <a:schemeClr val="tx2"/>
+            <a:srgbClr val="1E3932"/>
           </a:solidFill>
           <a:ln/>
         </p:spPr>
@@ -27036,7 +27346,7 @@
             <a:r>
               <a:rPr lang="en-US" sz="1200" dirty="0">
                 <a:solidFill>
-                  <a:schemeClr val="bg2"/>
+                  <a:srgbClr val="F2F0EB"/>
                 </a:solidFill>
                 <a:latin typeface="Courier New" pitchFamily="34" charset="0"/>
                 <a:ea typeface="Courier New" pitchFamily="34" charset="-122"/>
@@ -27056,7 +27366,7 @@
             <a:r>
               <a:rPr lang="en-US" sz="1200" b="1" dirty="0">
                 <a:solidFill>
-                  <a:schemeClr val="accent3"/>
+                  <a:srgbClr val="DFC49D"/>
                 </a:solidFill>
                 <a:latin typeface="Courier New" pitchFamily="34" charset="0"/>
                 <a:ea typeface="Courier New" pitchFamily="34" charset="-122"/>
@@ -27076,7 +27386,7 @@
             <a:r>
               <a:rPr lang="en-US" sz="1200" dirty="0">
                 <a:solidFill>
-                  <a:schemeClr val="bg2"/>
+                  <a:srgbClr val="F2F0EB"/>
                 </a:solidFill>
                 <a:latin typeface="Courier New" pitchFamily="34" charset="0"/>
                 <a:ea typeface="Courier New" pitchFamily="34" charset="-122"/>
@@ -27096,7 +27406,7 @@
             <a:r>
               <a:rPr lang="en-US" sz="1200" dirty="0">
                 <a:solidFill>
-                  <a:schemeClr val="bg2"/>
+                  <a:srgbClr val="F2F0EB"/>
                 </a:solidFill>
                 <a:latin typeface="Courier New" pitchFamily="34" charset="0"/>
                 <a:ea typeface="Courier New" pitchFamily="34" charset="-122"/>
@@ -27116,7 +27426,7 @@
             <a:r>
               <a:rPr lang="en-US" sz="1200" b="1" dirty="0">
                 <a:solidFill>
-                  <a:schemeClr val="accent3"/>
+                  <a:srgbClr val="DFC49D"/>
                 </a:solidFill>
                 <a:latin typeface="Courier New" pitchFamily="34" charset="0"/>
                 <a:ea typeface="Courier New" pitchFamily="34" charset="-122"/>
@@ -27136,7 +27446,7 @@
             <a:r>
               <a:rPr lang="en-US" sz="1200" dirty="0">
                 <a:solidFill>
-                  <a:schemeClr val="bg2"/>
+                  <a:srgbClr val="F2F0EB"/>
                 </a:solidFill>
                 <a:latin typeface="Courier New" pitchFamily="34" charset="0"/>
                 <a:ea typeface="Courier New" pitchFamily="34" charset="-122"/>
@@ -27156,7 +27466,7 @@
             <a:r>
               <a:rPr lang="en-US" sz="1200" dirty="0">
                 <a:solidFill>
-                  <a:schemeClr val="bg2"/>
+                  <a:srgbClr val="F2F0EB"/>
                 </a:solidFill>
                 <a:latin typeface="Courier New" pitchFamily="34" charset="0"/>
                 <a:ea typeface="Courier New" pitchFamily="34" charset="-122"/>
@@ -27176,7 +27486,7 @@
             <a:r>
               <a:rPr lang="en-US" sz="1200" dirty="0">
                 <a:solidFill>
-                  <a:schemeClr val="bg2"/>
+                  <a:srgbClr val="F2F0EB"/>
                 </a:solidFill>
                 <a:latin typeface="Courier New" pitchFamily="34" charset="0"/>
                 <a:ea typeface="Courier New" pitchFamily="34" charset="-122"/>
@@ -27196,7 +27506,7 @@
             <a:r>
               <a:rPr lang="en-US" sz="1200" b="1" dirty="0">
                 <a:solidFill>
-                  <a:schemeClr val="accent3"/>
+                  <a:srgbClr val="DFC49D"/>
                 </a:solidFill>
                 <a:latin typeface="Courier New" pitchFamily="34" charset="0"/>
                 <a:ea typeface="Courier New" pitchFamily="34" charset="-122"/>
@@ -27216,7 +27526,7 @@
             <a:r>
               <a:rPr lang="en-US" sz="1200" dirty="0">
                 <a:solidFill>
-                  <a:schemeClr val="bg2"/>
+                  <a:srgbClr val="F2F0EB"/>
                 </a:solidFill>
                 <a:latin typeface="Courier New" pitchFamily="34" charset="0"/>
                 <a:ea typeface="Courier New" pitchFamily="34" charset="-122"/>
@@ -27266,7 +27576,7 @@
                       <a:r>
                         <a:rPr lang="en-US" sz="1200" b="1" dirty="0">
                           <a:solidFill>
-                            <a:schemeClr val="bg1"/>
+                            <a:srgbClr val="FFFFFF"/>
                           </a:solidFill>
                         </a:rPr>
                         <a:t>checkpoint 키</a:t>
@@ -27312,7 +27622,7 @@
                       <a:tailEnd type="none" w="med" len="med"/>
                     </a:lnB>
                     <a:solidFill>
-                      <a:schemeClr val="tx2"/>
+                      <a:srgbClr val="1E3932"/>
                     </a:solidFill>
                   </a:tcPr>
                 </a:tc>
@@ -27327,7 +27637,7 @@
                       <a:r>
                         <a:rPr lang="en-US" sz="1200" b="1" dirty="0">
                           <a:solidFill>
-                            <a:schemeClr val="bg1"/>
+                            <a:srgbClr val="FFFFFF"/>
                           </a:solidFill>
                         </a:rPr>
                         <a:t>내용</a:t>
@@ -27373,7 +27683,7 @@
                       <a:tailEnd type="none" w="med" len="med"/>
                     </a:lnB>
                     <a:solidFill>
-                      <a:schemeClr val="tx2"/>
+                      <a:srgbClr val="1E3932"/>
                     </a:solidFill>
                   </a:tcPr>
                 </a:tc>
@@ -27390,7 +27700,7 @@
                       <a:r>
                         <a:rPr lang="en-US" sz="1200" dirty="0">
                           <a:solidFill>
-                            <a:schemeClr val="tx1"/>
+                            <a:srgbClr val="212121"/>
                           </a:solidFill>
                         </a:rPr>
                         <a:t>generator_state_dict</a:t>
@@ -27436,7 +27746,7 @@
                       <a:tailEnd type="none" w="med" len="med"/>
                     </a:lnB>
                     <a:solidFill>
-                      <a:schemeClr val="bg1"/>
+                      <a:srgbClr val="FFFFFF"/>
                     </a:solidFill>
                   </a:tcPr>
                 </a:tc>
@@ -27451,7 +27761,7 @@
                       <a:r>
                         <a:rPr lang="en-US" sz="1200" dirty="0">
                           <a:solidFill>
-                            <a:schemeClr val="tx1"/>
+                            <a:srgbClr val="212121"/>
                           </a:solidFill>
                         </a:rPr>
                         <a:t>생성자 가중치 (회전각 등)</a:t>
@@ -27497,7 +27807,7 @@
                       <a:tailEnd type="none" w="med" len="med"/>
                     </a:lnB>
                     <a:solidFill>
-                      <a:schemeClr val="bg1"/>
+                      <a:srgbClr val="FFFFFF"/>
                     </a:solidFill>
                   </a:tcPr>
                 </a:tc>
@@ -27514,7 +27824,7 @@
                       <a:r>
                         <a:rPr lang="en-US" sz="1200" dirty="0">
                           <a:solidFill>
-                            <a:schemeClr val="tx1"/>
+                            <a:srgbClr val="212121"/>
                           </a:solidFill>
                         </a:rPr>
                         <a:t>discriminator_state_dict</a:t>
@@ -27560,7 +27870,7 @@
                       <a:tailEnd type="none" w="med" len="med"/>
                     </a:lnB>
                     <a:solidFill>
-                      <a:schemeClr val="bg2"/>
+                      <a:srgbClr val="F2F0EB"/>
                     </a:solidFill>
                   </a:tcPr>
                 </a:tc>
@@ -27575,7 +27885,7 @@
                       <a:r>
                         <a:rPr lang="en-US" sz="1200" dirty="0">
                           <a:solidFill>
-                            <a:schemeClr val="tx1"/>
+                            <a:srgbClr val="212121"/>
                           </a:solidFill>
                         </a:rPr>
                         <a:t>판별자 가중치</a:t>
@@ -27621,7 +27931,7 @@
                       <a:tailEnd type="none" w="med" len="med"/>
                     </a:lnB>
                     <a:solidFill>
-                      <a:schemeClr val="bg2"/>
+                      <a:srgbClr val="F2F0EB"/>
                     </a:solidFill>
                   </a:tcPr>
                 </a:tc>
@@ -27638,7 +27948,7 @@
                       <a:r>
                         <a:rPr lang="en-US" sz="1200" dirty="0">
                           <a:solidFill>
-                            <a:schemeClr val="tx1"/>
+                            <a:srgbClr val="212121"/>
                           </a:solidFill>
                         </a:rPr>
                         <a:t>config</a:t>
@@ -27684,7 +27994,7 @@
                       <a:tailEnd type="none" w="med" len="med"/>
                     </a:lnB>
                     <a:solidFill>
-                      <a:schemeClr val="bg1"/>
+                      <a:srgbClr val="FFFFFF"/>
                     </a:solidFill>
                   </a:tcPr>
                 </a:tc>
@@ -27699,7 +28009,7 @@
                       <a:r>
                         <a:rPr lang="en-US" sz="1200" dirty="0">
                           <a:solidFill>
-                            <a:schemeClr val="tx1"/>
+                            <a:srgbClr val="212121"/>
                           </a:solidFill>
                         </a:rPr>
                         <a:t>모델 재구성에 필요한 설정</a:t>
@@ -27745,7 +28055,7 @@
                       <a:tailEnd type="none" w="med" len="med"/>
                     </a:lnB>
                     <a:solidFill>
-                      <a:schemeClr val="bg1"/>
+                      <a:srgbClr val="FFFFFF"/>
                     </a:solidFill>
                   </a:tcPr>
                 </a:tc>
@@ -27762,7 +28072,7 @@
                       <a:r>
                         <a:rPr lang="en-US" sz="1200" dirty="0">
                           <a:solidFill>
-                            <a:schemeClr val="tx1"/>
+                            <a:srgbClr val="212121"/>
                           </a:solidFill>
                         </a:rPr>
                         <a:t>history</a:t>
@@ -27808,7 +28118,7 @@
                       <a:tailEnd type="none" w="med" len="med"/>
                     </a:lnB>
                     <a:solidFill>
-                      <a:schemeClr val="bg2"/>
+                      <a:srgbClr val="F2F0EB"/>
                     </a:solidFill>
                   </a:tcPr>
                 </a:tc>
@@ -27823,7 +28133,7 @@
                       <a:r>
                         <a:rPr lang="en-US" sz="1200" dirty="0">
                           <a:solidFill>
-                            <a:schemeClr val="tx1"/>
+                            <a:srgbClr val="212121"/>
                           </a:solidFill>
                         </a:rPr>
                         <a:t>step별 loss_g · loss_d</a:t>
@@ -27869,7 +28179,7 @@
                       <a:tailEnd type="none" w="med" len="med"/>
                     </a:lnB>
                     <a:solidFill>
-                      <a:schemeClr val="bg2"/>
+                      <a:srgbClr val="F2F0EB"/>
                     </a:solidFill>
                   </a:tcPr>
                 </a:tc>
@@ -27886,7 +28196,7 @@
                       <a:r>
                         <a:rPr lang="en-US" sz="1200" dirty="0">
                           <a:solidFill>
-                            <a:schemeClr val="tx1"/>
+                            <a:srgbClr val="212121"/>
                           </a:solidFill>
                         </a:rPr>
                         <a:t>epoch</a:t>
@@ -27932,7 +28242,7 @@
                       <a:tailEnd type="none" w="med" len="med"/>
                     </a:lnB>
                     <a:solidFill>
-                      <a:schemeClr val="bg1"/>
+                      <a:srgbClr val="FFFFFF"/>
                     </a:solidFill>
                   </a:tcPr>
                 </a:tc>
@@ -27947,7 +28257,7 @@
                       <a:r>
                         <a:rPr lang="en-US" sz="1200" dirty="0">
                           <a:solidFill>
-                            <a:schemeClr val="tx1"/>
+                            <a:srgbClr val="212121"/>
                           </a:solidFill>
                         </a:rPr>
                         <a:t>학습한 epoch 수 (MediQ-GAN)</a:t>
@@ -27993,7 +28303,7 @@
                       <a:tailEnd type="none" w="med" len="med"/>
                     </a:lnB>
                     <a:solidFill>
-                      <a:schemeClr val="bg1"/>
+                      <a:srgbClr val="FFFFFF"/>
                     </a:solidFill>
                   </a:tcPr>
                 </a:tc>
@@ -28029,7 +28339,7 @@
             <a:r>
               <a:rPr lang="en-US" sz="1200" dirty="0">
                 <a:solidFill>
-                  <a:schemeClr val="accent6"/>
+                  <a:srgbClr val="6B6B6B"/>
                 </a:solidFill>
               </a:rPr>
               <a:t>이 파일의 config: sub-generator 4, 데이터 6 + ancilla 1, depth 10, 600 step</a:t>
@@ -28068,7 +28378,7 @@
             <a:lvl1pPr>
               <a:defRPr sz="1000">
                 <a:solidFill>
-                  <a:schemeClr val="accent6"/>
+                  <a:srgbClr val="6B6B6B"/>
                 </a:solidFill>
               </a:defRPr>
             </a:lvl1pPr>
@@ -28137,7 +28447,7 @@
             <a:r>
               <a:rPr lang="en-US" sz="1200" b="1" spc="100" kern="0" dirty="0">
                 <a:solidFill>
-                  <a:schemeClr val="accent1"/>
+                  <a:srgbClr val="00754A"/>
                 </a:solidFill>
               </a:rPr>
               <a:t>PART 0 · 노트북 §2</a:t>
@@ -28175,7 +28485,7 @@
             <a:r>
               <a:rPr lang="en-US" sz="3000" b="1" dirty="0">
                 <a:solidFill>
-                  <a:schemeClr val="tx1"/>
+                  <a:srgbClr val="212121"/>
                 </a:solidFill>
               </a:rPr>
               <a:t>QGAN 기준선</a:t>
@@ -28213,7 +28523,7 @@
             <a:r>
               <a:rPr lang="en-US" sz="1400" dirty="0">
                 <a:solidFill>
-                  <a:schemeClr val="accent6"/>
+                  <a:srgbClr val="6B6B6B"/>
                 </a:solidFill>
               </a:rPr>
               <a:t>강사 checkpoint(600 step)를 지표 4종으로 평가한 값. PART 3에서 MediQ-GAN과 같은 표에 놓음</a:t>
@@ -28262,7 +28572,7 @@
                       <a:r>
                         <a:rPr lang="en-US" sz="1300" b="1" dirty="0">
                           <a:solidFill>
-                            <a:schemeClr val="bg1"/>
+                            <a:srgbClr val="FFFFFF"/>
                           </a:solidFill>
                         </a:rPr>
                         <a:t>지표</a:t>
@@ -28308,7 +28618,7 @@
                       <a:tailEnd type="none" w="med" len="med"/>
                     </a:lnB>
                     <a:solidFill>
-                      <a:schemeClr val="tx2"/>
+                      <a:srgbClr val="1E3932"/>
                     </a:solidFill>
                   </a:tcPr>
                 </a:tc>
@@ -28323,7 +28633,7 @@
                       <a:r>
                         <a:rPr lang="en-US" sz="1300" b="1" dirty="0">
                           <a:solidFill>
-                            <a:schemeClr val="bg1"/>
+                            <a:srgbClr val="FFFFFF"/>
                           </a:solidFill>
                         </a:rPr>
                         <a:t>QGAN 600 step</a:t>
@@ -28369,7 +28679,7 @@
                       <a:tailEnd type="none" w="med" len="med"/>
                     </a:lnB>
                     <a:solidFill>
-                      <a:schemeClr val="tx2"/>
+                      <a:srgbClr val="1E3932"/>
                     </a:solidFill>
                   </a:tcPr>
                 </a:tc>
@@ -28384,7 +28694,7 @@
                       <a:r>
                         <a:rPr lang="en-US" sz="1300" b="1" dirty="0">
                           <a:solidFill>
-                            <a:schemeClr val="bg1"/>
+                            <a:srgbClr val="FFFFFF"/>
                           </a:solidFill>
                         </a:rPr>
                         <a:t>비교 기준</a:t>
@@ -28430,7 +28740,7 @@
                       <a:tailEnd type="none" w="med" len="med"/>
                     </a:lnB>
                     <a:solidFill>
-                      <a:schemeClr val="tx2"/>
+                      <a:srgbClr val="1E3932"/>
                     </a:solidFill>
                   </a:tcPr>
                 </a:tc>
@@ -28445,7 +28755,7 @@
                       <a:r>
                         <a:rPr lang="en-US" sz="1300" b="1" dirty="0">
                           <a:solidFill>
-                            <a:schemeClr val="bg1"/>
+                            <a:srgbClr val="FFFFFF"/>
                           </a:solidFill>
                         </a:rPr>
                         <a:t>해석</a:t>
@@ -28491,7 +28801,7 @@
                       <a:tailEnd type="none" w="med" len="med"/>
                     </a:lnB>
                     <a:solidFill>
-                      <a:schemeClr val="tx2"/>
+                      <a:srgbClr val="1E3932"/>
                     </a:solidFill>
                   </a:tcPr>
                 </a:tc>
@@ -28508,7 +28818,7 @@
                       <a:r>
                         <a:rPr lang="en-US" sz="1300" dirty="0">
                           <a:solidFill>
-                            <a:schemeClr val="tx1"/>
+                            <a:srgbClr val="212121"/>
                           </a:solidFill>
                         </a:rPr>
                         <a:t>② 클래스 평균 상관 ↑</a:t>
@@ -28554,7 +28864,7 @@
                       <a:tailEnd type="none" w="med" len="med"/>
                     </a:lnB>
                     <a:solidFill>
-                      <a:schemeClr val="bg1"/>
+                      <a:srgbClr val="FFFFFF"/>
                     </a:solidFill>
                   </a:tcPr>
                 </a:tc>
@@ -28569,7 +28879,7 @@
                       <a:r>
                         <a:rPr lang="en-US" sz="1300" b="1" dirty="0">
                           <a:solidFill>
-                            <a:schemeClr val="tx1"/>
+                            <a:srgbClr val="212121"/>
                           </a:solidFill>
                         </a:rPr>
                         <a:t>0.195 ± 0.012</a:t>
@@ -28615,7 +28925,7 @@
                       <a:tailEnd type="none" w="med" len="med"/>
                     </a:lnB>
                     <a:solidFill>
-                      <a:schemeClr val="bg1"/>
+                      <a:srgbClr val="FFFFFF"/>
                     </a:solidFill>
                   </a:tcPr>
                 </a:tc>
@@ -28630,7 +28940,7 @@
                       <a:r>
                         <a:rPr lang="en-US" sz="1300" dirty="0">
                           <a:solidFill>
-                            <a:schemeClr val="tx1"/>
+                            <a:srgbClr val="212121"/>
                           </a:solidFill>
                         </a:rPr>
                         <a:t>높을수록 DF 평균 형태에 가까움</a:t>
@@ -28676,7 +28986,7 @@
                       <a:tailEnd type="none" w="med" len="med"/>
                     </a:lnB>
                     <a:solidFill>
-                      <a:schemeClr val="bg1"/>
+                      <a:srgbClr val="FFFFFF"/>
                     </a:solidFill>
                   </a:tcPr>
                 </a:tc>
@@ -28691,7 +29001,7 @@
                       <a:r>
                         <a:rPr lang="en-US" sz="1300" dirty="0">
                           <a:solidFill>
-                            <a:schemeClr val="tx1"/>
+                            <a:srgbClr val="212121"/>
                           </a:solidFill>
                         </a:rPr>
                         <a:t>64장 × 10시드 평균 ± 표준편차</a:t>
@@ -28737,7 +29047,7 @@
                       <a:tailEnd type="none" w="med" len="med"/>
                     </a:lnB>
                     <a:solidFill>
-                      <a:schemeClr val="bg1"/>
+                      <a:srgbClr val="FFFFFF"/>
                     </a:solidFill>
                   </a:tcPr>
                 </a:tc>
@@ -28754,7 +29064,7 @@
                       <a:r>
                         <a:rPr lang="en-US" sz="1300" dirty="0">
                           <a:solidFill>
-                            <a:schemeClr val="tx1"/>
+                            <a:srgbClr val="212121"/>
                           </a:solidFill>
                         </a:rPr>
                         <a:t>③ 최근접 실제 거리</a:t>
@@ -28800,7 +29110,7 @@
                       <a:tailEnd type="none" w="med" len="med"/>
                     </a:lnB>
                     <a:solidFill>
-                      <a:schemeClr val="bg2"/>
+                      <a:srgbClr val="F2F0EB"/>
                     </a:solidFill>
                   </a:tcPr>
                 </a:tc>
@@ -28815,7 +29125,7 @@
                       <a:r>
                         <a:rPr lang="en-US" sz="1300" b="1" dirty="0">
                           <a:solidFill>
-                            <a:schemeClr val="tx1"/>
+                            <a:srgbClr val="212121"/>
                           </a:solidFill>
                         </a:rPr>
                         <a:t>1.64</a:t>
@@ -28861,7 +29171,7 @@
                       <a:tailEnd type="none" w="med" len="med"/>
                     </a:lnB>
                     <a:solidFill>
-                      <a:schemeClr val="bg2"/>
+                      <a:srgbClr val="F2F0EB"/>
                     </a:solidFill>
                   </a:tcPr>
                 </a:tc>
@@ -28876,7 +29186,7 @@
                       <a:r>
                         <a:rPr lang="en-US" sz="1300" dirty="0">
                           <a:solidFill>
-                            <a:schemeClr val="tx1"/>
+                            <a:srgbClr val="212121"/>
                           </a:solidFill>
                         </a:rPr>
                         <a:t>0에 가까우면 학습 이미지 암기</a:t>
@@ -28922,7 +29232,7 @@
                       <a:tailEnd type="none" w="med" len="med"/>
                     </a:lnB>
                     <a:solidFill>
-                      <a:schemeClr val="bg2"/>
+                      <a:srgbClr val="F2F0EB"/>
                     </a:solidFill>
                   </a:tcPr>
                 </a:tc>
@@ -28937,7 +29247,7 @@
                       <a:r>
                         <a:rPr lang="en-US" sz="1300" dirty="0">
                           <a:solidFill>
-                            <a:schemeClr val="tx1"/>
+                            <a:srgbClr val="212121"/>
                           </a:solidFill>
                         </a:rPr>
                         <a:t>암기는 아님</a:t>
@@ -28983,7 +29293,7 @@
                       <a:tailEnd type="none" w="med" len="med"/>
                     </a:lnB>
                     <a:solidFill>
-                      <a:schemeClr val="bg2"/>
+                      <a:srgbClr val="F2F0EB"/>
                     </a:solidFill>
                   </a:tcPr>
                 </a:tc>
@@ -29000,7 +29310,7 @@
                       <a:r>
                         <a:rPr lang="en-US" sz="1300" dirty="0">
                           <a:solidFill>
-                            <a:schemeClr val="tx1"/>
+                            <a:srgbClr val="212121"/>
                           </a:solidFill>
                         </a:rPr>
                         <a:t>④ 샘플 간 거리</a:t>
@@ -29046,7 +29356,7 @@
                       <a:tailEnd type="none" w="med" len="med"/>
                     </a:lnB>
                     <a:solidFill>
-                      <a:schemeClr val="bg1"/>
+                      <a:srgbClr val="FFFFFF"/>
                     </a:solidFill>
                   </a:tcPr>
                 </a:tc>
@@ -29061,7 +29371,7 @@
                       <a:r>
                         <a:rPr lang="en-US" sz="1300" b="1" dirty="0">
                           <a:solidFill>
-                            <a:schemeClr val="tx1"/>
+                            <a:srgbClr val="212121"/>
                           </a:solidFill>
                         </a:rPr>
                         <a:t>1.92</a:t>
@@ -29107,7 +29417,7 @@
                       <a:tailEnd type="none" w="med" len="med"/>
                     </a:lnB>
                     <a:solidFill>
-                      <a:schemeClr val="bg1"/>
+                      <a:srgbClr val="FFFFFF"/>
                     </a:solidFill>
                   </a:tcPr>
                 </a:tc>
@@ -29122,7 +29432,7 @@
                       <a:r>
                         <a:rPr lang="en-US" sz="1300" dirty="0">
                           <a:solidFill>
-                            <a:schemeClr val="tx1"/>
+                            <a:srgbClr val="212121"/>
                           </a:solidFill>
                         </a:rPr>
                         <a:t>실제 DF 2.505</a:t>
@@ -29168,7 +29478,7 @@
                       <a:tailEnd type="none" w="med" len="med"/>
                     </a:lnB>
                     <a:solidFill>
-                      <a:schemeClr val="bg1"/>
+                      <a:srgbClr val="FFFFFF"/>
                     </a:solidFill>
                   </a:tcPr>
                 </a:tc>
@@ -29183,7 +29493,7 @@
                       <a:r>
                         <a:rPr lang="en-US" sz="1300" dirty="0">
                           <a:solidFill>
-                            <a:schemeClr val="tx1"/>
+                            <a:srgbClr val="212121"/>
                           </a:solidFill>
                         </a:rPr>
                         <a:t>실제의 약 77%</a:t>
@@ -29229,7 +29539,7 @@
                       <a:tailEnd type="none" w="med" len="med"/>
                     </a:lnB>
                     <a:solidFill>
-                      <a:schemeClr val="bg1"/>
+                      <a:srgbClr val="FFFFFF"/>
                     </a:solidFill>
                   </a:tcPr>
                 </a:tc>
@@ -29255,7 +29565,7 @@
             </a:avLst>
           </a:prstGeom>
           <a:solidFill>
-            <a:schemeClr val="tx2"/>
+            <a:srgbClr val="1E3932"/>
           </a:solidFill>
           <a:ln/>
         </p:spPr>
@@ -29290,7 +29600,7 @@
             <a:r>
               <a:rPr lang="en-US" sz="1200" dirty="0">
                 <a:solidFill>
-                  <a:schemeClr val="bg2"/>
+                  <a:srgbClr val="F2F0EB"/>
                 </a:solidFill>
                 <a:latin typeface="Courier New" pitchFamily="34" charset="0"/>
                 <a:ea typeface="Courier New" pitchFamily="34" charset="-122"/>
@@ -29310,7 +29620,7 @@
             <a:r>
               <a:rPr lang="en-US" sz="1200" dirty="0">
                 <a:solidFill>
-                  <a:schemeClr val="bg2"/>
+                  <a:srgbClr val="F2F0EB"/>
                 </a:solidFill>
                 <a:latin typeface="Courier New" pitchFamily="34" charset="0"/>
                 <a:ea typeface="Courier New" pitchFamily="34" charset="-122"/>
@@ -29330,7 +29640,7 @@
             <a:r>
               <a:rPr lang="en-US" sz="1200" b="1" dirty="0">
                 <a:solidFill>
-                  <a:schemeClr val="accent3"/>
+                  <a:srgbClr val="DFC49D"/>
                 </a:solidFill>
                 <a:latin typeface="Courier New" pitchFamily="34" charset="0"/>
                 <a:ea typeface="Courier New" pitchFamily="34" charset="-122"/>
@@ -29369,7 +29679,7 @@
             <a:r>
               <a:rPr lang="en-US" sz="1250" dirty="0">
                 <a:solidFill>
-                  <a:schemeClr val="accent6"/>
+                  <a:srgbClr val="6B6B6B"/>
                 </a:solidFill>
               </a:rPr>
               <a:t>생성할 때마다 새 난수를 쓰므로 노트북 실행 결과는 표와 조금씩 다름. 소수점 자리보다 모델 간 격차를 봄.</a:t>
@@ -29405,7 +29715,7 @@
             <a:r>
               <a:rPr lang="en-US" sz="900" dirty="0">
                 <a:solidFill>
-                  <a:schemeClr val="accent6"/>
+                  <a:srgbClr val="6B6B6B"/>
                 </a:solidFill>
               </a:rPr>
               <a:t>수치: README 결과표 (로컬 CPU, PennyLane exact 시뮬레이션)</a:t>
@@ -29444,7 +29754,7 @@
             <a:lvl1pPr>
               <a:defRPr sz="1000">
                 <a:solidFill>
-                  <a:schemeClr val="accent6"/>
+                  <a:srgbClr val="6B6B6B"/>
                 </a:solidFill>
               </a:defRPr>
             </a:lvl1pPr>
@@ -29513,10 +29823,10 @@
             <a:r>
               <a:rPr lang="en-US" sz="1200" b="1" spc="100" kern="0" dirty="0">
                 <a:solidFill>
-                  <a:schemeClr val="accent3"/>
+                  <a:srgbClr val="DFC49D"/>
                 </a:solidFill>
               </a:rPr>
-              <a:t>PART 1 · 노트북 §3 직전</a:t>
+              <a:t>PART 1 · 노트북 §3</a:t>
             </a:r>
             <a:endParaRPr lang="en-US" sz="1200" dirty="0"/>
           </a:p>
@@ -29551,7 +29861,7 @@
             <a:r>
               <a:rPr lang="en-US" sz="3600" b="1" dirty="0">
                 <a:solidFill>
-                  <a:schemeClr val="bg1"/>
+                  <a:srgbClr val="FFFFFF"/>
                 </a:solidFill>
               </a:rPr>
               <a:t>MediQ-GAN 구조</a:t>
@@ -29589,7 +29899,7 @@
             <a:r>
               <a:rPr lang="en-US" sz="1500" dirty="0">
                 <a:solidFill>
-                  <a:schemeClr val="bg2"/>
+                  <a:srgbClr val="F2F0EB"/>
                 </a:solidFill>
               </a:rPr>
               <a:t>생성자 안에서 고전 stream과 양자 stream이 병렬로 돌고 하나로 합쳐짐</a:t>
@@ -29600,7 +29910,7 @@
       </p:sp>
       <p:sp>
         <p:nvSpPr>
-          <p:cNvPr id="6" name="Text 3"/>
+          <p:cNvPr id="5" name="Text 3"/>
           <p:cNvSpPr txBox="1"/>
           <p:nvPr/>
         </p:nvSpPr>
@@ -29625,7 +29935,7 @@
             <a:r>
               <a:rPr lang="en-US" sz="1400" b="1" dirty="0">
                 <a:solidFill>
-                  <a:schemeClr val="accent3"/>
+                  <a:srgbClr val="DFC49D"/>
                 </a:solidFill>
               </a:rPr>
               <a:t>노트북 범위</a:t>
@@ -29636,7 +29946,7 @@
       </p:sp>
       <p:sp>
         <p:nvSpPr>
-          <p:cNvPr id="7" name="Text 4"/>
+          <p:cNvPr id="6" name="Text 4"/>
           <p:cNvSpPr txBox="1"/>
           <p:nvPr/>
         </p:nvSpPr>
@@ -29661,7 +29971,7 @@
             <a:r>
               <a:rPr lang="en-US" sz="1500" dirty="0">
                 <a:solidFill>
-                  <a:schemeClr val="bg1"/>
+                  <a:srgbClr val="FFFFFF"/>
                 </a:solidFill>
               </a:rPr>
               <a:t>§3 ToyDualStreamGenerator 정의와 forward 1회</a:t>
@@ -29672,7 +29982,7 @@
       </p:sp>
       <p:sp>
         <p:nvSpPr>
-          <p:cNvPr id="8" name="Text 5"/>
+          <p:cNvPr id="7" name="Text 5"/>
           <p:cNvSpPr txBox="1"/>
           <p:nvPr/>
         </p:nvSpPr>
@@ -29697,7 +30007,7 @@
             <a:r>
               <a:rPr lang="en-US" sz="1400" b="1" dirty="0">
                 <a:solidFill>
-                  <a:schemeClr val="accent3"/>
+                  <a:srgbClr val="DFC49D"/>
                 </a:solidFill>
               </a:rPr>
               <a:t>다루는 코드</a:t>
@@ -29708,7 +30018,7 @@
       </p:sp>
       <p:sp>
         <p:nvSpPr>
-          <p:cNvPr id="9" name="Text 6"/>
+          <p:cNvPr id="8" name="Text 6"/>
           <p:cNvSpPr txBox="1"/>
           <p:nvPr/>
         </p:nvSpPr>
@@ -29733,7 +30043,7 @@
             <a:r>
               <a:rPr lang="en-US" sz="1500" dirty="0">
                 <a:solidFill>
-                  <a:schemeClr val="bg1"/>
+                  <a:srgbClr val="FFFFFF"/>
                 </a:solidFill>
               </a:rPr>
               <a:t>q_circuit · quantum_stream · forward</a:t>
@@ -29744,7 +30054,7 @@
       </p:sp>
       <p:sp>
         <p:nvSpPr>
-          <p:cNvPr id="10" name="Text 7"/>
+          <p:cNvPr id="9" name="Text 7"/>
           <p:cNvSpPr txBox="1"/>
           <p:nvPr/>
         </p:nvSpPr>
@@ -29769,7 +30079,7 @@
             <a:r>
               <a:rPr lang="en-US" sz="1400" b="1" dirty="0">
                 <a:solidFill>
-                  <a:schemeClr val="accent3"/>
+                  <a:srgbClr val="DFC49D"/>
                 </a:solidFill>
               </a:rPr>
               <a:t>비교 대상</a:t>
@@ -29780,7 +30090,7 @@
       </p:sp>
       <p:sp>
         <p:nvSpPr>
-          <p:cNvPr id="11" name="Text 8"/>
+          <p:cNvPr id="10" name="Text 8"/>
           <p:cNvSpPr txBox="1"/>
           <p:nvPr/>
         </p:nvSpPr>
@@ -29805,7 +30115,7 @@
             <a:r>
               <a:rPr lang="en-US" sz="1500" dirty="0">
                 <a:solidFill>
-                  <a:schemeClr val="bg1"/>
+                  <a:srgbClr val="FFFFFF"/>
                 </a:solidFill>
               </a:rPr>
               <a:t>2일차 QGAN(생성자 전체가 양자회로)</a:t>
@@ -29844,7 +30154,7 @@
             <a:lvl1pPr>
               <a:defRPr sz="1000">
                 <a:solidFill>
-                  <a:schemeClr val="accent6"/>
+                  <a:srgbClr val="6B6B6B"/>
                 </a:solidFill>
               </a:defRPr>
             </a:lvl1pPr>
@@ -29913,7 +30223,7 @@
             <a:r>
               <a:rPr lang="en-US" sz="1200" b="1" spc="100" kern="0" dirty="0">
                 <a:solidFill>
-                  <a:schemeClr val="accent1"/>
+                  <a:srgbClr val="00754A"/>
                 </a:solidFill>
               </a:rPr>
               <a:t>PART 1 · 1일차 복습</a:t>
@@ -29951,7 +30261,7 @@
             <a:r>
               <a:rPr lang="en-US" sz="3000" b="1" dirty="0">
                 <a:solidFill>
-                  <a:schemeClr val="tx1"/>
+                  <a:srgbClr val="212121"/>
                 </a:solidFill>
               </a:rPr>
               <a:t>hybrid 수준 : model-level과 layer-level</a:t>
@@ -29989,7 +30299,7 @@
             <a:r>
               <a:rPr lang="en-US" sz="1400" dirty="0">
                 <a:solidFill>
-                  <a:schemeClr val="accent6"/>
+                  <a:srgbClr val="6B6B6B"/>
                 </a:solidFill>
               </a:rPr>
               <a:t>QGAN은 생성자 전체가 양자회로, MediQ-GAN은 생성자 안의 한 갈래만 양자회로</a:t>
@@ -30052,7 +30362,7 @@
             <a:r>
               <a:rPr lang="en-US" sz="1700" b="1" dirty="0">
                 <a:solidFill>
-                  <a:schemeClr val="accent1"/>
+                  <a:srgbClr val="00754A"/>
                 </a:solidFill>
               </a:rPr>
               <a:t>QGAN - model-level hybrid</a:t>
@@ -30088,7 +30398,7 @@
             <a:r>
               <a:rPr lang="en-US" sz="1200" dirty="0">
                 <a:solidFill>
-                  <a:schemeClr val="accent6"/>
+                  <a:srgbClr val="6B6B6B"/>
                 </a:solidFill>
               </a:rPr>
               <a:t>Andra et al., 2025 · 2일차 실습</a:t>
@@ -30128,7 +30438,7 @@
             <a:r>
               <a:rPr lang="en-US" sz="1400" dirty="0">
                 <a:solidFill>
-                  <a:schemeClr val="tx1"/>
+                  <a:srgbClr val="212121"/>
                 </a:solidFill>
               </a:rPr>
               <a:t>생성자 = 양자회로 (sub-generator 4개)</a:t>
@@ -30146,7 +30456,7 @@
             <a:r>
               <a:rPr lang="en-US" sz="1400" dirty="0">
                 <a:solidFill>
-                  <a:schemeClr val="tx1"/>
+                  <a:srgbClr val="212121"/>
                 </a:solidFill>
               </a:rPr>
               <a:t>patch를 나눠 만들고 이어붙임</a:t>
@@ -30164,7 +30474,7 @@
             <a:r>
               <a:rPr lang="en-US" sz="1400" dirty="0">
                 <a:solidFill>
-                  <a:schemeClr val="tx1"/>
+                  <a:srgbClr val="212121"/>
                 </a:solidFill>
               </a:rPr>
               <a:t>출력 = 측정 확률 (patch별 합 0 ~ 1)</a:t>
@@ -30182,7 +30492,7 @@
             <a:r>
               <a:rPr lang="en-US" sz="1400" dirty="0">
                 <a:solidFill>
-                  <a:schemeClr val="tx1"/>
+                  <a:srgbClr val="212121"/>
                 </a:solidFill>
               </a:rPr>
               <a:t>판별자만 고전</a:t>
@@ -30208,7 +30518,7 @@
             </a:avLst>
           </a:prstGeom>
           <a:solidFill>
-            <a:schemeClr val="accent1"/>
+            <a:srgbClr val="00754A"/>
           </a:solidFill>
           <a:ln/>
         </p:spPr>
@@ -30240,7 +30550,7 @@
             <a:r>
               <a:rPr lang="en-US" sz="1300" b="1" dirty="0">
                 <a:solidFill>
-                  <a:schemeClr val="bg1"/>
+                  <a:srgbClr val="FFFFFF"/>
                 </a:solidFill>
               </a:rPr>
               <a:t>z → [양자회로 × 4] → 이미지</a:t>
@@ -30303,7 +30613,7 @@
             <a:r>
               <a:rPr lang="en-US" sz="1700" b="1" dirty="0">
                 <a:solidFill>
-                  <a:schemeClr val="accent2"/>
+                  <a:srgbClr val="5B3E8C"/>
                 </a:solidFill>
               </a:rPr>
               <a:t>MediQ-GAN - layer-level hybrid</a:t>
@@ -30339,7 +30649,7 @@
             <a:r>
               <a:rPr lang="en-US" sz="1200" dirty="0">
                 <a:solidFill>
-                  <a:schemeClr val="accent6"/>
+                  <a:srgbClr val="6B6B6B"/>
                 </a:solidFill>
               </a:rPr>
               <a:t>Jiao et al., 2025 · 3일차 실습</a:t>
@@ -30379,7 +30689,7 @@
             <a:r>
               <a:rPr lang="en-US" sz="1400" dirty="0">
                 <a:solidFill>
-                  <a:schemeClr val="tx1"/>
+                  <a:srgbClr val="212121"/>
                 </a:solidFill>
               </a:rPr>
               <a:t>생성자 = 고전 stream + 양자 stream</a:t>
@@ -30397,7 +30707,7 @@
             <a:r>
               <a:rPr lang="en-US" sz="1400" dirty="0">
                 <a:solidFill>
-                  <a:schemeClr val="tx1"/>
+                  <a:srgbClr val="212121"/>
                 </a:solidFill>
               </a:rPr>
               <a:t>입력을 절반씩 나눠 병렬 처리 후 concat</a:t>
@@ -30415,7 +30725,7 @@
             <a:r>
               <a:rPr lang="en-US" sz="1400" dirty="0">
                 <a:solidFill>
-                  <a:schemeClr val="tx1"/>
+                  <a:srgbClr val="212121"/>
                 </a:solidFill>
               </a:rPr>
               <a:t>출력 = 고전 decoder → Tanh (-1 ~ 1)</a:t>
@@ -30433,7 +30743,7 @@
             <a:r>
               <a:rPr lang="en-US" sz="1400" dirty="0">
                 <a:solidFill>
-                  <a:schemeClr val="tx1"/>
+                  <a:srgbClr val="212121"/>
                 </a:solidFill>
               </a:rPr>
               <a:t>양자 stream은 원 논문 스펙(16큐빗 × 5, depth 8)</a:t>
@@ -30459,7 +30769,7 @@
             </a:avLst>
           </a:prstGeom>
           <a:solidFill>
-            <a:schemeClr val="accent2"/>
+            <a:srgbClr val="5B3E8C"/>
           </a:solidFill>
           <a:ln/>
         </p:spPr>
@@ -30491,7 +30801,7 @@
             <a:r>
               <a:rPr lang="en-US" sz="1300" b="1" dirty="0">
                 <a:solidFill>
-                  <a:schemeClr val="bg1"/>
+                  <a:srgbClr val="FFFFFF"/>
                 </a:solidFill>
               </a:rPr>
               <a:t>z → [고전 ∥ 양자] → concat → decoder</a:t>
@@ -30530,7 +30840,7 @@
             <a:lvl1pPr>
               <a:defRPr sz="1000">
                 <a:solidFill>
-                  <a:schemeClr val="accent6"/>
+                  <a:srgbClr val="6B6B6B"/>
                 </a:solidFill>
               </a:defRPr>
             </a:lvl1pPr>
@@ -30599,7 +30909,7 @@
             <a:r>
               <a:rPr lang="en-US" sz="1200" b="1" spc="100" kern="0" dirty="0">
                 <a:solidFill>
-                  <a:schemeClr val="accent1"/>
+                  <a:srgbClr val="00754A"/>
                 </a:solidFill>
               </a:rPr>
               <a:t>PART 1 · 노트북 §3 코드</a:t>
@@ -30637,7 +30947,7 @@
             <a:r>
               <a:rPr lang="en-US" sz="3000" b="1" dirty="0">
                 <a:solidFill>
-                  <a:schemeClr val="tx1"/>
+                  <a:srgbClr val="212121"/>
                 </a:solidFill>
               </a:rPr>
               <a:t>dual-stream의 데이터 흐름</a:t>
@@ -30675,7 +30985,7 @@
             <a:r>
               <a:rPr lang="en-US" sz="1400" dirty="0">
                 <a:solidFill>
-                  <a:schemeClr val="accent6"/>
+                  <a:srgbClr val="6B6B6B"/>
                 </a:solidFill>
               </a:rPr>
               <a:t>잠재벡터 256차원을 절반씩 나누고, 두 stream의 출력을 이어붙여 decoder로 보냄</a:t>
@@ -30733,7 +31043,7 @@
             <a:r>
               <a:rPr lang="en-US" sz="1200" b="1" dirty="0">
                 <a:solidFill>
-                  <a:schemeClr val="tx1"/>
+                  <a:srgbClr val="212121"/>
                 </a:solidFill>
               </a:rPr>
               <a:t>잠재벡터 z</a:t>
@@ -30747,7 +31057,7 @@
             <a:r>
               <a:rPr lang="en-US" sz="1200" b="1" dirty="0">
                 <a:solidFill>
-                  <a:schemeClr val="tx1"/>
+                  <a:srgbClr val="212121"/>
                 </a:solidFill>
               </a:rPr>
               <a:t>256차원</a:t>
@@ -30761,7 +31071,7 @@
             <a:r>
               <a:rPr lang="en-US" sz="1200" b="1" dirty="0">
                 <a:solidFill>
-                  <a:schemeClr val="tx1"/>
+                  <a:srgbClr val="212121"/>
                 </a:solidFill>
               </a:rPr>
               <a:t>N(0, 1)</a:t>
@@ -30824,7 +31134,7 @@
             <a:r>
               <a:rPr lang="en-US" sz="1200" b="1" dirty="0">
                 <a:solidFill>
-                  <a:schemeClr val="tx1"/>
+                  <a:srgbClr val="212121"/>
                 </a:solidFill>
               </a:rPr>
               <a:t>z[:, :128]</a:t>
@@ -30850,7 +31160,7 @@
             </a:avLst>
           </a:prstGeom>
           <a:solidFill>
-            <a:schemeClr val="tx2"/>
+            <a:srgbClr val="1E3932"/>
           </a:solidFill>
           <a:ln/>
         </p:spPr>
@@ -30882,7 +31192,7 @@
             <a:r>
               <a:rPr lang="en-US" sz="1200" b="1" dirty="0">
                 <a:solidFill>
-                  <a:schemeClr val="bg1"/>
+                  <a:srgbClr val="FFFFFF"/>
                 </a:solidFill>
               </a:rPr>
               <a:t>고전 stream</a:t>
@@ -30896,7 +31206,7 @@
             <a:r>
               <a:rPr lang="en-US" sz="1200" b="1" dirty="0">
                 <a:solidFill>
-                  <a:schemeClr val="bg1"/>
+                  <a:srgbClr val="FFFFFF"/>
                 </a:solidFill>
               </a:rPr>
               <a:t>MLP 128→32→128</a:t>
@@ -30959,7 +31269,7 @@
             <a:r>
               <a:rPr lang="en-US" sz="1200" b="1" dirty="0">
                 <a:solidFill>
-                  <a:schemeClr val="tx1"/>
+                  <a:srgbClr val="212121"/>
                 </a:solidFill>
               </a:rPr>
               <a:t>128</a:t>
@@ -31022,7 +31332,7 @@
             <a:r>
               <a:rPr lang="en-US" sz="1200" b="1" dirty="0">
                 <a:solidFill>
-                  <a:schemeClr val="tx1"/>
+                  <a:srgbClr val="212121"/>
                 </a:solidFill>
               </a:rPr>
               <a:t>z[:, 128:]</a:t>
@@ -31048,7 +31358,7 @@
             </a:avLst>
           </a:prstGeom>
           <a:solidFill>
-            <a:schemeClr val="accent2"/>
+            <a:srgbClr val="5B3E8C"/>
           </a:solidFill>
           <a:ln/>
         </p:spPr>
@@ -31080,7 +31390,7 @@
             <a:r>
               <a:rPr lang="en-US" sz="1200" b="1" dirty="0">
                 <a:solidFill>
-                  <a:schemeClr val="bg1"/>
+                  <a:srgbClr val="FFFFFF"/>
                 </a:solidFill>
               </a:rPr>
               <a:t>양자 stream</a:t>
@@ -31094,7 +31404,7 @@
             <a:r>
               <a:rPr lang="en-US" sz="1200" b="1" dirty="0">
                 <a:solidFill>
-                  <a:schemeClr val="bg1"/>
+                  <a:srgbClr val="FFFFFF"/>
                 </a:solidFill>
               </a:rPr>
               <a:t>16 site → 회로 5개</a:t>
@@ -31108,7 +31418,7 @@
             <a:r>
               <a:rPr lang="en-US" sz="1200" b="1" dirty="0">
                 <a:solidFill>
-                  <a:schemeClr val="bg1"/>
+                  <a:srgbClr val="FFFFFF"/>
                 </a:solidFill>
               </a:rPr>
               <a:t>→ 1×1 conv</a:t>
@@ -31171,7 +31481,7 @@
             <a:r>
               <a:rPr lang="en-US" sz="1100" b="1" dirty="0">
                 <a:solidFill>
-                  <a:schemeClr val="tx1"/>
+                  <a:srgbClr val="212121"/>
                 </a:solidFill>
               </a:rPr>
               <a:t>16 × 4×4</a:t>
@@ -31185,7 +31495,7 @@
             <a:r>
               <a:rPr lang="en-US" sz="1100" b="1" dirty="0">
                 <a:solidFill>
-                  <a:schemeClr val="tx1"/>
+                  <a:srgbClr val="212121"/>
                 </a:solidFill>
               </a:rPr>
               <a:t>= 256</a:t>
@@ -31211,7 +31521,7 @@
           <a:noFill/>
           <a:ln w="22225">
             <a:solidFill>
-              <a:schemeClr val="accent6"/>
+              <a:srgbClr val="6B6B6B"/>
             </a:solidFill>
             <a:prstDash val="solid"/>
             <a:tailEnd type="triangle"/>
@@ -31235,7 +31545,7 @@
           <a:noFill/>
           <a:ln w="22225">
             <a:solidFill>
-              <a:schemeClr val="accent6"/>
+              <a:srgbClr val="6B6B6B"/>
             </a:solidFill>
             <a:prstDash val="solid"/>
             <a:tailEnd type="triangle"/>
@@ -31259,7 +31569,7 @@
           <a:noFill/>
           <a:ln w="22225">
             <a:solidFill>
-              <a:schemeClr val="accent6"/>
+              <a:srgbClr val="6B6B6B"/>
             </a:solidFill>
             <a:prstDash val="solid"/>
             <a:tailEnd type="triangle"/>
@@ -31283,7 +31593,7 @@
           <a:noFill/>
           <a:ln w="22225">
             <a:solidFill>
-              <a:schemeClr val="accent6"/>
+              <a:srgbClr val="6B6B6B"/>
             </a:solidFill>
             <a:prstDash val="solid"/>
             <a:tailEnd type="triangle"/>
@@ -31307,7 +31617,7 @@
           <a:noFill/>
           <a:ln w="22225">
             <a:solidFill>
-              <a:schemeClr val="accent6"/>
+              <a:srgbClr val="6B6B6B"/>
             </a:solidFill>
             <a:prstDash val="solid"/>
             <a:tailEnd type="triangle"/>
@@ -31331,7 +31641,7 @@
           <a:noFill/>
           <a:ln w="22225">
             <a:solidFill>
-              <a:schemeClr val="accent6"/>
+              <a:srgbClr val="6B6B6B"/>
             </a:solidFill>
             <a:prstDash val="solid"/>
             <a:tailEnd type="triangle"/>
@@ -31392,7 +31702,7 @@
             <a:r>
               <a:rPr lang="en-US" sz="1200" b="1" dirty="0">
                 <a:solidFill>
-                  <a:schemeClr val="tx1"/>
+                  <a:srgbClr val="212121"/>
                 </a:solidFill>
               </a:rPr>
               <a:t>concat</a:t>
@@ -31406,7 +31716,7 @@
             <a:r>
               <a:rPr lang="en-US" sz="1200" b="1" dirty="0">
                 <a:solidFill>
-                  <a:schemeClr val="tx1"/>
+                  <a:srgbClr val="212121"/>
                 </a:solidFill>
               </a:rPr>
               <a:t>128 + 256</a:t>
@@ -31420,7 +31730,7 @@
             <a:r>
               <a:rPr lang="en-US" sz="1200" b="1" dirty="0">
                 <a:solidFill>
-                  <a:schemeClr val="tx1"/>
+                  <a:srgbClr val="212121"/>
                 </a:solidFill>
               </a:rPr>
               <a:t>= 384</a:t>
@@ -31446,7 +31756,7 @@
           <a:noFill/>
           <a:ln w="22225">
             <a:solidFill>
-              <a:schemeClr val="accent6"/>
+              <a:srgbClr val="6B6B6B"/>
             </a:solidFill>
             <a:prstDash val="solid"/>
             <a:tailEnd type="triangle"/>
@@ -31470,7 +31780,7 @@
           <a:noFill/>
           <a:ln w="22225">
             <a:solidFill>
-              <a:schemeClr val="accent6"/>
+              <a:srgbClr val="6B6B6B"/>
             </a:solidFill>
             <a:prstDash val="solid"/>
             <a:tailEnd type="triangle"/>
@@ -31494,7 +31804,7 @@
             </a:avLst>
           </a:prstGeom>
           <a:solidFill>
-            <a:schemeClr val="tx2"/>
+            <a:srgbClr val="1E3932"/>
           </a:solidFill>
           <a:ln/>
         </p:spPr>
@@ -31526,7 +31836,7 @@
             <a:r>
               <a:rPr lang="en-US" sz="1200" b="1" dirty="0">
                 <a:solidFill>
-                  <a:schemeClr val="bg1"/>
+                  <a:srgbClr val="FFFFFF"/>
                 </a:solidFill>
               </a:rPr>
               <a:t>decoder</a:t>
@@ -31540,7 +31850,7 @@
             <a:r>
               <a:rPr lang="en-US" sz="1200" b="1" dirty="0">
                 <a:solidFill>
-                  <a:schemeClr val="bg1"/>
+                  <a:srgbClr val="FFFFFF"/>
                 </a:solidFill>
               </a:rPr>
               <a:t>MLP 384→32→256</a:t>
@@ -31554,7 +31864,7 @@
             <a:r>
               <a:rPr lang="en-US" sz="1200" b="1" dirty="0">
                 <a:solidFill>
-                  <a:schemeClr val="bg1"/>
+                  <a:srgbClr val="FFFFFF"/>
                 </a:solidFill>
               </a:rPr>
               <a:t>Tanh</a:t>
@@ -31580,7 +31890,7 @@
           <a:noFill/>
           <a:ln w="22225">
             <a:solidFill>
-              <a:schemeClr val="accent6"/>
+              <a:srgbClr val="6B6B6B"/>
             </a:solidFill>
             <a:prstDash val="solid"/>
             <a:tailEnd type="triangle"/>
@@ -31636,7 +31946,7 @@
             <a:r>
               <a:rPr lang="en-US" sz="1100" b="1" dirty="0">
                 <a:solidFill>
-                  <a:schemeClr val="tx1"/>
+                  <a:srgbClr val="212121"/>
                 </a:solidFill>
               </a:rPr>
               <a:t>16×16</a:t>
@@ -31650,7 +31960,7 @@
             <a:r>
               <a:rPr lang="en-US" sz="1100" b="1" dirty="0">
                 <a:solidFill>
-                  <a:schemeClr val="tx1"/>
+                  <a:srgbClr val="212121"/>
                 </a:solidFill>
               </a:rPr>
               <a:t>-1 ~ 1</a:t>
@@ -31676,7 +31986,7 @@
           <a:noFill/>
           <a:ln w="22225">
             <a:solidFill>
-              <a:schemeClr val="accent6"/>
+              <a:srgbClr val="6B6B6B"/>
             </a:solidFill>
             <a:prstDash val="solid"/>
             <a:tailEnd type="triangle"/>
@@ -31700,7 +32010,7 @@
             </a:avLst>
           </a:prstGeom>
           <a:solidFill>
-            <a:schemeClr val="tx2"/>
+            <a:srgbClr val="1E3932"/>
           </a:solidFill>
           <a:ln/>
         </p:spPr>
@@ -31735,7 +32045,7 @@
             <a:r>
               <a:rPr lang="en-US" sz="1050" dirty="0">
                 <a:solidFill>
-                  <a:schemeClr val="bg2"/>
+                  <a:srgbClr val="F2F0EB"/>
                 </a:solidFill>
                 <a:latin typeface="Courier New" pitchFamily="34" charset="0"/>
                 <a:ea typeface="Courier New" pitchFamily="34" charset="-122"/>
@@ -31755,7 +32065,7 @@
             <a:r>
               <a:rPr lang="en-US" sz="1050" dirty="0">
                 <a:solidFill>
-                  <a:schemeClr val="bg2"/>
+                  <a:srgbClr val="F2F0EB"/>
                 </a:solidFill>
                 <a:latin typeface="Courier New" pitchFamily="34" charset="0"/>
                 <a:ea typeface="Courier New" pitchFamily="34" charset="-122"/>
@@ -31775,7 +32085,7 @@
             <a:r>
               <a:rPr lang="en-US" sz="1050" dirty="0">
                 <a:solidFill>
-                  <a:schemeClr val="bg2"/>
+                  <a:srgbClr val="F2F0EB"/>
                 </a:solidFill>
                 <a:latin typeface="Courier New" pitchFamily="34" charset="0"/>
                 <a:ea typeface="Courier New" pitchFamily="34" charset="-122"/>
@@ -31795,7 +32105,7 @@
             <a:r>
               <a:rPr lang="en-US" sz="1050" dirty="0">
                 <a:solidFill>
-                  <a:schemeClr val="bg2"/>
+                  <a:srgbClr val="F2F0EB"/>
                 </a:solidFill>
                 <a:latin typeface="Courier New" pitchFamily="34" charset="0"/>
                 <a:ea typeface="Courier New" pitchFamily="34" charset="-122"/>
@@ -31837,7 +32147,7 @@
             <a:lvl1pPr>
               <a:defRPr sz="1000">
                 <a:solidFill>
-                  <a:schemeClr val="accent6"/>
+                  <a:srgbClr val="6B6B6B"/>
                 </a:solidFill>
               </a:defRPr>
             </a:lvl1pPr>
@@ -31861,47 +32171,47 @@
 </file>
 
 <file path=ppt/theme/theme1.xml><?xml version="1.0" encoding="utf-8"?>
-<a:theme xmlns:a="http://schemas.openxmlformats.org/drawingml/2006/main" name="QML Lecture">
+<a:theme xmlns:a="http://schemas.openxmlformats.org/drawingml/2006/main" name="Office Theme">
   <a:themeElements>
-    <a:clrScheme name="QML Lecture">
+    <a:clrScheme name="Office">
       <a:dk1>
-        <a:srgbClr val="212121"/>
+        <a:sysClr val="windowText" lastClr="000000"/>
       </a:dk1>
       <a:lt1>
-        <a:srgbClr val="FFFFFF"/>
+        <a:sysClr val="window" lastClr="FFFFFF"/>
       </a:lt1>
       <a:dk2>
-        <a:srgbClr val="1E3932"/>
+        <a:srgbClr val="44546A"/>
       </a:dk2>
       <a:lt2>
-        <a:srgbClr val="F2F0EB"/>
+        <a:srgbClr val="E7E6E6"/>
       </a:lt2>
       <a:accent1>
-        <a:srgbClr val="00754A"/>
+        <a:srgbClr val="4472C4"/>
       </a:accent1>
       <a:accent2>
-        <a:srgbClr val="5B3E8C"/>
+        <a:srgbClr val="ED7D31"/>
       </a:accent2>
       <a:accent3>
-        <a:srgbClr val="DFC49D"/>
+        <a:srgbClr val="A5A5A5"/>
       </a:accent3>
       <a:accent4>
-        <a:srgbClr val="9C5000"/>
+        <a:srgbClr val="FFC000"/>
       </a:accent4>
       <a:accent5>
-        <a:srgbClr val="006241"/>
+        <a:srgbClr val="5B9BD5"/>
       </a:accent5>
       <a:accent6>
-        <a:srgbClr val="6B6B6B"/>
+        <a:srgbClr val="70AD47"/>
       </a:accent6>
       <a:hlink>
-        <a:srgbClr val="00754A"/>
+        <a:srgbClr val="0563C1"/>
       </a:hlink>
       <a:folHlink>
-        <a:srgbClr val="5B3E8C"/>
+        <a:srgbClr val="954F72"/>
       </a:folHlink>
     </a:clrScheme>
-    <a:fontScheme name="QML Lecture">
+    <a:fontScheme name="Office">
       <a:majorFont>
         <a:latin typeface="Noto Sans KR"/>
         <a:ea typeface=""/>

--- a/practice/day3_slides/day3_practice_slides.pptx
+++ b/practice/day3_slides/day3_practice_slides.pptx
@@ -117,17 +117,17 @@
   <p:extLst>
     <p:ext uri="{521415D9-36F7-43E2-AB2F-B90AF26B5E84}">
       <p14:sectionLst xmlns:p14="http://schemas.microsoft.com/office/powerpoint/2010/main">
-        <p14:section name="표지" id="{b19301ea-18db-b650-f49a-951d67449e9a}">
+        <p14:section name="표지" id="{5d274f4f-678c-c1cd-09b8-1449d6221b3b}">
           <p14:sldIdLst>
             <p14:sldId id="256"/>
           </p14:sldIdLst>
         </p14:section>
-        <p14:section name="진행" id="{d7359419-68a6-0069-4a41-2584c9eef625}">
+        <p14:section name="진행" id="{15afec72-68c6-9bfe-803d-a7239bfe01a5}">
           <p14:sldIdLst>
             <p14:sldId id="257"/>
           </p14:sldIdLst>
         </p14:section>
-        <p14:section name="MediQ-GAN 구조" id="{b08c2b39-c691-8aba-0b39-84b669d44457}">
+        <p14:section name="MediQ-GAN 구조" id="{1cec99a8-3225-b495-185b-95ac5e66cf1d}">
           <p14:sldIdLst>
             <p14:sldId id="258"/>
             <p14:sldId id="259"/>
@@ -136,18 +136,18 @@
             <p14:sldId id="262"/>
           </p14:sldIdLst>
         </p14:section>
-        <p14:section name="미세조정" id="{aeb94d46-eac5-90ae-3ab4-fd77ec49a435}">
+        <p14:section name="미세조정" id="{f86af5d5-0494-d894-f9ed-329e6abd90de}">
           <p14:sldIdLst>
             <p14:sldId id="263"/>
           </p14:sldIdLst>
         </p14:section>
-        <p14:section name="비교" id="{1621424e-00cb-36bc-659d-b8da519fed64}">
+        <p14:section name="비교" id="{ea2bc517-05b1-eeaa-9a52-cd82b7312cd5}">
           <p14:sldIdLst>
             <p14:sldId id="264"/>
             <p14:sldId id="265"/>
           </p14:sldIdLst>
         </p14:section>
-        <p14:section name="정리" id="{43a00be5-7250-b035-3433-0fcdbaaf2355}">
+        <p14:section name="정리" id="{54d4bd9d-b70c-0ebe-1c30-8d815fe76d8e}">
           <p14:sldIdLst>
             <p14:sldId id="266"/>
           </p14:sldIdLst>
@@ -1434,7 +1434,7 @@
             <a:r>
               <a:rPr lang="en-US" dirty="0"/>
               <a:t>- 3일차는 학습 없이 checkpoint를 불러오는 셀이 대부분이라 수 초 안에 끝남.
-- 시간이 걸리는 셀: §3 구조 확인(16큐빗 회로 5개 forward, 십여 초), §4 미세조정 20 step(로컬 실측 약 7분, Colab은 더 걸림).
+- 시간이 걸리는 셀: §3 구조 확인(16큐빗 회로 5개 forward, 십여 초), §4 미세조정 20 step(로컬 실측 약 7분, Colab 무료 CPU 실측 13.8분).
 - 진행 로그의 '남은 예상' 시간을 보고 step 수를 줄여도 됨.</a:t>
             </a:r>
             <a:endParaRPr lang="en-US" dirty="0"/>
@@ -6831,7 +6831,7 @@
                             <a:srgbClr val="00754A"/>
                           </a:solidFill>
                         </a:rPr>
-                        <a:t>약 7분 (로컬 CPU)</a:t>
+                        <a:t>로컬 약 7분 · Colab 약 14분</a:t>
                       </a:r>
                       <a:endParaRPr lang="en-US" sz="1300" dirty="0"/>
                     </a:p>

--- a/practice/day3_slides/day3_practice_slides.pptx
+++ b/practice/day3_slides/day3_practice_slides.pptx
@@ -117,17 +117,17 @@
   <p:extLst>
     <p:ext uri="{521415D9-36F7-43E2-AB2F-B90AF26B5E84}">
       <p14:sectionLst xmlns:p14="http://schemas.microsoft.com/office/powerpoint/2010/main">
-        <p14:section name="표지" id="{5d274f4f-678c-c1cd-09b8-1449d6221b3b}">
+        <p14:section name="표지" id="{8cb87547-1451-9c03-2bcc-86c7bab85140}">
           <p14:sldIdLst>
             <p14:sldId id="256"/>
           </p14:sldIdLst>
         </p14:section>
-        <p14:section name="진행" id="{15afec72-68c6-9bfe-803d-a7239bfe01a5}">
+        <p14:section name="진행" id="{0932a4ae-13fa-8e23-4296-44e937f1c23e}">
           <p14:sldIdLst>
             <p14:sldId id="257"/>
           </p14:sldIdLst>
         </p14:section>
-        <p14:section name="MediQ-GAN 구조" id="{1cec99a8-3225-b495-185b-95ac5e66cf1d}">
+        <p14:section name="MediQ-GAN 구조" id="{267f5c82-02a0-0067-b16b-1ddfa61d589f}">
           <p14:sldIdLst>
             <p14:sldId id="258"/>
             <p14:sldId id="259"/>
@@ -136,18 +136,18 @@
             <p14:sldId id="262"/>
           </p14:sldIdLst>
         </p14:section>
-        <p14:section name="미세조정" id="{f86af5d5-0494-d894-f9ed-329e6abd90de}">
+        <p14:section name="미세조정" id="{bfa64b21-7fe1-708e-ccae-90b8a0201a4d}">
           <p14:sldIdLst>
             <p14:sldId id="263"/>
           </p14:sldIdLst>
         </p14:section>
-        <p14:section name="비교" id="{ea2bc517-05b1-eeaa-9a52-cd82b7312cd5}">
+        <p14:section name="비교" id="{7b1efddc-1004-aac1-3104-9c6bbdbcac8c}">
           <p14:sldIdLst>
             <p14:sldId id="264"/>
             <p14:sldId id="265"/>
           </p14:sldIdLst>
         </p14:section>
-        <p14:section name="정리" id="{54d4bd9d-b70c-0ebe-1c30-8d815fe76d8e}">
+        <p14:section name="정리" id="{8f101591-7c59-e2c0-c197-a9faf164556d}">
           <p14:sldIdLst>
             <p14:sldId id="266"/>
           </p14:sldIdLst>
@@ -1614,7 +1614,7 @@
           <a:p>
             <a:r>
               <a:rPr lang="en-US" dirty="0"/>
-              <a:t>- forward 코드: z[:, :half]는 고전 stream, z[:, half:]는 양자 stream으로 감(논문 Fig.2 'feature map split').
+              <a:t>- forward 코드: z[:, :half]는 고전 stream, z[:, half:]는 양자 stream으로 감(논문 Fig. 1 'Feature Split').
 - 고전 stream은 128 → 32 → 128 MLP. 논문은 conv encoder지만 16×16 저해상도라 MLP로 단순화함.
 - 양자 stream은 128차원을 4×4 = 16 site(site당 8차원)로 보고, site [0, 4, 8, 11, 15]만 회로 5개가 하나씩 처리함. 나머지 11칸은 0.
 - 양자 stream 출력은 16채널 × 4×4 = 256차원. 고전 128과 concat하면 384차원.
